--- a/docs/Infraestructura_Viva_Presentacion.pptx
+++ b/docs/Infraestructura_Viva_Presentacion.pptx
@@ -4,6 +4,9 @@
   <p:sldMasterIdLst>
     <p:sldMasterId id="2147483648" r:id="rId1"/>
   </p:sldMasterIdLst>
+  <p:notesMasterIdLst>
+    <p:notesMasterId r:id="rId13"/>
+  </p:notesMasterIdLst>
   <p:sldIdLst>
     <p:sldId id="256" r:id="rId2"/>
     <p:sldId id="257" r:id="rId3"/>
@@ -17,9 +20,6 @@
     <p:sldId id="265" r:id="rId11"/>
     <p:sldId id="266" r:id="rId12"/>
   </p:sldIdLst>
-  <p:notesMasterIdLst>
-    <p:notesMasterId r:id="rId13"/>
-  </p:notesMasterIdLst>
   <p:sldSz cx="12192000" cy="6858000"/>
   <p:notesSz cx="6858000" cy="12192000"/>
   <p:defaultTextStyle>
@@ -114,6 +114,11 @@
       </a:defRPr>
     </a:lvl9pPr>
   </p:defaultTextStyle>
+  <p:extLst>
+    <p:ext uri="{EFAFB233-063F-42B5-8137-9DF3F51BA10A}">
+      <p15:sldGuideLst xmlns:p15="http://schemas.microsoft.com/office/powerpoint/2012/main"/>
+    </p:ext>
+  </p:extLst>
 </p:presentation>
 </file>
 
@@ -139,234 +144,10 @@
           <a:chExt cx="0" cy="0"/>
         </a:xfrm>
       </p:grpSpPr>
-      <p:sp>
-        <p:nvSpPr>
-          <p:cNvPr id="2" name="Header Placeholder 1"/>
-          <p:cNvSpPr>
-            <a:spLocks noGrp="1"/>
-          </p:cNvSpPr>
-          <p:nvPr>
-            <p:ph type="hdr" sz="quarter"/>
-          </p:nvPr>
-        </p:nvSpPr>
-        <p:spPr>
-          <a:xfrm>
-            <a:off x="0" y="0"/>
-            <a:ext cx="2971800" cy="458788"/>
-          </a:xfrm>
-          <a:prstGeom prst="rect">
-            <a:avLst/>
-          </a:prstGeom>
-        </p:spPr>
-        <p:txBody>
-          <a:bodyPr vert="horz" lIns="91440" tIns="45720" rIns="91440" bIns="45720" rtlCol="0"/>
-          <a:lstStyle>
-            <a:lvl1pPr algn="l">
-              <a:defRPr sz="1200"/>
-            </a:lvl1pPr>
-          </a:lstStyle>
-          <a:p>
-            <a:endParaRPr lang="en-US"/>
-          </a:p>
-        </p:txBody>
-      </p:sp>
-      <p:sp>
-        <p:nvSpPr>
-          <p:cNvPr id="3" name="Date Placeholder 2"/>
-          <p:cNvSpPr>
-            <a:spLocks noGrp="1"/>
-          </p:cNvSpPr>
-          <p:nvPr>
-            <p:ph type="dt" idx="1"/>
-          </p:nvPr>
-        </p:nvSpPr>
-        <p:spPr>
-          <a:xfrm>
-            <a:off x="3884613" y="0"/>
-            <a:ext cx="2971800" cy="458788"/>
-          </a:xfrm>
-          <a:prstGeom prst="rect">
-            <a:avLst/>
-          </a:prstGeom>
-        </p:spPr>
-        <p:txBody>
-          <a:bodyPr vert="horz" lIns="91440" tIns="45720" rIns="91440" bIns="45720" rtlCol="0"/>
-          <a:lstStyle>
-            <a:lvl1pPr algn="r">
-              <a:defRPr sz="1200"/>
-            </a:lvl1pPr>
-          </a:lstStyle>
-          <a:p>
-            <a:fld id="{5282F153-3F37-0F45-9E97-73ACFA13230C}" type="datetimeFigureOut">
-              <a:rPr lang="en-US"/>
-              <a:t>7/23/19</a:t>
-            </a:fld>
-            <a:endParaRPr lang="en-US"/>
-          </a:p>
-        </p:txBody>
-      </p:sp>
-      <p:sp>
-        <p:nvSpPr>
-          <p:cNvPr id="4" name="Slide Image Placeholder 3"/>
-          <p:cNvSpPr>
-            <a:spLocks noGrp="1" noRot="1" noChangeAspect="1"/>
-          </p:cNvSpPr>
-          <p:nvPr>
-            <p:ph type="sldImg" idx="2"/>
-          </p:nvPr>
-        </p:nvSpPr>
-        <p:spPr>
-          <a:xfrm>
-            <a:off x="685800" y="1143000"/>
-            <a:ext cx="5486400" cy="3086100"/>
-          </a:xfrm>
-          <a:prstGeom prst="rect">
-            <a:avLst/>
-          </a:prstGeom>
-          <a:noFill/>
-          <a:ln w="12700">
-            <a:solidFill>
-              <a:prstClr val="black"/>
-            </a:solidFill>
-          </a:ln>
-        </p:spPr>
-        <p:txBody>
-          <a:bodyPr vert="horz" lIns="91440" tIns="45720" rIns="91440" bIns="45720" rtlCol="0" anchor="ctr"/>
-          <a:lstStyle/>
-          <a:p>
-            <a:endParaRPr lang="en-US"/>
-          </a:p>
-        </p:txBody>
-      </p:sp>
-      <p:sp>
-        <p:nvSpPr>
-          <p:cNvPr id="5" name="Notes Placeholder 4"/>
-          <p:cNvSpPr>
-            <a:spLocks noGrp="1"/>
-          </p:cNvSpPr>
-          <p:nvPr>
-            <p:ph type="body" sz="quarter" idx="3"/>
-          </p:nvPr>
-        </p:nvSpPr>
-        <p:spPr>
-          <a:xfrm>
-            <a:off x="685800" y="4400550"/>
-            <a:ext cx="5486400" cy="3600450"/>
-          </a:xfrm>
-          <a:prstGeom prst="rect">
-            <a:avLst/>
-          </a:prstGeom>
-        </p:spPr>
-        <p:txBody>
-          <a:bodyPr vert="horz" lIns="91440" tIns="45720" rIns="91440" bIns="45720" rtlCol="0"/>
-          <a:lstStyle/>
-          <a:p>
-            <a:pPr lvl="0"/>
-            <a:r>
-              <a:rPr lang="en-US"/>
-              <a:t>Click to edit Master text styles</a:t>
-            </a:r>
-          </a:p>
-          <a:p>
-            <a:pPr lvl="1"/>
-            <a:r>
-              <a:rPr lang="en-US"/>
-              <a:t>Second level</a:t>
-            </a:r>
-          </a:p>
-          <a:p>
-            <a:pPr lvl="2"/>
-            <a:r>
-              <a:rPr lang="en-US"/>
-              <a:t>Third level</a:t>
-            </a:r>
-          </a:p>
-          <a:p>
-            <a:pPr lvl="3"/>
-            <a:r>
-              <a:rPr lang="en-US"/>
-              <a:t>Fourth level</a:t>
-            </a:r>
-          </a:p>
-          <a:p>
-            <a:pPr lvl="4"/>
-            <a:r>
-              <a:rPr lang="en-US"/>
-              <a:t>Fifth level</a:t>
-            </a:r>
-          </a:p>
-        </p:txBody>
-      </p:sp>
-      <p:sp>
-        <p:nvSpPr>
-          <p:cNvPr id="6" name="Footer Placeholder 5"/>
-          <p:cNvSpPr>
-            <a:spLocks noGrp="1"/>
-          </p:cNvSpPr>
-          <p:nvPr>
-            <p:ph type="ftr" sz="quarter" idx="4"/>
-          </p:nvPr>
-        </p:nvSpPr>
-        <p:spPr>
-          <a:xfrm>
-            <a:off x="0" y="8685213"/>
-            <a:ext cx="2971800" cy="458787"/>
-          </a:xfrm>
-          <a:prstGeom prst="rect">
-            <a:avLst/>
-          </a:prstGeom>
-        </p:spPr>
-        <p:txBody>
-          <a:bodyPr vert="horz" lIns="91440" tIns="45720" rIns="91440" bIns="45720" rtlCol="0" anchor="b"/>
-          <a:lstStyle>
-            <a:lvl1pPr algn="l">
-              <a:defRPr sz="1200"/>
-            </a:lvl1pPr>
-          </a:lstStyle>
-          <a:p>
-            <a:endParaRPr lang="en-US"/>
-          </a:p>
-        </p:txBody>
-      </p:sp>
-      <p:sp>
-        <p:nvSpPr>
-          <p:cNvPr id="7" name="Slide Number Placeholder 6"/>
-          <p:cNvSpPr>
-            <a:spLocks noGrp="1"/>
-          </p:cNvSpPr>
-          <p:nvPr>
-            <p:ph type="sldNum" sz="quarter" idx="5"/>
-          </p:nvPr>
-        </p:nvSpPr>
-        <p:spPr>
-          <a:xfrm>
-            <a:off x="3884613" y="8685213"/>
-            <a:ext cx="2971800" cy="458787"/>
-          </a:xfrm>
-          <a:prstGeom prst="rect">
-            <a:avLst/>
-          </a:prstGeom>
-        </p:spPr>
-        <p:txBody>
-          <a:bodyPr vert="horz" lIns="91440" tIns="45720" rIns="91440" bIns="45720" rtlCol="0" anchor="b"/>
-          <a:lstStyle>
-            <a:lvl1pPr algn="r">
-              <a:defRPr sz="1200"/>
-            </a:lvl1pPr>
-          </a:lstStyle>
-          <a:p>
-            <a:fld id="{CE5E9CC1-C706-0F49-92D6-E571CC5EEA8F}" type="slidenum">
-              <a:rPr lang="en-US"/>
-              <a:t>‹#›</a:t>
-            </a:fld>
-            <a:endParaRPr lang="en-US"/>
-          </a:p>
-        </p:txBody>
-      </p:sp>
     </p:spTree>
     <p:extLst>
       <p:ext uri="{BB962C8B-B14F-4D97-AF65-F5344CB8AC3E}">
-        <p14:creationId xmlns:p14="http://schemas.microsoft.com/office/powerpoint/2010/main" val="1024086991"/>
+        <p14:creationId xmlns:p14="http://schemas.microsoft.com/office/powerpoint/2010/main" val="3252066785"/>
       </p:ext>
     </p:extLst>
   </p:cSld>
@@ -510,10 +291,6 @@
           <a:bodyPr/>
           <a:lstStyle/>
           <a:p>
-            <a:r>
-              <a:rPr lang="en-US" dirty="0"/>
-              <a:t/>
-            </a:r>
             <a:endParaRPr lang="en-US" dirty="0"/>
           </a:p>
         </p:txBody>
@@ -598,10 +375,6 @@
           <a:bodyPr/>
           <a:lstStyle/>
           <a:p>
-            <a:r>
-              <a:rPr lang="en-US" dirty="0"/>
-              <a:t/>
-            </a:r>
             <a:endParaRPr lang="en-US" dirty="0"/>
           </a:p>
         </p:txBody>
@@ -686,10 +459,6 @@
           <a:bodyPr/>
           <a:lstStyle/>
           <a:p>
-            <a:r>
-              <a:rPr lang="en-US" dirty="0"/>
-              <a:t/>
-            </a:r>
             <a:endParaRPr lang="en-US" dirty="0"/>
           </a:p>
         </p:txBody>
@@ -774,10 +543,6 @@
           <a:bodyPr/>
           <a:lstStyle/>
           <a:p>
-            <a:r>
-              <a:rPr lang="en-US" dirty="0"/>
-              <a:t/>
-            </a:r>
             <a:endParaRPr lang="en-US" dirty="0"/>
           </a:p>
         </p:txBody>
@@ -862,10 +627,6 @@
           <a:bodyPr/>
           <a:lstStyle/>
           <a:p>
-            <a:r>
-              <a:rPr lang="en-US" dirty="0"/>
-              <a:t/>
-            </a:r>
             <a:endParaRPr lang="en-US" dirty="0"/>
           </a:p>
         </p:txBody>
@@ -950,10 +711,6 @@
           <a:bodyPr/>
           <a:lstStyle/>
           <a:p>
-            <a:r>
-              <a:rPr lang="en-US" dirty="0"/>
-              <a:t/>
-            </a:r>
             <a:endParaRPr lang="en-US" dirty="0"/>
           </a:p>
         </p:txBody>
@@ -1038,10 +795,6 @@
           <a:bodyPr/>
           <a:lstStyle/>
           <a:p>
-            <a:r>
-              <a:rPr lang="en-US" dirty="0"/>
-              <a:t/>
-            </a:r>
             <a:endParaRPr lang="en-US" dirty="0"/>
           </a:p>
         </p:txBody>
@@ -1126,10 +879,6 @@
           <a:bodyPr/>
           <a:lstStyle/>
           <a:p>
-            <a:r>
-              <a:rPr lang="en-US" dirty="0"/>
-              <a:t/>
-            </a:r>
             <a:endParaRPr lang="en-US" dirty="0"/>
           </a:p>
         </p:txBody>
@@ -1214,10 +963,6 @@
           <a:bodyPr/>
           <a:lstStyle/>
           <a:p>
-            <a:r>
-              <a:rPr lang="en-US" dirty="0"/>
-              <a:t/>
-            </a:r>
             <a:endParaRPr lang="en-US" dirty="0"/>
           </a:p>
         </p:txBody>
@@ -1302,10 +1047,6 @@
           <a:bodyPr/>
           <a:lstStyle/>
           <a:p>
-            <a:r>
-              <a:rPr lang="en-US" dirty="0"/>
-              <a:t/>
-            </a:r>
             <a:endParaRPr lang="en-US" dirty="0"/>
           </a:p>
         </p:txBody>
@@ -1390,10 +1131,6 @@
           <a:bodyPr/>
           <a:lstStyle/>
           <a:p>
-            <a:r>
-              <a:rPr lang="en-US" dirty="0"/>
-              <a:t/>
-            </a:r>
             <a:endParaRPr lang="en-US" dirty="0"/>
           </a:p>
         </p:txBody>
@@ -1467,6 +1204,11 @@
 <file path=ppt/slideMasters/slideMaster1.xml><?xml version="1.0" encoding="utf-8"?>
 <p:sldMaster xmlns:a="http://schemas.openxmlformats.org/drawingml/2006/main" xmlns:r="http://schemas.openxmlformats.org/officeDocument/2006/relationships" xmlns:p="http://schemas.openxmlformats.org/presentationml/2006/main">
   <p:cSld>
+    <p:bg>
+      <p:bgRef idx="1001">
+        <a:schemeClr val="bg1"/>
+      </p:bgRef>
+    </p:bg>
     <p:spTree>
       <p:nvGrpSpPr>
         <p:cNvPr id="1" name=""/>
@@ -1749,6 +1491,7 @@
         <a:solidFill>
           <a:srgbClr val="1F3864"/>
         </a:solidFill>
+        <a:effectLst/>
       </p:bgPr>
     </p:bg>
     <p:spTree>
@@ -1784,17 +1527,24 @@
           </a:solidFill>
           <a:ln/>
         </p:spPr>
+        <p:txBody>
+          <a:bodyPr/>
+          <a:lstStyle/>
+          <a:p>
+            <a:endParaRPr lang="es-CL"/>
+          </a:p>
+        </p:txBody>
       </p:sp>
       <p:pic>
         <p:nvPicPr>
-          <p:cNvPr id="3" name="Image 0" descr="preencoded.png">    </p:cNvPr>
+          <p:cNvPr id="3" name="Image 0" descr="preencoded.png"/>
           <p:cNvPicPr>
             <a:picLocks noChangeAspect="1"/>
           </p:cNvPicPr>
           <p:nvPr/>
         </p:nvPicPr>
         <p:blipFill>
-          <a:blip r:embed="rId1"/>
+          <a:blip r:embed="rId3"/>
           <a:stretch>
             <a:fillRect/>
           </a:stretch>
@@ -1830,11 +1580,11 @@
           <a:bodyPr wrap="square" lIns="0" tIns="0" rIns="0" bIns="0" rtlCol="0" anchor="ctr"/>
           <a:lstStyle/>
           <a:p>
-            <a:pPr algn="ctr" indent="0" marL="0">
-              <a:buNone/>
-            </a:pPr>
-            <a:r>
-              <a:rPr lang="en-US" sz="1500" b="1" spc="200" kern="0" dirty="0">
+            <a:pPr marL="0" indent="0" algn="ctr">
+              <a:buNone/>
+            </a:pPr>
+            <a:r>
+              <a:rPr lang="en-US" sz="1500" b="1" kern="0" spc="200" dirty="0">
                 <a:solidFill>
                   <a:srgbClr val="FF9900"/>
                 </a:solidFill>
@@ -1869,7 +1619,7 @@
           <a:bodyPr wrap="square" lIns="0" tIns="0" rIns="0" bIns="0" rtlCol="0" anchor="ctr"/>
           <a:lstStyle/>
           <a:p>
-            <a:pPr algn="ctr" indent="0" marL="0">
+            <a:pPr marL="0" indent="0" algn="ctr">
               <a:buNone/>
             </a:pPr>
             <a:r>
@@ -1908,7 +1658,7 @@
           <a:bodyPr wrap="square" lIns="0" tIns="0" rIns="0" bIns="0" rtlCol="0" anchor="ctr"/>
           <a:lstStyle/>
           <a:p>
-            <a:pPr algn="ctr" indent="0" marL="0">
+            <a:pPr marL="0" indent="0" algn="ctr">
               <a:buNone/>
             </a:pPr>
             <a:r>
@@ -1948,6 +1698,13 @@
             <a:prstDash val="solid"/>
           </a:ln>
         </p:spPr>
+        <p:txBody>
+          <a:bodyPr/>
+          <a:lstStyle/>
+          <a:p>
+            <a:endParaRPr lang="es-CL"/>
+          </a:p>
+        </p:txBody>
       </p:sp>
       <p:sp>
         <p:nvSpPr>
@@ -1970,7 +1727,7 @@
           <a:bodyPr wrap="square" lIns="0" tIns="0" rIns="0" bIns="0" rtlCol="0" anchor="ctr"/>
           <a:lstStyle/>
           <a:p>
-            <a:pPr algn="ctr" indent="0" marL="0">
+            <a:pPr marL="0" indent="0" algn="ctr">
               <a:buNone/>
             </a:pPr>
             <a:r>
@@ -2009,7 +1766,7 @@
           <a:bodyPr wrap="square" lIns="0" tIns="0" rIns="0" bIns="0" rtlCol="0" anchor="ctr"/>
           <a:lstStyle/>
           <a:p>
-            <a:pPr algn="ctr" indent="0" marL="0">
+            <a:pPr marL="0" indent="0" algn="ctr">
               <a:buNone/>
             </a:pPr>
             <a:r>
@@ -2048,7 +1805,7 @@
           <a:bodyPr wrap="square" lIns="0" tIns="0" rIns="0" bIns="0" rtlCol="0" anchor="ctr"/>
           <a:lstStyle/>
           <a:p>
-            <a:pPr algn="ctr" indent="0" marL="0">
+            <a:pPr marL="0" indent="0" algn="ctr">
               <a:buNone/>
             </a:pPr>
             <a:r>
@@ -2060,7 +1817,7 @@
                 <a:ea typeface="Arial" pitchFamily="34" charset="-122"/>
                 <a:cs typeface="Arial" pitchFamily="34" charset="-120"/>
               </a:rPr>
-              <a:t>MartLiz  ·  Junio 2026</a:t>
+              <a:t>GRUPO 01 ·  Junio 2026</a:t>
             </a:r>
             <a:endParaRPr lang="en-US" sz="1100" dirty="0"/>
           </a:p>
@@ -2082,6 +1839,7 @@
         <a:solidFill>
           <a:srgbClr val="FFFFFF"/>
         </a:solidFill>
+        <a:effectLst/>
       </p:bgPr>
     </p:bg>
     <p:spTree>
@@ -2119,7 +1877,7 @@
           <a:bodyPr wrap="square" lIns="0" tIns="0" rIns="0" bIns="0" rtlCol="0" anchor="ctr"/>
           <a:lstStyle/>
           <a:p>
-            <a:pPr indent="0" marL="0">
+            <a:pPr marL="0" indent="0">
               <a:buNone/>
             </a:pPr>
             <a:r>
@@ -2158,7 +1916,7 @@
           <a:bodyPr wrap="square" lIns="0" tIns="0" rIns="0" bIns="0" rtlCol="0" anchor="ctr"/>
           <a:lstStyle/>
           <a:p>
-            <a:pPr indent="0" marL="0">
+            <a:pPr marL="0" indent="0">
               <a:buNone/>
             </a:pPr>
             <a:r>
@@ -2195,254 +1953,17 @@
           </a:solidFill>
           <a:ln/>
         </p:spPr>
+        <p:txBody>
+          <a:bodyPr/>
+          <a:lstStyle/>
+          <a:p>
+            <a:endParaRPr lang="es-CL"/>
+          </a:p>
+        </p:txBody>
       </p:sp>
       <p:pic>
         <p:nvPicPr>
-          <p:cNvPr id="5" name="Image 0" descr="preencoded.png">    </p:cNvPr>
-          <p:cNvPicPr>
-            <a:picLocks noChangeAspect="1"/>
-          </p:cNvPicPr>
-          <p:nvPr/>
-        </p:nvPicPr>
-        <p:blipFill>
-          <a:blip r:embed="rId1"/>
-          <a:stretch>
-            <a:fillRect/>
-          </a:stretch>
-        </p:blipFill>
-        <p:spPr>
-          <a:xfrm>
-            <a:off x="667512" y="1947672"/>
-            <a:ext cx="219456" cy="219456"/>
-          </a:xfrm>
-          <a:prstGeom prst="rect">
-            <a:avLst/>
-          </a:prstGeom>
-        </p:spPr>
-      </p:pic>
-      <p:sp>
-        <p:nvSpPr>
-          <p:cNvPr id="6" name="Text 3"/>
-          <p:cNvSpPr/>
-          <p:nvPr/>
-        </p:nvSpPr>
-        <p:spPr>
-          <a:xfrm>
-            <a:off x="1188720" y="1828800"/>
-            <a:ext cx="2743200" cy="457200"/>
-          </a:xfrm>
-          <a:prstGeom prst="rect">
-            <a:avLst/>
-          </a:prstGeom>
-          <a:noFill/>
-          <a:ln/>
-        </p:spPr>
-        <p:txBody>
-          <a:bodyPr wrap="square" lIns="0" tIns="0" rIns="0" bIns="0" rtlCol="0" anchor="ctr"/>
-          <a:lstStyle/>
-          <a:p>
-            <a:pPr indent="0" marL="0">
-              <a:buNone/>
-            </a:pPr>
-            <a:r>
-              <a:rPr lang="en-US" sz="1300" b="1" dirty="0">
-                <a:solidFill>
-                  <a:srgbClr val="1F3864"/>
-                </a:solidFill>
-                <a:latin typeface="Arial" pitchFamily="34" charset="0"/>
-                <a:ea typeface="Arial" pitchFamily="34" charset="-122"/>
-                <a:cs typeface="Arial" pitchFamily="34" charset="-120"/>
-              </a:rPr>
-              <a:t>EC2 y RDS</a:t>
-            </a:r>
-            <a:endParaRPr lang="en-US" sz="1300" dirty="0"/>
-          </a:p>
-        </p:txBody>
-      </p:sp>
-      <p:sp>
-        <p:nvSpPr>
-          <p:cNvPr id="7" name="Text 4"/>
-          <p:cNvSpPr/>
-          <p:nvPr/>
-        </p:nvSpPr>
-        <p:spPr>
-          <a:xfrm>
-            <a:off x="4023360" y="1828800"/>
-            <a:ext cx="7772400" cy="457200"/>
-          </a:xfrm>
-          <a:prstGeom prst="rect">
-            <a:avLst/>
-          </a:prstGeom>
-          <a:noFill/>
-          <a:ln/>
-        </p:spPr>
-        <p:txBody>
-          <a:bodyPr wrap="square" lIns="0" tIns="0" rIns="0" bIns="0" rtlCol="0" anchor="ctr"/>
-          <a:lstStyle/>
-          <a:p>
-            <a:pPr indent="0" marL="0">
-              <a:buNone/>
-            </a:pPr>
-            <a:r>
-              <a:rPr lang="en-US" sz="1200" dirty="0">
-                <a:solidFill>
-                  <a:srgbClr val="1F2937"/>
-                </a:solidFill>
-                <a:latin typeface="Arial" pitchFamily="34" charset="0"/>
-                <a:ea typeface="Arial" pitchFamily="34" charset="-122"/>
-                <a:cs typeface="Arial" pitchFamily="34" charset="-120"/>
-              </a:rPr>
-              <a:t>750 horas/mes gratis durante 12 meses (t2/t3.micro, db.t3.micro)</a:t>
-            </a:r>
-            <a:endParaRPr lang="en-US" sz="1200" dirty="0"/>
-          </a:p>
-        </p:txBody>
-      </p:sp>
-      <p:sp>
-        <p:nvSpPr>
-          <p:cNvPr id="8" name="Shape 5"/>
-          <p:cNvSpPr/>
-          <p:nvPr/>
-        </p:nvSpPr>
-        <p:spPr>
-          <a:xfrm>
-            <a:off x="548640" y="2606040"/>
-            <a:ext cx="457200" cy="457200"/>
-          </a:xfrm>
-          <a:prstGeom prst="ellipse">
-            <a:avLst/>
-          </a:prstGeom>
-          <a:solidFill>
-            <a:srgbClr val="EAF1F8"/>
-          </a:solidFill>
-          <a:ln/>
-        </p:spPr>
-      </p:sp>
-      <p:pic>
-        <p:nvPicPr>
-          <p:cNvPr id="9" name="Image 1" descr="preencoded.png">    </p:cNvPr>
-          <p:cNvPicPr>
-            <a:picLocks noChangeAspect="1"/>
-          </p:cNvPicPr>
-          <p:nvPr/>
-        </p:nvPicPr>
-        <p:blipFill>
-          <a:blip r:embed="rId2"/>
-          <a:stretch>
-            <a:fillRect/>
-          </a:stretch>
-        </p:blipFill>
-        <p:spPr>
-          <a:xfrm>
-            <a:off x="667512" y="2724912"/>
-            <a:ext cx="219456" cy="219456"/>
-          </a:xfrm>
-          <a:prstGeom prst="rect">
-            <a:avLst/>
-          </a:prstGeom>
-        </p:spPr>
-      </p:pic>
-      <p:sp>
-        <p:nvSpPr>
-          <p:cNvPr id="10" name="Text 6"/>
-          <p:cNvSpPr/>
-          <p:nvPr/>
-        </p:nvSpPr>
-        <p:spPr>
-          <a:xfrm>
-            <a:off x="1188720" y="2606040"/>
-            <a:ext cx="2743200" cy="457200"/>
-          </a:xfrm>
-          <a:prstGeom prst="rect">
-            <a:avLst/>
-          </a:prstGeom>
-          <a:noFill/>
-          <a:ln/>
-        </p:spPr>
-        <p:txBody>
-          <a:bodyPr wrap="square" lIns="0" tIns="0" rIns="0" bIns="0" rtlCol="0" anchor="ctr"/>
-          <a:lstStyle/>
-          <a:p>
-            <a:pPr indent="0" marL="0">
-              <a:buNone/>
-            </a:pPr>
-            <a:r>
-              <a:rPr lang="en-US" sz="1300" b="1" dirty="0">
-                <a:solidFill>
-                  <a:srgbClr val="1F3864"/>
-                </a:solidFill>
-                <a:latin typeface="Arial" pitchFamily="34" charset="0"/>
-                <a:ea typeface="Arial" pitchFamily="34" charset="-122"/>
-                <a:cs typeface="Arial" pitchFamily="34" charset="-120"/>
-              </a:rPr>
-              <a:t>Lambda</a:t>
-            </a:r>
-            <a:endParaRPr lang="en-US" sz="1300" dirty="0"/>
-          </a:p>
-        </p:txBody>
-      </p:sp>
-      <p:sp>
-        <p:nvSpPr>
-          <p:cNvPr id="11" name="Text 7"/>
-          <p:cNvSpPr/>
-          <p:nvPr/>
-        </p:nvSpPr>
-        <p:spPr>
-          <a:xfrm>
-            <a:off x="4023360" y="2606040"/>
-            <a:ext cx="7772400" cy="457200"/>
-          </a:xfrm>
-          <a:prstGeom prst="rect">
-            <a:avLst/>
-          </a:prstGeom>
-          <a:noFill/>
-          <a:ln/>
-        </p:spPr>
-        <p:txBody>
-          <a:bodyPr wrap="square" lIns="0" tIns="0" rIns="0" bIns="0" rtlCol="0" anchor="ctr"/>
-          <a:lstStyle/>
-          <a:p>
-            <a:pPr indent="0" marL="0">
-              <a:buNone/>
-            </a:pPr>
-            <a:r>
-              <a:rPr lang="en-US" sz="1200" dirty="0">
-                <a:solidFill>
-                  <a:srgbClr val="1F2937"/>
-                </a:solidFill>
-                <a:latin typeface="Arial" pitchFamily="34" charset="0"/>
-                <a:ea typeface="Arial" pitchFamily="34" charset="-122"/>
-                <a:cs typeface="Arial" pitchFamily="34" charset="-120"/>
-              </a:rPr>
-              <a:t>1M de invocaciones al mes, sin fecha de expiración</a:t>
-            </a:r>
-            <a:endParaRPr lang="en-US" sz="1200" dirty="0"/>
-          </a:p>
-        </p:txBody>
-      </p:sp>
-      <p:sp>
-        <p:nvSpPr>
-          <p:cNvPr id="12" name="Shape 8"/>
-          <p:cNvSpPr/>
-          <p:nvPr/>
-        </p:nvSpPr>
-        <p:spPr>
-          <a:xfrm>
-            <a:off x="548640" y="3383280"/>
-            <a:ext cx="457200" cy="457200"/>
-          </a:xfrm>
-          <a:prstGeom prst="ellipse">
-            <a:avLst/>
-          </a:prstGeom>
-          <a:solidFill>
-            <a:srgbClr val="EAF1F8"/>
-          </a:solidFill>
-          <a:ln/>
-        </p:spPr>
-      </p:sp>
-      <p:pic>
-        <p:nvPicPr>
-          <p:cNvPr id="13" name="Image 2" descr="preencoded.png">    </p:cNvPr>
+          <p:cNvPr id="5" name="Image 0" descr="preencoded.png"/>
           <p:cNvPicPr>
             <a:picLocks noChangeAspect="1"/>
           </p:cNvPicPr>
@@ -2456,7 +1977,7 @@
         </p:blipFill>
         <p:spPr>
           <a:xfrm>
-            <a:off x="667512" y="3502152"/>
+            <a:off x="667512" y="1947672"/>
             <a:ext cx="219456" cy="219456"/>
           </a:xfrm>
           <a:prstGeom prst="rect">
@@ -2466,13 +1987,13 @@
       </p:pic>
       <p:sp>
         <p:nvSpPr>
-          <p:cNvPr id="14" name="Text 9"/>
-          <p:cNvSpPr/>
-          <p:nvPr/>
-        </p:nvSpPr>
-        <p:spPr>
-          <a:xfrm>
-            <a:off x="1188720" y="3383280"/>
+          <p:cNvPr id="6" name="Text 3"/>
+          <p:cNvSpPr/>
+          <p:nvPr/>
+        </p:nvSpPr>
+        <p:spPr>
+          <a:xfrm>
+            <a:off x="1188720" y="1828800"/>
             <a:ext cx="2743200" cy="457200"/>
           </a:xfrm>
           <a:prstGeom prst="rect">
@@ -2485,7 +2006,7 @@
           <a:bodyPr wrap="square" lIns="0" tIns="0" rIns="0" bIns="0" rtlCol="0" anchor="ctr"/>
           <a:lstStyle/>
           <a:p>
-            <a:pPr indent="0" marL="0">
+            <a:pPr marL="0" indent="0">
               <a:buNone/>
             </a:pPr>
             <a:r>
@@ -2497,7 +2018,7 @@
                 <a:ea typeface="Arial" pitchFamily="34" charset="-122"/>
                 <a:cs typeface="Arial" pitchFamily="34" charset="-120"/>
               </a:rPr>
-              <a:t>DynamoDB</a:t>
+              <a:t>EC2 y RDS</a:t>
             </a:r>
             <a:endParaRPr lang="en-US" sz="1300" dirty="0"/>
           </a:p>
@@ -2505,13 +2026,13 @@
       </p:sp>
       <p:sp>
         <p:nvSpPr>
-          <p:cNvPr id="15" name="Text 10"/>
-          <p:cNvSpPr/>
-          <p:nvPr/>
-        </p:nvSpPr>
-        <p:spPr>
-          <a:xfrm>
-            <a:off x="4023360" y="3383280"/>
+          <p:cNvPr id="7" name="Text 4"/>
+          <p:cNvSpPr/>
+          <p:nvPr/>
+        </p:nvSpPr>
+        <p:spPr>
+          <a:xfrm>
+            <a:off x="4023360" y="1828800"/>
             <a:ext cx="7772400" cy="457200"/>
           </a:xfrm>
           <a:prstGeom prst="rect">
@@ -2524,7 +2045,7 @@
           <a:bodyPr wrap="square" lIns="0" tIns="0" rIns="0" bIns="0" rtlCol="0" anchor="ctr"/>
           <a:lstStyle/>
           <a:p>
-            <a:pPr indent="0" marL="0">
+            <a:pPr marL="0" indent="0">
               <a:buNone/>
             </a:pPr>
             <a:r>
@@ -2536,7 +2057,7 @@
                 <a:ea typeface="Arial" pitchFamily="34" charset="-122"/>
                 <a:cs typeface="Arial" pitchFamily="34" charset="-120"/>
               </a:rPr>
-              <a:t>25 GB de almacenamiento, sin fecha de expiración</a:t>
+              <a:t>750 horas/mes gratis durante 12 meses (t2/t3.micro, db.t3.micro)</a:t>
             </a:r>
             <a:endParaRPr lang="en-US" sz="1200" dirty="0"/>
           </a:p>
@@ -2544,13 +2065,13 @@
       </p:sp>
       <p:sp>
         <p:nvSpPr>
-          <p:cNvPr id="16" name="Shape 11"/>
-          <p:cNvSpPr/>
-          <p:nvPr/>
-        </p:nvSpPr>
-        <p:spPr>
-          <a:xfrm>
-            <a:off x="548640" y="4160520"/>
+          <p:cNvPr id="8" name="Shape 5"/>
+          <p:cNvSpPr/>
+          <p:nvPr/>
+        </p:nvSpPr>
+        <p:spPr>
+          <a:xfrm>
+            <a:off x="548640" y="2606040"/>
             <a:ext cx="457200" cy="457200"/>
           </a:xfrm>
           <a:prstGeom prst="ellipse">
@@ -2561,24 +2082,31 @@
           </a:solidFill>
           <a:ln/>
         </p:spPr>
+        <p:txBody>
+          <a:bodyPr/>
+          <a:lstStyle/>
+          <a:p>
+            <a:endParaRPr lang="es-CL"/>
+          </a:p>
+        </p:txBody>
       </p:sp>
       <p:pic>
         <p:nvPicPr>
-          <p:cNvPr id="17" name="Image 3" descr="preencoded.png">    </p:cNvPr>
+          <p:cNvPr id="9" name="Image 1" descr="preencoded.png"/>
           <p:cNvPicPr>
             <a:picLocks noChangeAspect="1"/>
           </p:cNvPicPr>
           <p:nvPr/>
         </p:nvPicPr>
         <p:blipFill>
-          <a:blip r:embed="rId4"/>
+          <a:blip r:embed="rId3"/>
           <a:stretch>
             <a:fillRect/>
           </a:stretch>
         </p:blipFill>
         <p:spPr>
           <a:xfrm>
-            <a:off x="667512" y="4279392"/>
+            <a:off x="667512" y="2724912"/>
             <a:ext cx="219456" cy="219456"/>
           </a:xfrm>
           <a:prstGeom prst="rect">
@@ -2588,13 +2116,13 @@
       </p:pic>
       <p:sp>
         <p:nvSpPr>
-          <p:cNvPr id="18" name="Text 12"/>
-          <p:cNvSpPr/>
-          <p:nvPr/>
-        </p:nvSpPr>
-        <p:spPr>
-          <a:xfrm>
-            <a:off x="1188720" y="4160520"/>
+          <p:cNvPr id="10" name="Text 6"/>
+          <p:cNvSpPr/>
+          <p:nvPr/>
+        </p:nvSpPr>
+        <p:spPr>
+          <a:xfrm>
+            <a:off x="1188720" y="2606040"/>
             <a:ext cx="2743200" cy="457200"/>
           </a:xfrm>
           <a:prstGeom prst="rect">
@@ -2607,7 +2135,7 @@
           <a:bodyPr wrap="square" lIns="0" tIns="0" rIns="0" bIns="0" rtlCol="0" anchor="ctr"/>
           <a:lstStyle/>
           <a:p>
-            <a:pPr indent="0" marL="0">
+            <a:pPr marL="0" indent="0">
               <a:buNone/>
             </a:pPr>
             <a:r>
@@ -2619,7 +2147,7 @@
                 <a:ea typeface="Arial" pitchFamily="34" charset="-122"/>
                 <a:cs typeface="Arial" pitchFamily="34" charset="-120"/>
               </a:rPr>
-              <a:t>S3 + CloudFront</a:t>
+              <a:t>Lambda</a:t>
             </a:r>
             <a:endParaRPr lang="en-US" sz="1300" dirty="0"/>
           </a:p>
@@ -2627,13 +2155,13 @@
       </p:sp>
       <p:sp>
         <p:nvSpPr>
-          <p:cNvPr id="19" name="Text 13"/>
-          <p:cNvSpPr/>
-          <p:nvPr/>
-        </p:nvSpPr>
-        <p:spPr>
-          <a:xfrm>
-            <a:off x="4023360" y="4160520"/>
+          <p:cNvPr id="11" name="Text 7"/>
+          <p:cNvSpPr/>
+          <p:nvPr/>
+        </p:nvSpPr>
+        <p:spPr>
+          <a:xfrm>
+            <a:off x="4023360" y="2606040"/>
             <a:ext cx="7772400" cy="457200"/>
           </a:xfrm>
           <a:prstGeom prst="rect">
@@ -2646,7 +2174,7 @@
           <a:bodyPr wrap="square" lIns="0" tIns="0" rIns="0" bIns="0" rtlCol="0" anchor="ctr"/>
           <a:lstStyle/>
           <a:p>
-            <a:pPr indent="0" marL="0">
+            <a:pPr marL="0" indent="0">
               <a:buNone/>
             </a:pPr>
             <a:r>
@@ -2658,7 +2186,7 @@
                 <a:ea typeface="Arial" pitchFamily="34" charset="-122"/>
                 <a:cs typeface="Arial" pitchFamily="34" charset="-120"/>
               </a:rPr>
-              <a:t>5 GB de S3 y 1 TB de transferencia saliente, 12 meses</a:t>
+              <a:t>1M de invocaciones al mes, sin fecha de expiración</a:t>
             </a:r>
             <a:endParaRPr lang="en-US" sz="1200" dirty="0"/>
           </a:p>
@@ -2666,13 +2194,13 @@
       </p:sp>
       <p:sp>
         <p:nvSpPr>
-          <p:cNvPr id="20" name="Shape 14"/>
-          <p:cNvSpPr/>
-          <p:nvPr/>
-        </p:nvSpPr>
-        <p:spPr>
-          <a:xfrm>
-            <a:off x="548640" y="4937760"/>
+          <p:cNvPr id="12" name="Shape 8"/>
+          <p:cNvSpPr/>
+          <p:nvPr/>
+        </p:nvSpPr>
+        <p:spPr>
+          <a:xfrm>
+            <a:off x="548640" y="3383280"/>
             <a:ext cx="457200" cy="457200"/>
           </a:xfrm>
           <a:prstGeom prst="ellipse">
@@ -2683,23 +2211,288 @@
           </a:solidFill>
           <a:ln/>
         </p:spPr>
+        <p:txBody>
+          <a:bodyPr/>
+          <a:lstStyle/>
+          <a:p>
+            <a:endParaRPr lang="es-CL"/>
+          </a:p>
+        </p:txBody>
       </p:sp>
       <p:pic>
         <p:nvPicPr>
-          <p:cNvPr id="21" name="Image 4" descr="preencoded.png">    </p:cNvPr>
+          <p:cNvPr id="13" name="Image 2" descr="preencoded.png"/>
           <p:cNvPicPr>
             <a:picLocks noChangeAspect="1"/>
           </p:cNvPicPr>
           <p:nvPr/>
         </p:nvPicPr>
         <p:blipFill>
-          <a:blip r:embed="rId5"/>
+          <a:blip r:embed="rId3"/>
           <a:stretch>
             <a:fillRect/>
           </a:stretch>
         </p:blipFill>
         <p:spPr>
           <a:xfrm>
+            <a:off x="667512" y="3502152"/>
+            <a:ext cx="219456" cy="219456"/>
+          </a:xfrm>
+          <a:prstGeom prst="rect">
+            <a:avLst/>
+          </a:prstGeom>
+        </p:spPr>
+      </p:pic>
+      <p:sp>
+        <p:nvSpPr>
+          <p:cNvPr id="14" name="Text 9"/>
+          <p:cNvSpPr/>
+          <p:nvPr/>
+        </p:nvSpPr>
+        <p:spPr>
+          <a:xfrm>
+            <a:off x="1188720" y="3383280"/>
+            <a:ext cx="2743200" cy="457200"/>
+          </a:xfrm>
+          <a:prstGeom prst="rect">
+            <a:avLst/>
+          </a:prstGeom>
+          <a:noFill/>
+          <a:ln/>
+        </p:spPr>
+        <p:txBody>
+          <a:bodyPr wrap="square" lIns="0" tIns="0" rIns="0" bIns="0" rtlCol="0" anchor="ctr"/>
+          <a:lstStyle/>
+          <a:p>
+            <a:pPr marL="0" indent="0">
+              <a:buNone/>
+            </a:pPr>
+            <a:r>
+              <a:rPr lang="en-US" sz="1300" b="1" dirty="0">
+                <a:solidFill>
+                  <a:srgbClr val="1F3864"/>
+                </a:solidFill>
+                <a:latin typeface="Arial" pitchFamily="34" charset="0"/>
+                <a:ea typeface="Arial" pitchFamily="34" charset="-122"/>
+                <a:cs typeface="Arial" pitchFamily="34" charset="-120"/>
+              </a:rPr>
+              <a:t>DynamoDB</a:t>
+            </a:r>
+            <a:endParaRPr lang="en-US" sz="1300" dirty="0"/>
+          </a:p>
+        </p:txBody>
+      </p:sp>
+      <p:sp>
+        <p:nvSpPr>
+          <p:cNvPr id="15" name="Text 10"/>
+          <p:cNvSpPr/>
+          <p:nvPr/>
+        </p:nvSpPr>
+        <p:spPr>
+          <a:xfrm>
+            <a:off x="4023360" y="3383280"/>
+            <a:ext cx="7772400" cy="457200"/>
+          </a:xfrm>
+          <a:prstGeom prst="rect">
+            <a:avLst/>
+          </a:prstGeom>
+          <a:noFill/>
+          <a:ln/>
+        </p:spPr>
+        <p:txBody>
+          <a:bodyPr wrap="square" lIns="0" tIns="0" rIns="0" bIns="0" rtlCol="0" anchor="ctr"/>
+          <a:lstStyle/>
+          <a:p>
+            <a:pPr marL="0" indent="0">
+              <a:buNone/>
+            </a:pPr>
+            <a:r>
+              <a:rPr lang="en-US" sz="1200" dirty="0">
+                <a:solidFill>
+                  <a:srgbClr val="1F2937"/>
+                </a:solidFill>
+                <a:latin typeface="Arial" pitchFamily="34" charset="0"/>
+                <a:ea typeface="Arial" pitchFamily="34" charset="-122"/>
+                <a:cs typeface="Arial" pitchFamily="34" charset="-120"/>
+              </a:rPr>
+              <a:t>25 GB de almacenamiento, sin fecha de expiración</a:t>
+            </a:r>
+            <a:endParaRPr lang="en-US" sz="1200" dirty="0"/>
+          </a:p>
+        </p:txBody>
+      </p:sp>
+      <p:sp>
+        <p:nvSpPr>
+          <p:cNvPr id="16" name="Shape 11"/>
+          <p:cNvSpPr/>
+          <p:nvPr/>
+        </p:nvSpPr>
+        <p:spPr>
+          <a:xfrm>
+            <a:off x="548640" y="4160520"/>
+            <a:ext cx="457200" cy="457200"/>
+          </a:xfrm>
+          <a:prstGeom prst="ellipse">
+            <a:avLst/>
+          </a:prstGeom>
+          <a:solidFill>
+            <a:srgbClr val="EAF1F8"/>
+          </a:solidFill>
+          <a:ln/>
+        </p:spPr>
+        <p:txBody>
+          <a:bodyPr/>
+          <a:lstStyle/>
+          <a:p>
+            <a:endParaRPr lang="es-CL"/>
+          </a:p>
+        </p:txBody>
+      </p:sp>
+      <p:pic>
+        <p:nvPicPr>
+          <p:cNvPr id="17" name="Image 3" descr="preencoded.png"/>
+          <p:cNvPicPr>
+            <a:picLocks noChangeAspect="1"/>
+          </p:cNvPicPr>
+          <p:nvPr/>
+        </p:nvPicPr>
+        <p:blipFill>
+          <a:blip r:embed="rId3"/>
+          <a:stretch>
+            <a:fillRect/>
+          </a:stretch>
+        </p:blipFill>
+        <p:spPr>
+          <a:xfrm>
+            <a:off x="667512" y="4279392"/>
+            <a:ext cx="219456" cy="219456"/>
+          </a:xfrm>
+          <a:prstGeom prst="rect">
+            <a:avLst/>
+          </a:prstGeom>
+        </p:spPr>
+      </p:pic>
+      <p:sp>
+        <p:nvSpPr>
+          <p:cNvPr id="18" name="Text 12"/>
+          <p:cNvSpPr/>
+          <p:nvPr/>
+        </p:nvSpPr>
+        <p:spPr>
+          <a:xfrm>
+            <a:off x="1188720" y="4160520"/>
+            <a:ext cx="2743200" cy="457200"/>
+          </a:xfrm>
+          <a:prstGeom prst="rect">
+            <a:avLst/>
+          </a:prstGeom>
+          <a:noFill/>
+          <a:ln/>
+        </p:spPr>
+        <p:txBody>
+          <a:bodyPr wrap="square" lIns="0" tIns="0" rIns="0" bIns="0" rtlCol="0" anchor="ctr"/>
+          <a:lstStyle/>
+          <a:p>
+            <a:pPr marL="0" indent="0">
+              <a:buNone/>
+            </a:pPr>
+            <a:r>
+              <a:rPr lang="en-US" sz="1300" b="1" dirty="0">
+                <a:solidFill>
+                  <a:srgbClr val="1F3864"/>
+                </a:solidFill>
+                <a:latin typeface="Arial" pitchFamily="34" charset="0"/>
+                <a:ea typeface="Arial" pitchFamily="34" charset="-122"/>
+                <a:cs typeface="Arial" pitchFamily="34" charset="-120"/>
+              </a:rPr>
+              <a:t>S3 + CloudFront</a:t>
+            </a:r>
+            <a:endParaRPr lang="en-US" sz="1300" dirty="0"/>
+          </a:p>
+        </p:txBody>
+      </p:sp>
+      <p:sp>
+        <p:nvSpPr>
+          <p:cNvPr id="19" name="Text 13"/>
+          <p:cNvSpPr/>
+          <p:nvPr/>
+        </p:nvSpPr>
+        <p:spPr>
+          <a:xfrm>
+            <a:off x="4023360" y="4160520"/>
+            <a:ext cx="7772400" cy="457200"/>
+          </a:xfrm>
+          <a:prstGeom prst="rect">
+            <a:avLst/>
+          </a:prstGeom>
+          <a:noFill/>
+          <a:ln/>
+        </p:spPr>
+        <p:txBody>
+          <a:bodyPr wrap="square" lIns="0" tIns="0" rIns="0" bIns="0" rtlCol="0" anchor="ctr"/>
+          <a:lstStyle/>
+          <a:p>
+            <a:pPr marL="0" indent="0">
+              <a:buNone/>
+            </a:pPr>
+            <a:r>
+              <a:rPr lang="en-US" sz="1200" dirty="0">
+                <a:solidFill>
+                  <a:srgbClr val="1F2937"/>
+                </a:solidFill>
+                <a:latin typeface="Arial" pitchFamily="34" charset="0"/>
+                <a:ea typeface="Arial" pitchFamily="34" charset="-122"/>
+                <a:cs typeface="Arial" pitchFamily="34" charset="-120"/>
+              </a:rPr>
+              <a:t>5 GB de S3 y 1 TB de transferencia saliente, 12 meses</a:t>
+            </a:r>
+            <a:endParaRPr lang="en-US" sz="1200" dirty="0"/>
+          </a:p>
+        </p:txBody>
+      </p:sp>
+      <p:sp>
+        <p:nvSpPr>
+          <p:cNvPr id="20" name="Shape 14"/>
+          <p:cNvSpPr/>
+          <p:nvPr/>
+        </p:nvSpPr>
+        <p:spPr>
+          <a:xfrm>
+            <a:off x="548640" y="4937760"/>
+            <a:ext cx="457200" cy="457200"/>
+          </a:xfrm>
+          <a:prstGeom prst="ellipse">
+            <a:avLst/>
+          </a:prstGeom>
+          <a:solidFill>
+            <a:srgbClr val="EAF1F8"/>
+          </a:solidFill>
+          <a:ln/>
+        </p:spPr>
+        <p:txBody>
+          <a:bodyPr/>
+          <a:lstStyle/>
+          <a:p>
+            <a:endParaRPr lang="es-CL"/>
+          </a:p>
+        </p:txBody>
+      </p:sp>
+      <p:pic>
+        <p:nvPicPr>
+          <p:cNvPr id="21" name="Image 4" descr="preencoded.png"/>
+          <p:cNvPicPr>
+            <a:picLocks noChangeAspect="1"/>
+          </p:cNvPicPr>
+          <p:nvPr/>
+        </p:nvPicPr>
+        <p:blipFill>
+          <a:blip r:embed="rId3"/>
+          <a:stretch>
+            <a:fillRect/>
+          </a:stretch>
+        </p:blipFill>
+        <p:spPr>
+          <a:xfrm>
             <a:off x="667512" y="5056632"/>
             <a:ext cx="219456" cy="219456"/>
           </a:xfrm>
@@ -2729,7 +2522,7 @@
           <a:bodyPr wrap="square" lIns="0" tIns="0" rIns="0" bIns="0" rtlCol="0" anchor="ctr"/>
           <a:lstStyle/>
           <a:p>
-            <a:pPr indent="0" marL="0">
+            <a:pPr marL="0" indent="0">
               <a:buNone/>
             </a:pPr>
             <a:r>
@@ -2768,7 +2561,7 @@
           <a:bodyPr wrap="square" lIns="0" tIns="0" rIns="0" bIns="0" rtlCol="0" anchor="ctr"/>
           <a:lstStyle/>
           <a:p>
-            <a:pPr indent="0" marL="0">
+            <a:pPr marL="0" indent="0">
               <a:buNone/>
             </a:pPr>
             <a:r>
@@ -2807,9 +2600,6 @@
           <a:bodyPr wrap="square" lIns="0" tIns="0" rIns="0" bIns="0" rtlCol="0" anchor="ctr"/>
           <a:lstStyle/>
           <a:p>
-            <a:pPr algn="l" indent="0" marL="0">
-              <a:buNone/>
-            </a:pPr>
             <a:r>
               <a:rPr lang="en-US" sz="1000" dirty="0">
                 <a:solidFill>
@@ -2819,7 +2609,18 @@
                 <a:ea typeface="Arial" pitchFamily="34" charset="-122"/>
                 <a:cs typeface="Arial" pitchFamily="34" charset="-120"/>
               </a:rPr>
-              <a:t>Infraestructura Viva  ·  Módulo 4  ·  Alkemy</a:t>
+              <a:t>Infraestructura Viva  ·  Módulo 4  · </a:t>
+            </a:r>
+            <a:r>
+              <a:rPr lang="en-US" sz="1000" dirty="0">
+                <a:solidFill>
+                  <a:srgbClr val="6E86AC"/>
+                </a:solidFill>
+                <a:latin typeface="Arial" pitchFamily="34" charset="0"/>
+                <a:ea typeface="Arial" pitchFamily="34" charset="-122"/>
+                <a:cs typeface="Arial" pitchFamily="34" charset="-120"/>
+              </a:rPr>
+              <a:t>GRUPO 01</a:t>
             </a:r>
             <a:endParaRPr lang="en-US" sz="1000" dirty="0"/>
           </a:p>
@@ -2846,7 +2647,7 @@
           <a:bodyPr wrap="square" lIns="0" tIns="0" rIns="0" bIns="0" rtlCol="0" anchor="ctr"/>
           <a:lstStyle/>
           <a:p>
-            <a:pPr algn="r" indent="0" marL="0">
+            <a:pPr marL="0" indent="0" algn="r">
               <a:buNone/>
             </a:pPr>
             <a:r>
@@ -2880,6 +2681,7 @@
         <a:solidFill>
           <a:srgbClr val="1F3864"/>
         </a:solidFill>
+        <a:effectLst/>
       </p:bgPr>
     </p:bg>
     <p:spTree>
@@ -2915,17 +2717,24 @@
           </a:solidFill>
           <a:ln/>
         </p:spPr>
+        <p:txBody>
+          <a:bodyPr/>
+          <a:lstStyle/>
+          <a:p>
+            <a:endParaRPr lang="es-CL"/>
+          </a:p>
+        </p:txBody>
       </p:sp>
       <p:pic>
         <p:nvPicPr>
-          <p:cNvPr id="3" name="Image 0" descr="preencoded.png">    </p:cNvPr>
+          <p:cNvPr id="3" name="Image 0" descr="preencoded.png"/>
           <p:cNvPicPr>
             <a:picLocks noChangeAspect="1"/>
           </p:cNvPicPr>
           <p:nvPr/>
         </p:nvPicPr>
         <p:blipFill>
-          <a:blip r:embed="rId1"/>
+          <a:blip r:embed="rId3"/>
           <a:stretch>
             <a:fillRect/>
           </a:stretch>
@@ -2961,7 +2770,7 @@
           <a:bodyPr wrap="square" lIns="0" tIns="0" rIns="0" bIns="0" rtlCol="0" anchor="ctr"/>
           <a:lstStyle/>
           <a:p>
-            <a:pPr algn="ctr" indent="0" marL="0">
+            <a:pPr marL="0" indent="0" algn="ctr">
               <a:buNone/>
             </a:pPr>
             <a:r>
@@ -3000,7 +2809,7 @@
           <a:bodyPr wrap="square" lIns="0" tIns="0" rIns="0" bIns="0" rtlCol="0" anchor="ctr"/>
           <a:lstStyle/>
           <a:p>
-            <a:pPr algn="ctr" indent="0" marL="0">
+            <a:pPr marL="0" indent="0" algn="ctr">
               <a:buNone/>
             </a:pPr>
             <a:r>
@@ -3040,6 +2849,13 @@
             <a:prstDash val="solid"/>
           </a:ln>
         </p:spPr>
+        <p:txBody>
+          <a:bodyPr/>
+          <a:lstStyle/>
+          <a:p>
+            <a:endParaRPr lang="es-CL"/>
+          </a:p>
+        </p:txBody>
       </p:sp>
       <p:sp>
         <p:nvSpPr>
@@ -3062,7 +2878,7 @@
           <a:bodyPr wrap="square" lIns="0" tIns="0" rIns="0" bIns="0" rtlCol="0" anchor="ctr"/>
           <a:lstStyle/>
           <a:p>
-            <a:pPr algn="ctr" indent="0" marL="0">
+            <a:pPr marL="0" indent="0" algn="ctr">
               <a:buNone/>
             </a:pPr>
             <a:r>
@@ -3101,7 +2917,7 @@
           <a:bodyPr wrap="square" lIns="0" tIns="0" rIns="0" bIns="0" rtlCol="0" anchor="ctr"/>
           <a:lstStyle/>
           <a:p>
-            <a:pPr algn="ctr" indent="0" marL="0">
+            <a:pPr marL="0" indent="0" algn="ctr">
               <a:buNone/>
             </a:pPr>
             <a:r>
@@ -3140,7 +2956,7 @@
           <a:bodyPr wrap="square" lIns="0" tIns="0" rIns="0" bIns="0" rtlCol="0" anchor="ctr"/>
           <a:lstStyle/>
           <a:p>
-            <a:pPr algn="ctr" indent="0" marL="0">
+            <a:pPr marL="0" indent="0" algn="ctr">
               <a:buNone/>
             </a:pPr>
             <a:r>
@@ -3179,9 +2995,18 @@
           <a:bodyPr wrap="square" lIns="0" tIns="0" rIns="0" bIns="0" rtlCol="0" anchor="ctr"/>
           <a:lstStyle/>
           <a:p>
-            <a:pPr algn="ctr" indent="0" marL="0">
-              <a:buNone/>
-            </a:pPr>
+            <a:pPr algn="ctr"/>
+            <a:r>
+              <a:rPr lang="en-US" sz="1100" dirty="0" err="1">
+                <a:solidFill>
+                  <a:srgbClr val="6E86AC"/>
+                </a:solidFill>
+                <a:latin typeface="Arial" pitchFamily="34" charset="0"/>
+                <a:ea typeface="Arial" pitchFamily="34" charset="-122"/>
+                <a:cs typeface="Arial" pitchFamily="34" charset="-120"/>
+              </a:rPr>
+              <a:t>Infraestructura</a:t>
+            </a:r>
             <a:r>
               <a:rPr lang="en-US" sz="1100" dirty="0">
                 <a:solidFill>
@@ -3191,7 +3016,7 @@
                 <a:ea typeface="Arial" pitchFamily="34" charset="-122"/>
                 <a:cs typeface="Arial" pitchFamily="34" charset="-120"/>
               </a:rPr>
-              <a:t>MartLiz  ·  Infraestructura Viva  ·  Módulo 4, Alkemy</a:t>
+              <a:t> Viva  ·  Módulo 4, GRUPO 01</a:t>
             </a:r>
             <a:endParaRPr lang="en-US" sz="1100" dirty="0"/>
           </a:p>
@@ -3213,6 +3038,7 @@
         <a:solidFill>
           <a:srgbClr val="FFFFFF"/>
         </a:solidFill>
+        <a:effectLst/>
       </p:bgPr>
     </p:bg>
     <p:spTree>
@@ -3250,7 +3076,7 @@
           <a:bodyPr wrap="square" lIns="0" tIns="0" rIns="0" bIns="0" rtlCol="0" anchor="ctr"/>
           <a:lstStyle/>
           <a:p>
-            <a:pPr indent="0" marL="0">
+            <a:pPr marL="0" indent="0">
               <a:buNone/>
             </a:pPr>
             <a:r>
@@ -3289,7 +3115,7 @@
           <a:bodyPr wrap="square" lIns="0" tIns="0" rIns="0" bIns="0" rtlCol="0" anchor="ctr"/>
           <a:lstStyle/>
           <a:p>
-            <a:pPr indent="0" marL="0">
+            <a:pPr marL="0" indent="0">
               <a:buNone/>
             </a:pPr>
             <a:r>
@@ -3328,13 +3154,20 @@
           </a:solidFill>
           <a:ln/>
           <a:effectLst>
-            <a:outerShdw sx="100000" sy="100000" kx="0" ky="0" algn="bl" rotWithShape="0" blurRad="76200" dist="25400" dir="2700000">
+            <a:outerShdw blurRad="76200" dist="25400" dir="2700000" algn="bl" rotWithShape="0">
               <a:srgbClr val="000000">
                 <a:alpha val="10000"/>
               </a:srgbClr>
             </a:outerShdw>
           </a:effectLst>
         </p:spPr>
+        <p:txBody>
+          <a:bodyPr/>
+          <a:lstStyle/>
+          <a:p>
+            <a:endParaRPr lang="es-CL"/>
+          </a:p>
+        </p:txBody>
       </p:sp>
       <p:sp>
         <p:nvSpPr>
@@ -3355,312 +3188,17 @@
           </a:solidFill>
           <a:ln/>
         </p:spPr>
+        <p:txBody>
+          <a:bodyPr/>
+          <a:lstStyle/>
+          <a:p>
+            <a:endParaRPr lang="es-CL"/>
+          </a:p>
+        </p:txBody>
       </p:sp>
       <p:pic>
         <p:nvPicPr>
-          <p:cNvPr id="6" name="Image 0" descr="preencoded.png">    </p:cNvPr>
-          <p:cNvPicPr>
-            <a:picLocks noChangeAspect="1"/>
-          </p:cNvPicPr>
-          <p:nvPr/>
-        </p:nvPicPr>
-        <p:blipFill>
-          <a:blip r:embed="rId1"/>
-          <a:stretch>
-            <a:fillRect/>
-          </a:stretch>
-        </p:blipFill>
-        <p:spPr>
-          <a:xfrm>
-            <a:off x="868680" y="2011680"/>
-            <a:ext cx="219456" cy="219456"/>
-          </a:xfrm>
-          <a:prstGeom prst="rect">
-            <a:avLst/>
-          </a:prstGeom>
-        </p:spPr>
-      </p:pic>
-      <p:sp>
-        <p:nvSpPr>
-          <p:cNvPr id="7" name="Text 4"/>
-          <p:cNvSpPr/>
-          <p:nvPr/>
-        </p:nvSpPr>
-        <p:spPr>
-          <a:xfrm>
-            <a:off x="1325880" y="1874520"/>
-            <a:ext cx="2468880" cy="457200"/>
-          </a:xfrm>
-          <a:prstGeom prst="rect">
-            <a:avLst/>
-          </a:prstGeom>
-          <a:noFill/>
-          <a:ln/>
-        </p:spPr>
-        <p:txBody>
-          <a:bodyPr wrap="square" lIns="0" tIns="0" rIns="0" bIns="0" rtlCol="0" anchor="ctr"/>
-          <a:lstStyle/>
-          <a:p>
-            <a:pPr indent="0" marL="0">
-              <a:buNone/>
-            </a:pPr>
-            <a:r>
-              <a:rPr lang="en-US" sz="1400" b="1" dirty="0">
-                <a:solidFill>
-                  <a:srgbClr val="1F3864"/>
-                </a:solidFill>
-                <a:latin typeface="Arial" pitchFamily="34" charset="0"/>
-                <a:ea typeface="Arial" pitchFamily="34" charset="-122"/>
-                <a:cs typeface="Arial" pitchFamily="34" charset="-120"/>
-              </a:rPr>
-              <a:t>Costos elevados</a:t>
-            </a:r>
-            <a:endParaRPr lang="en-US" sz="1400" dirty="0"/>
-          </a:p>
-        </p:txBody>
-      </p:sp>
-      <p:sp>
-        <p:nvSpPr>
-          <p:cNvPr id="8" name="Text 5"/>
-          <p:cNvSpPr/>
-          <p:nvPr/>
-        </p:nvSpPr>
-        <p:spPr>
-          <a:xfrm>
-            <a:off x="749808" y="2468880"/>
-            <a:ext cx="3026664" cy="822960"/>
-          </a:xfrm>
-          <a:prstGeom prst="rect">
-            <a:avLst/>
-          </a:prstGeom>
-          <a:noFill/>
-          <a:ln/>
-        </p:spPr>
-        <p:txBody>
-          <a:bodyPr wrap="square" lIns="0" tIns="0" rIns="0" bIns="0" rtlCol="0" anchor="ctr"/>
-          <a:lstStyle/>
-          <a:p>
-            <a:pPr indent="0" marL="0">
-              <a:buNone/>
-            </a:pPr>
-            <a:r>
-              <a:rPr lang="en-US" sz="1050" dirty="0">
-                <a:solidFill>
-                  <a:srgbClr val="1F2937"/>
-                </a:solidFill>
-                <a:latin typeface="Arial" pitchFamily="34" charset="0"/>
-                <a:ea typeface="Arial" pitchFamily="34" charset="-122"/>
-                <a:cs typeface="Arial" pitchFamily="34" charset="-120"/>
-              </a:rPr>
-              <a:t>Alto costo de mantenimiento del hardware propio, sin escalar con la demanda.</a:t>
-            </a:r>
-            <a:endParaRPr lang="en-US" sz="1050" dirty="0"/>
-          </a:p>
-        </p:txBody>
-      </p:sp>
-      <p:sp>
-        <p:nvSpPr>
-          <p:cNvPr id="9" name="Shape 6"/>
-          <p:cNvSpPr/>
-          <p:nvPr/>
-        </p:nvSpPr>
-        <p:spPr>
-          <a:xfrm>
-            <a:off x="4206240" y="1691640"/>
-            <a:ext cx="3429000" cy="1737360"/>
-          </a:xfrm>
-          <a:prstGeom prst="roundRect">
-            <a:avLst>
-              <a:gd name="adj" fmla="val 4211"/>
-            </a:avLst>
-          </a:prstGeom>
-          <a:solidFill>
-            <a:srgbClr val="EAF1F8"/>
-          </a:solidFill>
-          <a:ln/>
-          <a:effectLst>
-            <a:outerShdw sx="100000" sy="100000" kx="0" ky="0" algn="bl" rotWithShape="0" blurRad="76200" dist="25400" dir="2700000">
-              <a:srgbClr val="000000">
-                <a:alpha val="10000"/>
-              </a:srgbClr>
-            </a:outerShdw>
-          </a:effectLst>
-        </p:spPr>
-      </p:sp>
-      <p:sp>
-        <p:nvSpPr>
-          <p:cNvPr id="10" name="Shape 7"/>
-          <p:cNvSpPr/>
-          <p:nvPr/>
-        </p:nvSpPr>
-        <p:spPr>
-          <a:xfrm>
-            <a:off x="4407408" y="1892808"/>
-            <a:ext cx="457200" cy="457200"/>
-          </a:xfrm>
-          <a:prstGeom prst="ellipse">
-            <a:avLst/>
-          </a:prstGeom>
-          <a:solidFill>
-            <a:srgbClr val="FFFFFF"/>
-          </a:solidFill>
-          <a:ln/>
-        </p:spPr>
-      </p:sp>
-      <p:pic>
-        <p:nvPicPr>
-          <p:cNvPr id="11" name="Image 1" descr="preencoded.png">    </p:cNvPr>
-          <p:cNvPicPr>
-            <a:picLocks noChangeAspect="1"/>
-          </p:cNvPicPr>
-          <p:nvPr/>
-        </p:nvPicPr>
-        <p:blipFill>
-          <a:blip r:embed="rId2"/>
-          <a:stretch>
-            <a:fillRect/>
-          </a:stretch>
-        </p:blipFill>
-        <p:spPr>
-          <a:xfrm>
-            <a:off x="4526280" y="2011680"/>
-            <a:ext cx="219456" cy="219456"/>
-          </a:xfrm>
-          <a:prstGeom prst="rect">
-            <a:avLst/>
-          </a:prstGeom>
-        </p:spPr>
-      </p:pic>
-      <p:sp>
-        <p:nvSpPr>
-          <p:cNvPr id="12" name="Text 8"/>
-          <p:cNvSpPr/>
-          <p:nvPr/>
-        </p:nvSpPr>
-        <p:spPr>
-          <a:xfrm>
-            <a:off x="4983480" y="1874520"/>
-            <a:ext cx="2468880" cy="457200"/>
-          </a:xfrm>
-          <a:prstGeom prst="rect">
-            <a:avLst/>
-          </a:prstGeom>
-          <a:noFill/>
-          <a:ln/>
-        </p:spPr>
-        <p:txBody>
-          <a:bodyPr wrap="square" lIns="0" tIns="0" rIns="0" bIns="0" rtlCol="0" anchor="ctr"/>
-          <a:lstStyle/>
-          <a:p>
-            <a:pPr indent="0" marL="0">
-              <a:buNone/>
-            </a:pPr>
-            <a:r>
-              <a:rPr lang="en-US" sz="1400" b="1" dirty="0">
-                <a:solidFill>
-                  <a:srgbClr val="1F3864"/>
-                </a:solidFill>
-                <a:latin typeface="Arial" pitchFamily="34" charset="0"/>
-                <a:ea typeface="Arial" pitchFamily="34" charset="-122"/>
-                <a:cs typeface="Arial" pitchFamily="34" charset="-120"/>
-              </a:rPr>
-              <a:t>Cómputo rígido</a:t>
-            </a:r>
-            <a:endParaRPr lang="en-US" sz="1400" dirty="0"/>
-          </a:p>
-        </p:txBody>
-      </p:sp>
-      <p:sp>
-        <p:nvSpPr>
-          <p:cNvPr id="13" name="Text 9"/>
-          <p:cNvSpPr/>
-          <p:nvPr/>
-        </p:nvSpPr>
-        <p:spPr>
-          <a:xfrm>
-            <a:off x="4407408" y="2468880"/>
-            <a:ext cx="3026664" cy="822960"/>
-          </a:xfrm>
-          <a:prstGeom prst="rect">
-            <a:avLst/>
-          </a:prstGeom>
-          <a:noFill/>
-          <a:ln/>
-        </p:spPr>
-        <p:txBody>
-          <a:bodyPr wrap="square" lIns="0" tIns="0" rIns="0" bIns="0" rtlCol="0" anchor="ctr"/>
-          <a:lstStyle/>
-          <a:p>
-            <a:pPr indent="0" marL="0">
-              <a:buNone/>
-            </a:pPr>
-            <a:r>
-              <a:rPr lang="en-US" sz="1050" dirty="0">
-                <a:solidFill>
-                  <a:srgbClr val="1F2937"/>
-                </a:solidFill>
-                <a:latin typeface="Arial" pitchFamily="34" charset="0"/>
-                <a:ea typeface="Arial" pitchFamily="34" charset="-122"/>
-                <a:cs typeface="Arial" pitchFamily="34" charset="-120"/>
-              </a:rPr>
-              <a:t>Sin capacidad de escalar procesamiento según la carga real de cada área.</a:t>
-            </a:r>
-            <a:endParaRPr lang="en-US" sz="1050" dirty="0"/>
-          </a:p>
-        </p:txBody>
-      </p:sp>
-      <p:sp>
-        <p:nvSpPr>
-          <p:cNvPr id="14" name="Shape 10"/>
-          <p:cNvSpPr/>
-          <p:nvPr/>
-        </p:nvSpPr>
-        <p:spPr>
-          <a:xfrm>
-            <a:off x="7863840" y="1691640"/>
-            <a:ext cx="3429000" cy="1737360"/>
-          </a:xfrm>
-          <a:prstGeom prst="roundRect">
-            <a:avLst>
-              <a:gd name="adj" fmla="val 4211"/>
-            </a:avLst>
-          </a:prstGeom>
-          <a:solidFill>
-            <a:srgbClr val="EAF1F8"/>
-          </a:solidFill>
-          <a:ln/>
-          <a:effectLst>
-            <a:outerShdw sx="100000" sy="100000" kx="0" ky="0" algn="bl" rotWithShape="0" blurRad="76200" dist="25400" dir="2700000">
-              <a:srgbClr val="000000">
-                <a:alpha val="10000"/>
-              </a:srgbClr>
-            </a:outerShdw>
-          </a:effectLst>
-        </p:spPr>
-      </p:sp>
-      <p:sp>
-        <p:nvSpPr>
-          <p:cNvPr id="15" name="Shape 11"/>
-          <p:cNvSpPr/>
-          <p:nvPr/>
-        </p:nvSpPr>
-        <p:spPr>
-          <a:xfrm>
-            <a:off x="8065008" y="1892808"/>
-            <a:ext cx="457200" cy="457200"/>
-          </a:xfrm>
-          <a:prstGeom prst="ellipse">
-            <a:avLst/>
-          </a:prstGeom>
-          <a:solidFill>
-            <a:srgbClr val="FFFFFF"/>
-          </a:solidFill>
-          <a:ln/>
-        </p:spPr>
-      </p:sp>
-      <p:pic>
-        <p:nvPicPr>
-          <p:cNvPr id="16" name="Image 2" descr="preencoded.png">    </p:cNvPr>
+          <p:cNvPr id="6" name="Image 0" descr="preencoded.png"/>
           <p:cNvPicPr>
             <a:picLocks noChangeAspect="1"/>
           </p:cNvPicPr>
@@ -3674,7 +3212,7 @@
         </p:blipFill>
         <p:spPr>
           <a:xfrm>
-            <a:off x="8183880" y="2011680"/>
+            <a:off x="868680" y="2011680"/>
             <a:ext cx="219456" cy="219456"/>
           </a:xfrm>
           <a:prstGeom prst="rect">
@@ -3684,13 +3222,13 @@
       </p:pic>
       <p:sp>
         <p:nvSpPr>
-          <p:cNvPr id="17" name="Text 12"/>
-          <p:cNvSpPr/>
-          <p:nvPr/>
-        </p:nvSpPr>
-        <p:spPr>
-          <a:xfrm>
-            <a:off x="8641080" y="1874520"/>
+          <p:cNvPr id="7" name="Text 4"/>
+          <p:cNvSpPr/>
+          <p:nvPr/>
+        </p:nvSpPr>
+        <p:spPr>
+          <a:xfrm>
+            <a:off x="1325880" y="1874520"/>
             <a:ext cx="2468880" cy="457200"/>
           </a:xfrm>
           <a:prstGeom prst="rect">
@@ -3703,7 +3241,7 @@
           <a:bodyPr wrap="square" lIns="0" tIns="0" rIns="0" bIns="0" rtlCol="0" anchor="ctr"/>
           <a:lstStyle/>
           <a:p>
-            <a:pPr indent="0" marL="0">
+            <a:pPr marL="0" indent="0">
               <a:buNone/>
             </a:pPr>
             <a:r>
@@ -3715,7 +3253,7 @@
                 <a:ea typeface="Arial" pitchFamily="34" charset="-122"/>
                 <a:cs typeface="Arial" pitchFamily="34" charset="-120"/>
               </a:rPr>
-              <a:t>Datos aislados</a:t>
+              <a:t>Costos elevados</a:t>
             </a:r>
             <a:endParaRPr lang="en-US" sz="1400" dirty="0"/>
           </a:p>
@@ -3723,13 +3261,13 @@
       </p:sp>
       <p:sp>
         <p:nvSpPr>
-          <p:cNvPr id="18" name="Text 13"/>
-          <p:cNvSpPr/>
-          <p:nvPr/>
-        </p:nvSpPr>
-        <p:spPr>
-          <a:xfrm>
-            <a:off x="8065008" y="2468880"/>
+          <p:cNvPr id="8" name="Text 5"/>
+          <p:cNvSpPr/>
+          <p:nvPr/>
+        </p:nvSpPr>
+        <p:spPr>
+          <a:xfrm>
+            <a:off x="749808" y="2468880"/>
             <a:ext cx="3026664" cy="822960"/>
           </a:xfrm>
           <a:prstGeom prst="rect">
@@ -3742,7 +3280,7 @@
           <a:bodyPr wrap="square" lIns="0" tIns="0" rIns="0" bIns="0" rtlCol="0" anchor="ctr"/>
           <a:lstStyle/>
           <a:p>
-            <a:pPr indent="0" marL="0">
+            <a:pPr marL="0" indent="0">
               <a:buNone/>
             </a:pPr>
             <a:r>
@@ -3754,7 +3292,7 @@
                 <a:ea typeface="Arial" pitchFamily="34" charset="-122"/>
                 <a:cs typeface="Arial" pitchFamily="34" charset="-120"/>
               </a:rPr>
-              <a:t>Bases relacionales y NoSQL sin integrar, dependientes de hardware físico.</a:t>
+              <a:t>Alto costo de mantenimiento del hardware propio, sin escalar con la demanda.</a:t>
             </a:r>
             <a:endParaRPr lang="en-US" sz="1050" dirty="0"/>
           </a:p>
@@ -3762,13 +3300,13 @@
       </p:sp>
       <p:sp>
         <p:nvSpPr>
-          <p:cNvPr id="19" name="Shape 14"/>
-          <p:cNvSpPr/>
-          <p:nvPr/>
-        </p:nvSpPr>
-        <p:spPr>
-          <a:xfrm>
-            <a:off x="548640" y="3657600"/>
+          <p:cNvPr id="9" name="Shape 6"/>
+          <p:cNvSpPr/>
+          <p:nvPr/>
+        </p:nvSpPr>
+        <p:spPr>
+          <a:xfrm>
+            <a:off x="4206240" y="1691640"/>
             <a:ext cx="3429000" cy="1737360"/>
           </a:xfrm>
           <a:prstGeom prst="roundRect">
@@ -3781,23 +3319,30 @@
           </a:solidFill>
           <a:ln/>
           <a:effectLst>
-            <a:outerShdw sx="100000" sy="100000" kx="0" ky="0" algn="bl" rotWithShape="0" blurRad="76200" dist="25400" dir="2700000">
+            <a:outerShdw blurRad="76200" dist="25400" dir="2700000" algn="bl" rotWithShape="0">
               <a:srgbClr val="000000">
                 <a:alpha val="10000"/>
               </a:srgbClr>
             </a:outerShdw>
           </a:effectLst>
         </p:spPr>
-      </p:sp>
-      <p:sp>
-        <p:nvSpPr>
-          <p:cNvPr id="20" name="Shape 15"/>
-          <p:cNvSpPr/>
-          <p:nvPr/>
-        </p:nvSpPr>
-        <p:spPr>
-          <a:xfrm>
-            <a:off x="749808" y="3858768"/>
+        <p:txBody>
+          <a:bodyPr/>
+          <a:lstStyle/>
+          <a:p>
+            <a:endParaRPr lang="es-CL"/>
+          </a:p>
+        </p:txBody>
+      </p:sp>
+      <p:sp>
+        <p:nvSpPr>
+          <p:cNvPr id="10" name="Shape 7"/>
+          <p:cNvSpPr/>
+          <p:nvPr/>
+        </p:nvSpPr>
+        <p:spPr>
+          <a:xfrm>
+            <a:off x="4407408" y="1892808"/>
             <a:ext cx="457200" cy="457200"/>
           </a:xfrm>
           <a:prstGeom prst="ellipse">
@@ -3808,10 +3353,17 @@
           </a:solidFill>
           <a:ln/>
         </p:spPr>
+        <p:txBody>
+          <a:bodyPr/>
+          <a:lstStyle/>
+          <a:p>
+            <a:endParaRPr lang="es-CL"/>
+          </a:p>
+        </p:txBody>
       </p:sp>
       <p:pic>
         <p:nvPicPr>
-          <p:cNvPr id="21" name="Image 3" descr="preencoded.png">    </p:cNvPr>
+          <p:cNvPr id="11" name="Image 1" descr="preencoded.png"/>
           <p:cNvPicPr>
             <a:picLocks noChangeAspect="1"/>
           </p:cNvPicPr>
@@ -3825,7 +3377,7 @@
         </p:blipFill>
         <p:spPr>
           <a:xfrm>
-            <a:off x="868680" y="3977640"/>
+            <a:off x="4526280" y="2011680"/>
             <a:ext cx="219456" cy="219456"/>
           </a:xfrm>
           <a:prstGeom prst="rect">
@@ -3835,13 +3387,13 @@
       </p:pic>
       <p:sp>
         <p:nvSpPr>
-          <p:cNvPr id="22" name="Text 16"/>
-          <p:cNvSpPr/>
-          <p:nvPr/>
-        </p:nvSpPr>
-        <p:spPr>
-          <a:xfrm>
-            <a:off x="1325880" y="3840480"/>
+          <p:cNvPr id="12" name="Text 8"/>
+          <p:cNvSpPr/>
+          <p:nvPr/>
+        </p:nvSpPr>
+        <p:spPr>
+          <a:xfrm>
+            <a:off x="4983480" y="1874520"/>
             <a:ext cx="2468880" cy="457200"/>
           </a:xfrm>
           <a:prstGeom prst="rect">
@@ -3854,7 +3406,7 @@
           <a:bodyPr wrap="square" lIns="0" tIns="0" rIns="0" bIns="0" rtlCol="0" anchor="ctr"/>
           <a:lstStyle/>
           <a:p>
-            <a:pPr indent="0" marL="0">
+            <a:pPr marL="0" indent="0">
               <a:buNone/>
             </a:pPr>
             <a:r>
@@ -3866,7 +3418,7 @@
                 <a:ea typeface="Arial" pitchFamily="34" charset="-122"/>
                 <a:cs typeface="Arial" pitchFamily="34" charset="-120"/>
               </a:rPr>
-              <a:t>Almacenamiento único</a:t>
+              <a:t>Cómputo rígido</a:t>
             </a:r>
             <a:endParaRPr lang="en-US" sz="1400" dirty="0"/>
           </a:p>
@@ -3874,13 +3426,13 @@
       </p:sp>
       <p:sp>
         <p:nvSpPr>
-          <p:cNvPr id="23" name="Text 17"/>
-          <p:cNvSpPr/>
-          <p:nvPr/>
-        </p:nvSpPr>
-        <p:spPr>
-          <a:xfrm>
-            <a:off x="749808" y="4434840"/>
+          <p:cNvPr id="13" name="Text 9"/>
+          <p:cNvSpPr/>
+          <p:nvPr/>
+        </p:nvSpPr>
+        <p:spPr>
+          <a:xfrm>
+            <a:off x="4407408" y="2468880"/>
             <a:ext cx="3026664" cy="822960"/>
           </a:xfrm>
           <a:prstGeom prst="rect">
@@ -3893,7 +3445,7 @@
           <a:bodyPr wrap="square" lIns="0" tIns="0" rIns="0" bIns="0" rtlCol="0" anchor="ctr"/>
           <a:lstStyle/>
           <a:p>
-            <a:pPr indent="0" marL="0">
+            <a:pPr marL="0" indent="0">
               <a:buNone/>
             </a:pPr>
             <a:r>
@@ -3905,7 +3457,7 @@
                 <a:ea typeface="Arial" pitchFamily="34" charset="-122"/>
                 <a:cs typeface="Arial" pitchFamily="34" charset="-120"/>
               </a:rPr>
-              <a:t>Sin diferenciar datos de uso frecuente y datos de archivo histórico.</a:t>
+              <a:t>Sin capacidad de escalar procesamiento según la carga real de cada área.</a:t>
             </a:r>
             <a:endParaRPr lang="en-US" sz="1050" dirty="0"/>
           </a:p>
@@ -3913,13 +3465,13 @@
       </p:sp>
       <p:sp>
         <p:nvSpPr>
-          <p:cNvPr id="24" name="Shape 18"/>
-          <p:cNvSpPr/>
-          <p:nvPr/>
-        </p:nvSpPr>
-        <p:spPr>
-          <a:xfrm>
-            <a:off x="4206240" y="3657600"/>
+          <p:cNvPr id="14" name="Shape 10"/>
+          <p:cNvSpPr/>
+          <p:nvPr/>
+        </p:nvSpPr>
+        <p:spPr>
+          <a:xfrm>
+            <a:off x="7863840" y="1691640"/>
             <a:ext cx="3429000" cy="1737360"/>
           </a:xfrm>
           <a:prstGeom prst="roundRect">
@@ -3932,23 +3484,30 @@
           </a:solidFill>
           <a:ln/>
           <a:effectLst>
-            <a:outerShdw sx="100000" sy="100000" kx="0" ky="0" algn="bl" rotWithShape="0" blurRad="76200" dist="25400" dir="2700000">
+            <a:outerShdw blurRad="76200" dist="25400" dir="2700000" algn="bl" rotWithShape="0">
               <a:srgbClr val="000000">
                 <a:alpha val="10000"/>
               </a:srgbClr>
             </a:outerShdw>
           </a:effectLst>
         </p:spPr>
-      </p:sp>
-      <p:sp>
-        <p:nvSpPr>
-          <p:cNvPr id="25" name="Shape 19"/>
-          <p:cNvSpPr/>
-          <p:nvPr/>
-        </p:nvSpPr>
-        <p:spPr>
-          <a:xfrm>
-            <a:off x="4407408" y="3858768"/>
+        <p:txBody>
+          <a:bodyPr/>
+          <a:lstStyle/>
+          <a:p>
+            <a:endParaRPr lang="es-CL"/>
+          </a:p>
+        </p:txBody>
+      </p:sp>
+      <p:sp>
+        <p:nvSpPr>
+          <p:cNvPr id="15" name="Shape 11"/>
+          <p:cNvSpPr/>
+          <p:nvPr/>
+        </p:nvSpPr>
+        <p:spPr>
+          <a:xfrm>
+            <a:off x="8065008" y="1892808"/>
             <a:ext cx="457200" cy="457200"/>
           </a:xfrm>
           <a:prstGeom prst="ellipse">
@@ -3959,10 +3518,17 @@
           </a:solidFill>
           <a:ln/>
         </p:spPr>
+        <p:txBody>
+          <a:bodyPr/>
+          <a:lstStyle/>
+          <a:p>
+            <a:endParaRPr lang="es-CL"/>
+          </a:p>
+        </p:txBody>
       </p:sp>
       <p:pic>
         <p:nvPicPr>
-          <p:cNvPr id="26" name="Image 4" descr="preencoded.png">    </p:cNvPr>
+          <p:cNvPr id="16" name="Image 2" descr="preencoded.png"/>
           <p:cNvPicPr>
             <a:picLocks noChangeAspect="1"/>
           </p:cNvPicPr>
@@ -3976,7 +3542,7 @@
         </p:blipFill>
         <p:spPr>
           <a:xfrm>
-            <a:off x="4526280" y="3977640"/>
+            <a:off x="8183880" y="2011680"/>
             <a:ext cx="219456" cy="219456"/>
           </a:xfrm>
           <a:prstGeom prst="rect">
@@ -3986,13 +3552,13 @@
       </p:pic>
       <p:sp>
         <p:nvSpPr>
-          <p:cNvPr id="27" name="Text 20"/>
-          <p:cNvSpPr/>
-          <p:nvPr/>
-        </p:nvSpPr>
-        <p:spPr>
-          <a:xfrm>
-            <a:off x="4983480" y="3840480"/>
+          <p:cNvPr id="17" name="Text 12"/>
+          <p:cNvSpPr/>
+          <p:nvPr/>
+        </p:nvSpPr>
+        <p:spPr>
+          <a:xfrm>
+            <a:off x="8641080" y="1874520"/>
             <a:ext cx="2468880" cy="457200"/>
           </a:xfrm>
           <a:prstGeom prst="rect">
@@ -4005,7 +3571,7 @@
           <a:bodyPr wrap="square" lIns="0" tIns="0" rIns="0" bIns="0" rtlCol="0" anchor="ctr"/>
           <a:lstStyle/>
           <a:p>
-            <a:pPr indent="0" marL="0">
+            <a:pPr marL="0" indent="0">
               <a:buNone/>
             </a:pPr>
             <a:r>
@@ -4017,7 +3583,7 @@
                 <a:ea typeface="Arial" pitchFamily="34" charset="-122"/>
                 <a:cs typeface="Arial" pitchFamily="34" charset="-120"/>
               </a:rPr>
-              <a:t>Red expuesta</a:t>
+              <a:t>Datos aislados</a:t>
             </a:r>
             <a:endParaRPr lang="en-US" sz="1400" dirty="0"/>
           </a:p>
@@ -4025,13 +3591,13 @@
       </p:sp>
       <p:sp>
         <p:nvSpPr>
-          <p:cNvPr id="28" name="Text 21"/>
-          <p:cNvSpPr/>
-          <p:nvPr/>
-        </p:nvSpPr>
-        <p:spPr>
-          <a:xfrm>
-            <a:off x="4407408" y="4434840"/>
+          <p:cNvPr id="18" name="Text 13"/>
+          <p:cNvSpPr/>
+          <p:nvPr/>
+        </p:nvSpPr>
+        <p:spPr>
+          <a:xfrm>
+            <a:off x="8065008" y="2468880"/>
             <a:ext cx="3026664" cy="822960"/>
           </a:xfrm>
           <a:prstGeom prst="rect">
@@ -4044,7 +3610,7 @@
           <a:bodyPr wrap="square" lIns="0" tIns="0" rIns="0" bIns="0" rtlCol="0" anchor="ctr"/>
           <a:lstStyle/>
           <a:p>
-            <a:pPr indent="0" marL="0">
+            <a:pPr marL="0" indent="0">
               <a:buNone/>
             </a:pPr>
             <a:r>
@@ -4056,7 +3622,7 @@
                 <a:ea typeface="Arial" pitchFamily="34" charset="-122"/>
                 <a:cs typeface="Arial" pitchFamily="34" charset="-120"/>
               </a:rPr>
-              <a:t>Sin segmentación clara entre servicios internos y aplicaciones públicas.</a:t>
+              <a:t>Bases relacionales y NoSQL sin integrar, dependientes de hardware físico.</a:t>
             </a:r>
             <a:endParaRPr lang="en-US" sz="1050" dirty="0"/>
           </a:p>
@@ -4064,13 +3630,13 @@
       </p:sp>
       <p:sp>
         <p:nvSpPr>
-          <p:cNvPr id="29" name="Shape 22"/>
-          <p:cNvSpPr/>
-          <p:nvPr/>
-        </p:nvSpPr>
-        <p:spPr>
-          <a:xfrm>
-            <a:off x="7863840" y="3657600"/>
+          <p:cNvPr id="19" name="Shape 14"/>
+          <p:cNvSpPr/>
+          <p:nvPr/>
+        </p:nvSpPr>
+        <p:spPr>
+          <a:xfrm>
+            <a:off x="548640" y="3657600"/>
             <a:ext cx="3429000" cy="1737360"/>
           </a:xfrm>
           <a:prstGeom prst="roundRect">
@@ -4083,23 +3649,30 @@
           </a:solidFill>
           <a:ln/>
           <a:effectLst>
-            <a:outerShdw sx="100000" sy="100000" kx="0" ky="0" algn="bl" rotWithShape="0" blurRad="76200" dist="25400" dir="2700000">
+            <a:outerShdw blurRad="76200" dist="25400" dir="2700000" algn="bl" rotWithShape="0">
               <a:srgbClr val="000000">
                 <a:alpha val="10000"/>
               </a:srgbClr>
             </a:outerShdw>
           </a:effectLst>
         </p:spPr>
-      </p:sp>
-      <p:sp>
-        <p:nvSpPr>
-          <p:cNvPr id="30" name="Shape 23"/>
-          <p:cNvSpPr/>
-          <p:nvPr/>
-        </p:nvSpPr>
-        <p:spPr>
-          <a:xfrm>
-            <a:off x="8065008" y="3858768"/>
+        <p:txBody>
+          <a:bodyPr/>
+          <a:lstStyle/>
+          <a:p>
+            <a:endParaRPr lang="es-CL"/>
+          </a:p>
+        </p:txBody>
+      </p:sp>
+      <p:sp>
+        <p:nvSpPr>
+          <p:cNvPr id="20" name="Shape 15"/>
+          <p:cNvSpPr/>
+          <p:nvPr/>
+        </p:nvSpPr>
+        <p:spPr>
+          <a:xfrm>
+            <a:off x="749808" y="3858768"/>
             <a:ext cx="457200" cy="457200"/>
           </a:xfrm>
           <a:prstGeom prst="ellipse">
@@ -4110,10 +3683,17 @@
           </a:solidFill>
           <a:ln/>
         </p:spPr>
+        <p:txBody>
+          <a:bodyPr/>
+          <a:lstStyle/>
+          <a:p>
+            <a:endParaRPr lang="es-CL"/>
+          </a:p>
+        </p:txBody>
       </p:sp>
       <p:pic>
         <p:nvPicPr>
-          <p:cNvPr id="31" name="Image 5" descr="preencoded.png">    </p:cNvPr>
+          <p:cNvPr id="21" name="Image 3" descr="preencoded.png"/>
           <p:cNvPicPr>
             <a:picLocks noChangeAspect="1"/>
           </p:cNvPicPr>
@@ -4127,6 +3707,336 @@
         </p:blipFill>
         <p:spPr>
           <a:xfrm>
+            <a:off x="868680" y="3977640"/>
+            <a:ext cx="219456" cy="219456"/>
+          </a:xfrm>
+          <a:prstGeom prst="rect">
+            <a:avLst/>
+          </a:prstGeom>
+        </p:spPr>
+      </p:pic>
+      <p:sp>
+        <p:nvSpPr>
+          <p:cNvPr id="22" name="Text 16"/>
+          <p:cNvSpPr/>
+          <p:nvPr/>
+        </p:nvSpPr>
+        <p:spPr>
+          <a:xfrm>
+            <a:off x="1325880" y="3840480"/>
+            <a:ext cx="2468880" cy="457200"/>
+          </a:xfrm>
+          <a:prstGeom prst="rect">
+            <a:avLst/>
+          </a:prstGeom>
+          <a:noFill/>
+          <a:ln/>
+        </p:spPr>
+        <p:txBody>
+          <a:bodyPr wrap="square" lIns="0" tIns="0" rIns="0" bIns="0" rtlCol="0" anchor="ctr"/>
+          <a:lstStyle/>
+          <a:p>
+            <a:pPr marL="0" indent="0">
+              <a:buNone/>
+            </a:pPr>
+            <a:r>
+              <a:rPr lang="en-US" sz="1400" b="1" dirty="0">
+                <a:solidFill>
+                  <a:srgbClr val="1F3864"/>
+                </a:solidFill>
+                <a:latin typeface="Arial" pitchFamily="34" charset="0"/>
+                <a:ea typeface="Arial" pitchFamily="34" charset="-122"/>
+                <a:cs typeface="Arial" pitchFamily="34" charset="-120"/>
+              </a:rPr>
+              <a:t>Almacenamiento único</a:t>
+            </a:r>
+            <a:endParaRPr lang="en-US" sz="1400" dirty="0"/>
+          </a:p>
+        </p:txBody>
+      </p:sp>
+      <p:sp>
+        <p:nvSpPr>
+          <p:cNvPr id="23" name="Text 17"/>
+          <p:cNvSpPr/>
+          <p:nvPr/>
+        </p:nvSpPr>
+        <p:spPr>
+          <a:xfrm>
+            <a:off x="749808" y="4434840"/>
+            <a:ext cx="3026664" cy="822960"/>
+          </a:xfrm>
+          <a:prstGeom prst="rect">
+            <a:avLst/>
+          </a:prstGeom>
+          <a:noFill/>
+          <a:ln/>
+        </p:spPr>
+        <p:txBody>
+          <a:bodyPr wrap="square" lIns="0" tIns="0" rIns="0" bIns="0" rtlCol="0" anchor="ctr"/>
+          <a:lstStyle/>
+          <a:p>
+            <a:pPr marL="0" indent="0">
+              <a:buNone/>
+            </a:pPr>
+            <a:r>
+              <a:rPr lang="en-US" sz="1050" dirty="0">
+                <a:solidFill>
+                  <a:srgbClr val="1F2937"/>
+                </a:solidFill>
+                <a:latin typeface="Arial" pitchFamily="34" charset="0"/>
+                <a:ea typeface="Arial" pitchFamily="34" charset="-122"/>
+                <a:cs typeface="Arial" pitchFamily="34" charset="-120"/>
+              </a:rPr>
+              <a:t>Sin diferenciar datos de uso frecuente y datos de archivo histórico.</a:t>
+            </a:r>
+            <a:endParaRPr lang="en-US" sz="1050" dirty="0"/>
+          </a:p>
+        </p:txBody>
+      </p:sp>
+      <p:sp>
+        <p:nvSpPr>
+          <p:cNvPr id="24" name="Shape 18"/>
+          <p:cNvSpPr/>
+          <p:nvPr/>
+        </p:nvSpPr>
+        <p:spPr>
+          <a:xfrm>
+            <a:off x="4206240" y="3657600"/>
+            <a:ext cx="3429000" cy="1737360"/>
+          </a:xfrm>
+          <a:prstGeom prst="roundRect">
+            <a:avLst>
+              <a:gd name="adj" fmla="val 4211"/>
+            </a:avLst>
+          </a:prstGeom>
+          <a:solidFill>
+            <a:srgbClr val="EAF1F8"/>
+          </a:solidFill>
+          <a:ln/>
+          <a:effectLst>
+            <a:outerShdw blurRad="76200" dist="25400" dir="2700000" algn="bl" rotWithShape="0">
+              <a:srgbClr val="000000">
+                <a:alpha val="10000"/>
+              </a:srgbClr>
+            </a:outerShdw>
+          </a:effectLst>
+        </p:spPr>
+        <p:txBody>
+          <a:bodyPr/>
+          <a:lstStyle/>
+          <a:p>
+            <a:endParaRPr lang="es-CL"/>
+          </a:p>
+        </p:txBody>
+      </p:sp>
+      <p:sp>
+        <p:nvSpPr>
+          <p:cNvPr id="25" name="Shape 19"/>
+          <p:cNvSpPr/>
+          <p:nvPr/>
+        </p:nvSpPr>
+        <p:spPr>
+          <a:xfrm>
+            <a:off x="4407408" y="3858768"/>
+            <a:ext cx="457200" cy="457200"/>
+          </a:xfrm>
+          <a:prstGeom prst="ellipse">
+            <a:avLst/>
+          </a:prstGeom>
+          <a:solidFill>
+            <a:srgbClr val="FFFFFF"/>
+          </a:solidFill>
+          <a:ln/>
+        </p:spPr>
+        <p:txBody>
+          <a:bodyPr/>
+          <a:lstStyle/>
+          <a:p>
+            <a:endParaRPr lang="es-CL"/>
+          </a:p>
+        </p:txBody>
+      </p:sp>
+      <p:pic>
+        <p:nvPicPr>
+          <p:cNvPr id="26" name="Image 4" descr="preencoded.png"/>
+          <p:cNvPicPr>
+            <a:picLocks noChangeAspect="1"/>
+          </p:cNvPicPr>
+          <p:nvPr/>
+        </p:nvPicPr>
+        <p:blipFill>
+          <a:blip r:embed="rId7"/>
+          <a:stretch>
+            <a:fillRect/>
+          </a:stretch>
+        </p:blipFill>
+        <p:spPr>
+          <a:xfrm>
+            <a:off x="4526280" y="3977640"/>
+            <a:ext cx="219456" cy="219456"/>
+          </a:xfrm>
+          <a:prstGeom prst="rect">
+            <a:avLst/>
+          </a:prstGeom>
+        </p:spPr>
+      </p:pic>
+      <p:sp>
+        <p:nvSpPr>
+          <p:cNvPr id="27" name="Text 20"/>
+          <p:cNvSpPr/>
+          <p:nvPr/>
+        </p:nvSpPr>
+        <p:spPr>
+          <a:xfrm>
+            <a:off x="4983480" y="3840480"/>
+            <a:ext cx="2468880" cy="457200"/>
+          </a:xfrm>
+          <a:prstGeom prst="rect">
+            <a:avLst/>
+          </a:prstGeom>
+          <a:noFill/>
+          <a:ln/>
+        </p:spPr>
+        <p:txBody>
+          <a:bodyPr wrap="square" lIns="0" tIns="0" rIns="0" bIns="0" rtlCol="0" anchor="ctr"/>
+          <a:lstStyle/>
+          <a:p>
+            <a:pPr marL="0" indent="0">
+              <a:buNone/>
+            </a:pPr>
+            <a:r>
+              <a:rPr lang="en-US" sz="1400" b="1" dirty="0">
+                <a:solidFill>
+                  <a:srgbClr val="1F3864"/>
+                </a:solidFill>
+                <a:latin typeface="Arial" pitchFamily="34" charset="0"/>
+                <a:ea typeface="Arial" pitchFamily="34" charset="-122"/>
+                <a:cs typeface="Arial" pitchFamily="34" charset="-120"/>
+              </a:rPr>
+              <a:t>Red expuesta</a:t>
+            </a:r>
+            <a:endParaRPr lang="en-US" sz="1400" dirty="0"/>
+          </a:p>
+        </p:txBody>
+      </p:sp>
+      <p:sp>
+        <p:nvSpPr>
+          <p:cNvPr id="28" name="Text 21"/>
+          <p:cNvSpPr/>
+          <p:nvPr/>
+        </p:nvSpPr>
+        <p:spPr>
+          <a:xfrm>
+            <a:off x="4407408" y="4434840"/>
+            <a:ext cx="3026664" cy="822960"/>
+          </a:xfrm>
+          <a:prstGeom prst="rect">
+            <a:avLst/>
+          </a:prstGeom>
+          <a:noFill/>
+          <a:ln/>
+        </p:spPr>
+        <p:txBody>
+          <a:bodyPr wrap="square" lIns="0" tIns="0" rIns="0" bIns="0" rtlCol="0" anchor="ctr"/>
+          <a:lstStyle/>
+          <a:p>
+            <a:pPr marL="0" indent="0">
+              <a:buNone/>
+            </a:pPr>
+            <a:r>
+              <a:rPr lang="en-US" sz="1050" dirty="0">
+                <a:solidFill>
+                  <a:srgbClr val="1F2937"/>
+                </a:solidFill>
+                <a:latin typeface="Arial" pitchFamily="34" charset="0"/>
+                <a:ea typeface="Arial" pitchFamily="34" charset="-122"/>
+                <a:cs typeface="Arial" pitchFamily="34" charset="-120"/>
+              </a:rPr>
+              <a:t>Sin segmentación clara entre servicios internos y aplicaciones públicas.</a:t>
+            </a:r>
+            <a:endParaRPr lang="en-US" sz="1050" dirty="0"/>
+          </a:p>
+        </p:txBody>
+      </p:sp>
+      <p:sp>
+        <p:nvSpPr>
+          <p:cNvPr id="29" name="Shape 22"/>
+          <p:cNvSpPr/>
+          <p:nvPr/>
+        </p:nvSpPr>
+        <p:spPr>
+          <a:xfrm>
+            <a:off x="7863840" y="3657600"/>
+            <a:ext cx="3429000" cy="1737360"/>
+          </a:xfrm>
+          <a:prstGeom prst="roundRect">
+            <a:avLst>
+              <a:gd name="adj" fmla="val 4211"/>
+            </a:avLst>
+          </a:prstGeom>
+          <a:solidFill>
+            <a:srgbClr val="EAF1F8"/>
+          </a:solidFill>
+          <a:ln/>
+          <a:effectLst>
+            <a:outerShdw blurRad="76200" dist="25400" dir="2700000" algn="bl" rotWithShape="0">
+              <a:srgbClr val="000000">
+                <a:alpha val="10000"/>
+              </a:srgbClr>
+            </a:outerShdw>
+          </a:effectLst>
+        </p:spPr>
+        <p:txBody>
+          <a:bodyPr/>
+          <a:lstStyle/>
+          <a:p>
+            <a:endParaRPr lang="es-CL"/>
+          </a:p>
+        </p:txBody>
+      </p:sp>
+      <p:sp>
+        <p:nvSpPr>
+          <p:cNvPr id="30" name="Shape 23"/>
+          <p:cNvSpPr/>
+          <p:nvPr/>
+        </p:nvSpPr>
+        <p:spPr>
+          <a:xfrm>
+            <a:off x="8065008" y="3858768"/>
+            <a:ext cx="457200" cy="457200"/>
+          </a:xfrm>
+          <a:prstGeom prst="ellipse">
+            <a:avLst/>
+          </a:prstGeom>
+          <a:solidFill>
+            <a:srgbClr val="FFFFFF"/>
+          </a:solidFill>
+          <a:ln/>
+        </p:spPr>
+        <p:txBody>
+          <a:bodyPr/>
+          <a:lstStyle/>
+          <a:p>
+            <a:endParaRPr lang="es-CL"/>
+          </a:p>
+        </p:txBody>
+      </p:sp>
+      <p:pic>
+        <p:nvPicPr>
+          <p:cNvPr id="31" name="Image 5" descr="preencoded.png"/>
+          <p:cNvPicPr>
+            <a:picLocks noChangeAspect="1"/>
+          </p:cNvPicPr>
+          <p:nvPr/>
+        </p:nvPicPr>
+        <p:blipFill>
+          <a:blip r:embed="rId8"/>
+          <a:stretch>
+            <a:fillRect/>
+          </a:stretch>
+        </p:blipFill>
+        <p:spPr>
+          <a:xfrm>
             <a:off x="8183880" y="3977640"/>
             <a:ext cx="219456" cy="219456"/>
           </a:xfrm>
@@ -4156,7 +4066,7 @@
           <a:bodyPr wrap="square" lIns="0" tIns="0" rIns="0" bIns="0" rtlCol="0" anchor="ctr"/>
           <a:lstStyle/>
           <a:p>
-            <a:pPr indent="0" marL="0">
+            <a:pPr marL="0" indent="0">
               <a:buNone/>
             </a:pPr>
             <a:r>
@@ -4195,7 +4105,7 @@
           <a:bodyPr wrap="square" lIns="0" tIns="0" rIns="0" bIns="0" rtlCol="0" anchor="ctr"/>
           <a:lstStyle/>
           <a:p>
-            <a:pPr indent="0" marL="0">
+            <a:pPr marL="0" indent="0">
               <a:buNone/>
             </a:pPr>
             <a:r>
@@ -4234,9 +4144,6 @@
           <a:bodyPr wrap="square" lIns="0" tIns="0" rIns="0" bIns="0" rtlCol="0" anchor="ctr"/>
           <a:lstStyle/>
           <a:p>
-            <a:pPr algn="l" indent="0" marL="0">
-              <a:buNone/>
-            </a:pPr>
             <a:r>
               <a:rPr lang="en-US" sz="1000" dirty="0">
                 <a:solidFill>
@@ -4246,7 +4153,18 @@
                 <a:ea typeface="Arial" pitchFamily="34" charset="-122"/>
                 <a:cs typeface="Arial" pitchFamily="34" charset="-120"/>
               </a:rPr>
-              <a:t>Infraestructura Viva  ·  Módulo 4  ·  Alkemy</a:t>
+              <a:t>Infraestructura Viva  ·  Módulo 4  · </a:t>
+            </a:r>
+            <a:r>
+              <a:rPr lang="en-US" sz="1000" dirty="0">
+                <a:solidFill>
+                  <a:srgbClr val="6E86AC"/>
+                </a:solidFill>
+                <a:latin typeface="Arial" pitchFamily="34" charset="0"/>
+                <a:ea typeface="Arial" pitchFamily="34" charset="-122"/>
+                <a:cs typeface="Arial" pitchFamily="34" charset="-120"/>
+              </a:rPr>
+              <a:t>GRUPO 01</a:t>
             </a:r>
             <a:endParaRPr lang="en-US" sz="1000" dirty="0"/>
           </a:p>
@@ -4273,7 +4191,7 @@
           <a:bodyPr wrap="square" lIns="0" tIns="0" rIns="0" bIns="0" rtlCol="0" anchor="ctr"/>
           <a:lstStyle/>
           <a:p>
-            <a:pPr algn="r" indent="0" marL="0">
+            <a:pPr marL="0" indent="0" algn="r">
               <a:buNone/>
             </a:pPr>
             <a:r>
@@ -4307,6 +4225,7 @@
         <a:solidFill>
           <a:srgbClr val="1F3864"/>
         </a:solidFill>
+        <a:effectLst/>
       </p:bgPr>
     </p:bg>
     <p:spTree>
@@ -4344,7 +4263,7 @@
           <a:bodyPr wrap="square" lIns="0" tIns="0" rIns="0" bIns="0" rtlCol="0" anchor="ctr"/>
           <a:lstStyle/>
           <a:p>
-            <a:pPr indent="0" marL="0">
+            <a:pPr marL="0" indent="0">
               <a:buNone/>
             </a:pPr>
             <a:r>
@@ -4383,7 +4302,7 @@
           <a:bodyPr wrap="square" lIns="0" tIns="0" rIns="0" bIns="0" rtlCol="0" anchor="ctr"/>
           <a:lstStyle/>
           <a:p>
-            <a:pPr indent="0" marL="0">
+            <a:pPr marL="0" indent="0">
               <a:buNone/>
             </a:pPr>
             <a:r>
@@ -4422,6 +4341,13 @@
           </a:solidFill>
           <a:ln/>
         </p:spPr>
+        <p:txBody>
+          <a:bodyPr/>
+          <a:lstStyle/>
+          <a:p>
+            <a:endParaRPr lang="es-CL"/>
+          </a:p>
+        </p:txBody>
       </p:sp>
       <p:sp>
         <p:nvSpPr>
@@ -4442,220 +4368,17 @@
           </a:solidFill>
           <a:ln/>
         </p:spPr>
+        <p:txBody>
+          <a:bodyPr/>
+          <a:lstStyle/>
+          <a:p>
+            <a:endParaRPr lang="es-CL"/>
+          </a:p>
+        </p:txBody>
       </p:sp>
       <p:pic>
         <p:nvPicPr>
-          <p:cNvPr id="6" name="Image 0" descr="preencoded.png">    </p:cNvPr>
-          <p:cNvPicPr>
-            <a:picLocks noChangeAspect="1"/>
-          </p:cNvPicPr>
-          <p:nvPr/>
-        </p:nvPicPr>
-        <p:blipFill>
-          <a:blip r:embed="rId1"/>
-          <a:stretch>
-            <a:fillRect/>
-          </a:stretch>
-        </p:blipFill>
-        <p:spPr>
-          <a:xfrm>
-            <a:off x="929396" y="2671328"/>
-            <a:ext cx="280904" cy="280904"/>
-          </a:xfrm>
-          <a:prstGeom prst="rect">
-            <a:avLst/>
-          </a:prstGeom>
-        </p:spPr>
-      </p:pic>
-      <p:sp>
-        <p:nvSpPr>
-          <p:cNvPr id="7" name="Text 4"/>
-          <p:cNvSpPr/>
-          <p:nvPr/>
-        </p:nvSpPr>
-        <p:spPr>
-          <a:xfrm>
-            <a:off x="1508760" y="2103120"/>
-            <a:ext cx="2286000" cy="1417320"/>
-          </a:xfrm>
-          <a:prstGeom prst="rect">
-            <a:avLst/>
-          </a:prstGeom>
-          <a:noFill/>
-          <a:ln/>
-        </p:spPr>
-        <p:txBody>
-          <a:bodyPr wrap="square" lIns="0" tIns="0" rIns="0" bIns="0" rtlCol="0" anchor="ctr"/>
-          <a:lstStyle/>
-          <a:p>
-            <a:pPr indent="0" marL="0">
-              <a:buNone/>
-            </a:pPr>
-            <a:r>
-              <a:rPr lang="en-US" sz="1350" b="1" dirty="0">
-                <a:solidFill>
-                  <a:srgbClr val="FFFFFF"/>
-                </a:solidFill>
-                <a:latin typeface="Arial" pitchFamily="34" charset="0"/>
-                <a:ea typeface="Arial" pitchFamily="34" charset="-122"/>
-                <a:cs typeface="Arial" pitchFamily="34" charset="-120"/>
-              </a:rPr>
-              <a:t>Cómputo escalable y seguro</a:t>
-            </a:r>
-            <a:endParaRPr lang="en-US" sz="1350" dirty="0"/>
-          </a:p>
-        </p:txBody>
-      </p:sp>
-      <p:sp>
-        <p:nvSpPr>
-          <p:cNvPr id="8" name="Shape 5"/>
-          <p:cNvSpPr/>
-          <p:nvPr/>
-        </p:nvSpPr>
-        <p:spPr>
-          <a:xfrm>
-            <a:off x="4206240" y="2103120"/>
-            <a:ext cx="3429000" cy="1417320"/>
-          </a:xfrm>
-          <a:prstGeom prst="roundRect">
-            <a:avLst>
-              <a:gd name="adj" fmla="val 5161"/>
-            </a:avLst>
-          </a:prstGeom>
-          <a:solidFill>
-            <a:srgbClr val="27407A"/>
-          </a:solidFill>
-          <a:ln/>
-        </p:spPr>
-      </p:sp>
-      <p:sp>
-        <p:nvSpPr>
-          <p:cNvPr id="9" name="Shape 6"/>
-          <p:cNvSpPr/>
-          <p:nvPr/>
-        </p:nvSpPr>
-        <p:spPr>
-          <a:xfrm>
-            <a:off x="4434840" y="2519172"/>
-            <a:ext cx="585216" cy="585216"/>
-          </a:xfrm>
-          <a:prstGeom prst="ellipse">
-            <a:avLst/>
-          </a:prstGeom>
-          <a:solidFill>
-            <a:srgbClr val="2E75B6"/>
-          </a:solidFill>
-          <a:ln/>
-        </p:spPr>
-      </p:sp>
-      <p:pic>
-        <p:nvPicPr>
-          <p:cNvPr id="10" name="Image 1" descr="preencoded.png">    </p:cNvPr>
-          <p:cNvPicPr>
-            <a:picLocks noChangeAspect="1"/>
-          </p:cNvPicPr>
-          <p:nvPr/>
-        </p:nvPicPr>
-        <p:blipFill>
-          <a:blip r:embed="rId2"/>
-          <a:stretch>
-            <a:fillRect/>
-          </a:stretch>
-        </p:blipFill>
-        <p:spPr>
-          <a:xfrm>
-            <a:off x="4586996" y="2671328"/>
-            <a:ext cx="280904" cy="280904"/>
-          </a:xfrm>
-          <a:prstGeom prst="rect">
-            <a:avLst/>
-          </a:prstGeom>
-        </p:spPr>
-      </p:pic>
-      <p:sp>
-        <p:nvSpPr>
-          <p:cNvPr id="11" name="Text 7"/>
-          <p:cNvSpPr/>
-          <p:nvPr/>
-        </p:nvSpPr>
-        <p:spPr>
-          <a:xfrm>
-            <a:off x="5166360" y="2103120"/>
-            <a:ext cx="2286000" cy="1417320"/>
-          </a:xfrm>
-          <a:prstGeom prst="rect">
-            <a:avLst/>
-          </a:prstGeom>
-          <a:noFill/>
-          <a:ln/>
-        </p:spPr>
-        <p:txBody>
-          <a:bodyPr wrap="square" lIns="0" tIns="0" rIns="0" bIns="0" rtlCol="0" anchor="ctr"/>
-          <a:lstStyle/>
-          <a:p>
-            <a:pPr indent="0" marL="0">
-              <a:buNone/>
-            </a:pPr>
-            <a:r>
-              <a:rPr lang="en-US" sz="1350" b="1" dirty="0">
-                <a:solidFill>
-                  <a:srgbClr val="FFFFFF"/>
-                </a:solidFill>
-                <a:latin typeface="Arial" pitchFamily="34" charset="0"/>
-                <a:ea typeface="Arial" pitchFamily="34" charset="-122"/>
-                <a:cs typeface="Arial" pitchFamily="34" charset="-120"/>
-              </a:rPr>
-              <a:t>BD relacional + NoSQL integradas</a:t>
-            </a:r>
-            <a:endParaRPr lang="en-US" sz="1350" dirty="0"/>
-          </a:p>
-        </p:txBody>
-      </p:sp>
-      <p:sp>
-        <p:nvSpPr>
-          <p:cNvPr id="12" name="Shape 8"/>
-          <p:cNvSpPr/>
-          <p:nvPr/>
-        </p:nvSpPr>
-        <p:spPr>
-          <a:xfrm>
-            <a:off x="7863840" y="2103120"/>
-            <a:ext cx="3429000" cy="1417320"/>
-          </a:xfrm>
-          <a:prstGeom prst="roundRect">
-            <a:avLst>
-              <a:gd name="adj" fmla="val 5161"/>
-            </a:avLst>
-          </a:prstGeom>
-          <a:solidFill>
-            <a:srgbClr val="27407A"/>
-          </a:solidFill>
-          <a:ln/>
-        </p:spPr>
-      </p:sp>
-      <p:sp>
-        <p:nvSpPr>
-          <p:cNvPr id="13" name="Shape 9"/>
-          <p:cNvSpPr/>
-          <p:nvPr/>
-        </p:nvSpPr>
-        <p:spPr>
-          <a:xfrm>
-            <a:off x="8092440" y="2519172"/>
-            <a:ext cx="585216" cy="585216"/>
-          </a:xfrm>
-          <a:prstGeom prst="ellipse">
-            <a:avLst/>
-          </a:prstGeom>
-          <a:solidFill>
-            <a:srgbClr val="2E75B6"/>
-          </a:solidFill>
-          <a:ln/>
-        </p:spPr>
-      </p:sp>
-      <p:pic>
-        <p:nvPicPr>
-          <p:cNvPr id="14" name="Image 2" descr="preencoded.png">    </p:cNvPr>
+          <p:cNvPr id="6" name="Image 0" descr="preencoded.png"/>
           <p:cNvPicPr>
             <a:picLocks noChangeAspect="1"/>
           </p:cNvPicPr>
@@ -4669,7 +4392,7 @@
         </p:blipFill>
         <p:spPr>
           <a:xfrm>
-            <a:off x="8244596" y="2671328"/>
+            <a:off x="929396" y="2671328"/>
             <a:ext cx="280904" cy="280904"/>
           </a:xfrm>
           <a:prstGeom prst="rect">
@@ -4679,13 +4402,13 @@
       </p:pic>
       <p:sp>
         <p:nvSpPr>
-          <p:cNvPr id="15" name="Text 10"/>
-          <p:cNvSpPr/>
-          <p:nvPr/>
-        </p:nvSpPr>
-        <p:spPr>
-          <a:xfrm>
-            <a:off x="8823960" y="2103120"/>
+          <p:cNvPr id="7" name="Text 4"/>
+          <p:cNvSpPr/>
+          <p:nvPr/>
+        </p:nvSpPr>
+        <p:spPr>
+          <a:xfrm>
+            <a:off x="1508760" y="2103120"/>
             <a:ext cx="2286000" cy="1417320"/>
           </a:xfrm>
           <a:prstGeom prst="rect">
@@ -4698,7 +4421,7 @@
           <a:bodyPr wrap="square" lIns="0" tIns="0" rIns="0" bIns="0" rtlCol="0" anchor="ctr"/>
           <a:lstStyle/>
           <a:p>
-            <a:pPr indent="0" marL="0">
+            <a:pPr marL="0" indent="0">
               <a:buNone/>
             </a:pPr>
             <a:r>
@@ -4710,7 +4433,7 @@
                 <a:ea typeface="Arial" pitchFamily="34" charset="-122"/>
                 <a:cs typeface="Arial" pitchFamily="34" charset="-120"/>
               </a:rPr>
-              <a:t>Almacenamiento por frecuencia de uso</a:t>
+              <a:t>Cómputo escalable y seguro</a:t>
             </a:r>
             <a:endParaRPr lang="en-US" sz="1350" dirty="0"/>
           </a:p>
@@ -4718,13 +4441,13 @@
       </p:sp>
       <p:sp>
         <p:nvSpPr>
-          <p:cNvPr id="16" name="Shape 11"/>
-          <p:cNvSpPr/>
-          <p:nvPr/>
-        </p:nvSpPr>
-        <p:spPr>
-          <a:xfrm>
-            <a:off x="548640" y="3794760"/>
+          <p:cNvPr id="8" name="Shape 5"/>
+          <p:cNvSpPr/>
+          <p:nvPr/>
+        </p:nvSpPr>
+        <p:spPr>
+          <a:xfrm>
+            <a:off x="4206240" y="2103120"/>
             <a:ext cx="3429000" cy="1417320"/>
           </a:xfrm>
           <a:prstGeom prst="roundRect">
@@ -4737,16 +4460,23 @@
           </a:solidFill>
           <a:ln/>
         </p:spPr>
-      </p:sp>
-      <p:sp>
-        <p:nvSpPr>
-          <p:cNvPr id="17" name="Shape 12"/>
-          <p:cNvSpPr/>
-          <p:nvPr/>
-        </p:nvSpPr>
-        <p:spPr>
-          <a:xfrm>
-            <a:off x="777240" y="4210812"/>
+        <p:txBody>
+          <a:bodyPr/>
+          <a:lstStyle/>
+          <a:p>
+            <a:endParaRPr lang="es-CL"/>
+          </a:p>
+        </p:txBody>
+      </p:sp>
+      <p:sp>
+        <p:nvSpPr>
+          <p:cNvPr id="9" name="Shape 6"/>
+          <p:cNvSpPr/>
+          <p:nvPr/>
+        </p:nvSpPr>
+        <p:spPr>
+          <a:xfrm>
+            <a:off x="4434840" y="2519172"/>
             <a:ext cx="585216" cy="585216"/>
           </a:xfrm>
           <a:prstGeom prst="ellipse">
@@ -4757,10 +4487,17 @@
           </a:solidFill>
           <a:ln/>
         </p:spPr>
+        <p:txBody>
+          <a:bodyPr/>
+          <a:lstStyle/>
+          <a:p>
+            <a:endParaRPr lang="es-CL"/>
+          </a:p>
+        </p:txBody>
       </p:sp>
       <p:pic>
         <p:nvPicPr>
-          <p:cNvPr id="18" name="Image 3" descr="preencoded.png">    </p:cNvPr>
+          <p:cNvPr id="10" name="Image 1" descr="preencoded.png"/>
           <p:cNvPicPr>
             <a:picLocks noChangeAspect="1"/>
           </p:cNvPicPr>
@@ -4774,7 +4511,7 @@
         </p:blipFill>
         <p:spPr>
           <a:xfrm>
-            <a:off x="929396" y="4362968"/>
+            <a:off x="4586996" y="2671328"/>
             <a:ext cx="280904" cy="280904"/>
           </a:xfrm>
           <a:prstGeom prst="rect">
@@ -4784,13 +4521,13 @@
       </p:pic>
       <p:sp>
         <p:nvSpPr>
-          <p:cNvPr id="19" name="Text 13"/>
-          <p:cNvSpPr/>
-          <p:nvPr/>
-        </p:nvSpPr>
-        <p:spPr>
-          <a:xfrm>
-            <a:off x="1508760" y="3794760"/>
+          <p:cNvPr id="11" name="Text 7"/>
+          <p:cNvSpPr/>
+          <p:nvPr/>
+        </p:nvSpPr>
+        <p:spPr>
+          <a:xfrm>
+            <a:off x="5166360" y="2103120"/>
             <a:ext cx="2286000" cy="1417320"/>
           </a:xfrm>
           <a:prstGeom prst="rect">
@@ -4803,7 +4540,7 @@
           <a:bodyPr wrap="square" lIns="0" tIns="0" rIns="0" bIns="0" rtlCol="0" anchor="ctr"/>
           <a:lstStyle/>
           <a:p>
-            <a:pPr indent="0" marL="0">
+            <a:pPr marL="0" indent="0">
               <a:buNone/>
             </a:pPr>
             <a:r>
@@ -4815,7 +4552,7 @@
                 <a:ea typeface="Arial" pitchFamily="34" charset="-122"/>
                 <a:cs typeface="Arial" pitchFamily="34" charset="-120"/>
               </a:rPr>
-              <a:t>Red virtual segmentada</a:t>
+              <a:t>BD relacional + NoSQL integradas</a:t>
             </a:r>
             <a:endParaRPr lang="en-US" sz="1350" dirty="0"/>
           </a:p>
@@ -4823,13 +4560,13 @@
       </p:sp>
       <p:sp>
         <p:nvSpPr>
-          <p:cNvPr id="20" name="Shape 14"/>
-          <p:cNvSpPr/>
-          <p:nvPr/>
-        </p:nvSpPr>
-        <p:spPr>
-          <a:xfrm>
-            <a:off x="4206240" y="3794760"/>
+          <p:cNvPr id="12" name="Shape 8"/>
+          <p:cNvSpPr/>
+          <p:nvPr/>
+        </p:nvSpPr>
+        <p:spPr>
+          <a:xfrm>
+            <a:off x="7863840" y="2103120"/>
             <a:ext cx="3429000" cy="1417320"/>
           </a:xfrm>
           <a:prstGeom prst="roundRect">
@@ -4842,16 +4579,23 @@
           </a:solidFill>
           <a:ln/>
         </p:spPr>
-      </p:sp>
-      <p:sp>
-        <p:nvSpPr>
-          <p:cNvPr id="21" name="Shape 15"/>
-          <p:cNvSpPr/>
-          <p:nvPr/>
-        </p:nvSpPr>
-        <p:spPr>
-          <a:xfrm>
-            <a:off x="4434840" y="4210812"/>
+        <p:txBody>
+          <a:bodyPr/>
+          <a:lstStyle/>
+          <a:p>
+            <a:endParaRPr lang="es-CL"/>
+          </a:p>
+        </p:txBody>
+      </p:sp>
+      <p:sp>
+        <p:nvSpPr>
+          <p:cNvPr id="13" name="Shape 9"/>
+          <p:cNvSpPr/>
+          <p:nvPr/>
+        </p:nvSpPr>
+        <p:spPr>
+          <a:xfrm>
+            <a:off x="8092440" y="2519172"/>
             <a:ext cx="585216" cy="585216"/>
           </a:xfrm>
           <a:prstGeom prst="ellipse">
@@ -4862,10 +4606,17 @@
           </a:solidFill>
           <a:ln/>
         </p:spPr>
+        <p:txBody>
+          <a:bodyPr/>
+          <a:lstStyle/>
+          <a:p>
+            <a:endParaRPr lang="es-CL"/>
+          </a:p>
+        </p:txBody>
       </p:sp>
       <p:pic>
         <p:nvPicPr>
-          <p:cNvPr id="22" name="Image 4" descr="preencoded.png">    </p:cNvPr>
+          <p:cNvPr id="14" name="Image 2" descr="preencoded.png"/>
           <p:cNvPicPr>
             <a:picLocks noChangeAspect="1"/>
           </p:cNvPicPr>
@@ -4879,7 +4630,7 @@
         </p:blipFill>
         <p:spPr>
           <a:xfrm>
-            <a:off x="4586996" y="4362968"/>
+            <a:off x="8244596" y="2671328"/>
             <a:ext cx="280904" cy="280904"/>
           </a:xfrm>
           <a:prstGeom prst="rect">
@@ -4889,13 +4640,13 @@
       </p:pic>
       <p:sp>
         <p:nvSpPr>
-          <p:cNvPr id="23" name="Text 16"/>
-          <p:cNvSpPr/>
-          <p:nvPr/>
-        </p:nvSpPr>
-        <p:spPr>
-          <a:xfrm>
-            <a:off x="5166360" y="3794760"/>
+          <p:cNvPr id="15" name="Text 10"/>
+          <p:cNvSpPr/>
+          <p:nvPr/>
+        </p:nvSpPr>
+        <p:spPr>
+          <a:xfrm>
+            <a:off x="8823960" y="2103120"/>
             <a:ext cx="2286000" cy="1417320"/>
           </a:xfrm>
           <a:prstGeom prst="rect">
@@ -4908,7 +4659,7 @@
           <a:bodyPr wrap="square" lIns="0" tIns="0" rIns="0" bIns="0" rtlCol="0" anchor="ctr"/>
           <a:lstStyle/>
           <a:p>
-            <a:pPr indent="0" marL="0">
+            <a:pPr marL="0" indent="0">
               <a:buNone/>
             </a:pPr>
             <a:r>
@@ -4920,7 +4671,7 @@
                 <a:ea typeface="Arial" pitchFamily="34" charset="-122"/>
                 <a:cs typeface="Arial" pitchFamily="34" charset="-120"/>
               </a:rPr>
-              <a:t>Monitoreo y notificaciones proactivas</a:t>
+              <a:t>Almacenamiento por frecuencia de uso</a:t>
             </a:r>
             <a:endParaRPr lang="en-US" sz="1350" dirty="0"/>
           </a:p>
@@ -4928,13 +4679,13 @@
       </p:sp>
       <p:sp>
         <p:nvSpPr>
-          <p:cNvPr id="24" name="Shape 17"/>
-          <p:cNvSpPr/>
-          <p:nvPr/>
-        </p:nvSpPr>
-        <p:spPr>
-          <a:xfrm>
-            <a:off x="7863840" y="3794760"/>
+          <p:cNvPr id="16" name="Shape 11"/>
+          <p:cNvSpPr/>
+          <p:nvPr/>
+        </p:nvSpPr>
+        <p:spPr>
+          <a:xfrm>
+            <a:off x="548640" y="3794760"/>
             <a:ext cx="3429000" cy="1417320"/>
           </a:xfrm>
           <a:prstGeom prst="roundRect">
@@ -4947,16 +4698,23 @@
           </a:solidFill>
           <a:ln/>
         </p:spPr>
-      </p:sp>
-      <p:sp>
-        <p:nvSpPr>
-          <p:cNvPr id="25" name="Shape 18"/>
-          <p:cNvSpPr/>
-          <p:nvPr/>
-        </p:nvSpPr>
-        <p:spPr>
-          <a:xfrm>
-            <a:off x="8092440" y="4210812"/>
+        <p:txBody>
+          <a:bodyPr/>
+          <a:lstStyle/>
+          <a:p>
+            <a:endParaRPr lang="es-CL"/>
+          </a:p>
+        </p:txBody>
+      </p:sp>
+      <p:sp>
+        <p:nvSpPr>
+          <p:cNvPr id="17" name="Shape 12"/>
+          <p:cNvSpPr/>
+          <p:nvPr/>
+        </p:nvSpPr>
+        <p:spPr>
+          <a:xfrm>
+            <a:off x="777240" y="4210812"/>
             <a:ext cx="585216" cy="585216"/>
           </a:xfrm>
           <a:prstGeom prst="ellipse">
@@ -4967,10 +4725,17 @@
           </a:solidFill>
           <a:ln/>
         </p:spPr>
+        <p:txBody>
+          <a:bodyPr/>
+          <a:lstStyle/>
+          <a:p>
+            <a:endParaRPr lang="es-CL"/>
+          </a:p>
+        </p:txBody>
       </p:sp>
       <p:pic>
         <p:nvPicPr>
-          <p:cNvPr id="26" name="Image 5" descr="preencoded.png">    </p:cNvPr>
+          <p:cNvPr id="18" name="Image 3" descr="preencoded.png"/>
           <p:cNvPicPr>
             <a:picLocks noChangeAspect="1"/>
           </p:cNvPicPr>
@@ -4984,6 +4749,244 @@
         </p:blipFill>
         <p:spPr>
           <a:xfrm>
+            <a:off x="929396" y="4362968"/>
+            <a:ext cx="280904" cy="280904"/>
+          </a:xfrm>
+          <a:prstGeom prst="rect">
+            <a:avLst/>
+          </a:prstGeom>
+        </p:spPr>
+      </p:pic>
+      <p:sp>
+        <p:nvSpPr>
+          <p:cNvPr id="19" name="Text 13"/>
+          <p:cNvSpPr/>
+          <p:nvPr/>
+        </p:nvSpPr>
+        <p:spPr>
+          <a:xfrm>
+            <a:off x="1508760" y="3794760"/>
+            <a:ext cx="2286000" cy="1417320"/>
+          </a:xfrm>
+          <a:prstGeom prst="rect">
+            <a:avLst/>
+          </a:prstGeom>
+          <a:noFill/>
+          <a:ln/>
+        </p:spPr>
+        <p:txBody>
+          <a:bodyPr wrap="square" lIns="0" tIns="0" rIns="0" bIns="0" rtlCol="0" anchor="ctr"/>
+          <a:lstStyle/>
+          <a:p>
+            <a:pPr marL="0" indent="0">
+              <a:buNone/>
+            </a:pPr>
+            <a:r>
+              <a:rPr lang="en-US" sz="1350" b="1" dirty="0">
+                <a:solidFill>
+                  <a:srgbClr val="FFFFFF"/>
+                </a:solidFill>
+                <a:latin typeface="Arial" pitchFamily="34" charset="0"/>
+                <a:ea typeface="Arial" pitchFamily="34" charset="-122"/>
+                <a:cs typeface="Arial" pitchFamily="34" charset="-120"/>
+              </a:rPr>
+              <a:t>Red virtual segmentada</a:t>
+            </a:r>
+            <a:endParaRPr lang="en-US" sz="1350" dirty="0"/>
+          </a:p>
+        </p:txBody>
+      </p:sp>
+      <p:sp>
+        <p:nvSpPr>
+          <p:cNvPr id="20" name="Shape 14"/>
+          <p:cNvSpPr/>
+          <p:nvPr/>
+        </p:nvSpPr>
+        <p:spPr>
+          <a:xfrm>
+            <a:off x="4206240" y="3794760"/>
+            <a:ext cx="3429000" cy="1417320"/>
+          </a:xfrm>
+          <a:prstGeom prst="roundRect">
+            <a:avLst>
+              <a:gd name="adj" fmla="val 5161"/>
+            </a:avLst>
+          </a:prstGeom>
+          <a:solidFill>
+            <a:srgbClr val="27407A"/>
+          </a:solidFill>
+          <a:ln/>
+        </p:spPr>
+        <p:txBody>
+          <a:bodyPr/>
+          <a:lstStyle/>
+          <a:p>
+            <a:endParaRPr lang="es-CL"/>
+          </a:p>
+        </p:txBody>
+      </p:sp>
+      <p:sp>
+        <p:nvSpPr>
+          <p:cNvPr id="21" name="Shape 15"/>
+          <p:cNvSpPr/>
+          <p:nvPr/>
+        </p:nvSpPr>
+        <p:spPr>
+          <a:xfrm>
+            <a:off x="4434840" y="4210812"/>
+            <a:ext cx="585216" cy="585216"/>
+          </a:xfrm>
+          <a:prstGeom prst="ellipse">
+            <a:avLst/>
+          </a:prstGeom>
+          <a:solidFill>
+            <a:srgbClr val="2E75B6"/>
+          </a:solidFill>
+          <a:ln/>
+        </p:spPr>
+        <p:txBody>
+          <a:bodyPr/>
+          <a:lstStyle/>
+          <a:p>
+            <a:endParaRPr lang="es-CL"/>
+          </a:p>
+        </p:txBody>
+      </p:sp>
+      <p:pic>
+        <p:nvPicPr>
+          <p:cNvPr id="22" name="Image 4" descr="preencoded.png"/>
+          <p:cNvPicPr>
+            <a:picLocks noChangeAspect="1"/>
+          </p:cNvPicPr>
+          <p:nvPr/>
+        </p:nvPicPr>
+        <p:blipFill>
+          <a:blip r:embed="rId7"/>
+          <a:stretch>
+            <a:fillRect/>
+          </a:stretch>
+        </p:blipFill>
+        <p:spPr>
+          <a:xfrm>
+            <a:off x="4586996" y="4362968"/>
+            <a:ext cx="280904" cy="280904"/>
+          </a:xfrm>
+          <a:prstGeom prst="rect">
+            <a:avLst/>
+          </a:prstGeom>
+        </p:spPr>
+      </p:pic>
+      <p:sp>
+        <p:nvSpPr>
+          <p:cNvPr id="23" name="Text 16"/>
+          <p:cNvSpPr/>
+          <p:nvPr/>
+        </p:nvSpPr>
+        <p:spPr>
+          <a:xfrm>
+            <a:off x="5166360" y="3794760"/>
+            <a:ext cx="2286000" cy="1417320"/>
+          </a:xfrm>
+          <a:prstGeom prst="rect">
+            <a:avLst/>
+          </a:prstGeom>
+          <a:noFill/>
+          <a:ln/>
+        </p:spPr>
+        <p:txBody>
+          <a:bodyPr wrap="square" lIns="0" tIns="0" rIns="0" bIns="0" rtlCol="0" anchor="ctr"/>
+          <a:lstStyle/>
+          <a:p>
+            <a:pPr marL="0" indent="0">
+              <a:buNone/>
+            </a:pPr>
+            <a:r>
+              <a:rPr lang="en-US" sz="1350" b="1" dirty="0">
+                <a:solidFill>
+                  <a:srgbClr val="FFFFFF"/>
+                </a:solidFill>
+                <a:latin typeface="Arial" pitchFamily="34" charset="0"/>
+                <a:ea typeface="Arial" pitchFamily="34" charset="-122"/>
+                <a:cs typeface="Arial" pitchFamily="34" charset="-120"/>
+              </a:rPr>
+              <a:t>Monitoreo y notificaciones proactivas</a:t>
+            </a:r>
+            <a:endParaRPr lang="en-US" sz="1350" dirty="0"/>
+          </a:p>
+        </p:txBody>
+      </p:sp>
+      <p:sp>
+        <p:nvSpPr>
+          <p:cNvPr id="24" name="Shape 17"/>
+          <p:cNvSpPr/>
+          <p:nvPr/>
+        </p:nvSpPr>
+        <p:spPr>
+          <a:xfrm>
+            <a:off x="7863840" y="3794760"/>
+            <a:ext cx="3429000" cy="1417320"/>
+          </a:xfrm>
+          <a:prstGeom prst="roundRect">
+            <a:avLst>
+              <a:gd name="adj" fmla="val 5161"/>
+            </a:avLst>
+          </a:prstGeom>
+          <a:solidFill>
+            <a:srgbClr val="27407A"/>
+          </a:solidFill>
+          <a:ln/>
+        </p:spPr>
+        <p:txBody>
+          <a:bodyPr/>
+          <a:lstStyle/>
+          <a:p>
+            <a:endParaRPr lang="es-CL"/>
+          </a:p>
+        </p:txBody>
+      </p:sp>
+      <p:sp>
+        <p:nvSpPr>
+          <p:cNvPr id="25" name="Shape 18"/>
+          <p:cNvSpPr/>
+          <p:nvPr/>
+        </p:nvSpPr>
+        <p:spPr>
+          <a:xfrm>
+            <a:off x="8092440" y="4210812"/>
+            <a:ext cx="585216" cy="585216"/>
+          </a:xfrm>
+          <a:prstGeom prst="ellipse">
+            <a:avLst/>
+          </a:prstGeom>
+          <a:solidFill>
+            <a:srgbClr val="2E75B6"/>
+          </a:solidFill>
+          <a:ln/>
+        </p:spPr>
+        <p:txBody>
+          <a:bodyPr/>
+          <a:lstStyle/>
+          <a:p>
+            <a:endParaRPr lang="es-CL"/>
+          </a:p>
+        </p:txBody>
+      </p:sp>
+      <p:pic>
+        <p:nvPicPr>
+          <p:cNvPr id="26" name="Image 5" descr="preencoded.png"/>
+          <p:cNvPicPr>
+            <a:picLocks noChangeAspect="1"/>
+          </p:cNvPicPr>
+          <p:nvPr/>
+        </p:nvPicPr>
+        <p:blipFill>
+          <a:blip r:embed="rId8"/>
+          <a:stretch>
+            <a:fillRect/>
+          </a:stretch>
+        </p:blipFill>
+        <p:spPr>
+          <a:xfrm>
             <a:off x="8244596" y="4362968"/>
             <a:ext cx="280904" cy="280904"/>
           </a:xfrm>
@@ -5013,7 +5016,7 @@
           <a:bodyPr wrap="square" lIns="0" tIns="0" rIns="0" bIns="0" rtlCol="0" anchor="ctr"/>
           <a:lstStyle/>
           <a:p>
-            <a:pPr indent="0" marL="0">
+            <a:pPr marL="0" indent="0">
               <a:buNone/>
             </a:pPr>
             <a:r>
@@ -5052,9 +5055,6 @@
           <a:bodyPr wrap="square" lIns="0" tIns="0" rIns="0" bIns="0" rtlCol="0" anchor="ctr"/>
           <a:lstStyle/>
           <a:p>
-            <a:pPr algn="l" indent="0" marL="0">
-              <a:buNone/>
-            </a:pPr>
             <a:r>
               <a:rPr lang="en-US" sz="1000" dirty="0">
                 <a:solidFill>
@@ -5064,7 +5064,18 @@
                 <a:ea typeface="Arial" pitchFamily="34" charset="-122"/>
                 <a:cs typeface="Arial" pitchFamily="34" charset="-120"/>
               </a:rPr>
-              <a:t>Infraestructura Viva  ·  Módulo 4  ·  Alkemy</a:t>
+              <a:t>Infraestructura Viva  ·  Módulo 4  · </a:t>
+            </a:r>
+            <a:r>
+              <a:rPr lang="en-US" sz="1000" dirty="0">
+                <a:solidFill>
+                  <a:srgbClr val="6E86AC"/>
+                </a:solidFill>
+                <a:latin typeface="Arial" pitchFamily="34" charset="0"/>
+                <a:ea typeface="Arial" pitchFamily="34" charset="-122"/>
+                <a:cs typeface="Arial" pitchFamily="34" charset="-120"/>
+              </a:rPr>
+              <a:t>GRUPO 01</a:t>
             </a:r>
             <a:endParaRPr lang="en-US" sz="1000" dirty="0"/>
           </a:p>
@@ -5091,7 +5102,7 @@
           <a:bodyPr wrap="square" lIns="0" tIns="0" rIns="0" bIns="0" rtlCol="0" anchor="ctr"/>
           <a:lstStyle/>
           <a:p>
-            <a:pPr algn="r" indent="0" marL="0">
+            <a:pPr marL="0" indent="0" algn="r">
               <a:buNone/>
             </a:pPr>
             <a:r>
@@ -5125,6 +5136,7 @@
         <a:solidFill>
           <a:srgbClr val="FFFFFF"/>
         </a:solidFill>
+        <a:effectLst/>
       </p:bgPr>
     </p:bg>
     <p:spTree>
@@ -5162,7 +5174,7 @@
           <a:bodyPr wrap="square" lIns="0" tIns="0" rIns="0" bIns="0" rtlCol="0" anchor="ctr"/>
           <a:lstStyle/>
           <a:p>
-            <a:pPr indent="0" marL="0">
+            <a:pPr marL="0" indent="0">
               <a:buNone/>
             </a:pPr>
             <a:r>
@@ -5201,7 +5213,7 @@
           <a:bodyPr wrap="square" lIns="0" tIns="0" rIns="0" bIns="0" rtlCol="0" anchor="ctr"/>
           <a:lstStyle/>
           <a:p>
-            <a:pPr indent="0" marL="0">
+            <a:pPr marL="0" indent="0">
               <a:buNone/>
             </a:pPr>
             <a:r>
@@ -5221,14 +5233,14 @@
       </p:sp>
       <p:pic>
         <p:nvPicPr>
-          <p:cNvPr id="4" name="Image 0" descr="/home/claude/proyecto/diagrama.png">    </p:cNvPr>
+          <p:cNvPr id="4" name="Image 0" descr="/home/claude/proyecto/diagrama.png"/>
           <p:cNvPicPr>
             <a:picLocks noChangeAspect="1"/>
           </p:cNvPicPr>
           <p:nvPr/>
         </p:nvPicPr>
         <p:blipFill>
-          <a:blip r:embed="rId1"/>
+          <a:blip r:embed="rId3"/>
           <a:stretch>
             <a:fillRect/>
           </a:stretch>
@@ -5264,9 +5276,6 @@
           <a:bodyPr wrap="square" lIns="0" tIns="0" rIns="0" bIns="0" rtlCol="0" anchor="ctr"/>
           <a:lstStyle/>
           <a:p>
-            <a:pPr algn="l" indent="0" marL="0">
-              <a:buNone/>
-            </a:pPr>
             <a:r>
               <a:rPr lang="en-US" sz="1000" dirty="0">
                 <a:solidFill>
@@ -5276,7 +5285,18 @@
                 <a:ea typeface="Arial" pitchFamily="34" charset="-122"/>
                 <a:cs typeface="Arial" pitchFamily="34" charset="-120"/>
               </a:rPr>
-              <a:t>Infraestructura Viva  ·  Módulo 4  ·  Alkemy</a:t>
+              <a:t>Infraestructura Viva  ·  Módulo 4  · </a:t>
+            </a:r>
+            <a:r>
+              <a:rPr lang="en-US" sz="1000" dirty="0">
+                <a:solidFill>
+                  <a:srgbClr val="6E86AC"/>
+                </a:solidFill>
+                <a:latin typeface="Arial" pitchFamily="34" charset="0"/>
+                <a:ea typeface="Arial" pitchFamily="34" charset="-122"/>
+                <a:cs typeface="Arial" pitchFamily="34" charset="-120"/>
+              </a:rPr>
+              <a:t>GRUPO 01</a:t>
             </a:r>
             <a:endParaRPr lang="en-US" sz="1000" dirty="0"/>
           </a:p>
@@ -5303,7 +5323,7 @@
           <a:bodyPr wrap="square" lIns="0" tIns="0" rIns="0" bIns="0" rtlCol="0" anchor="ctr"/>
           <a:lstStyle/>
           <a:p>
-            <a:pPr algn="r" indent="0" marL="0">
+            <a:pPr marL="0" indent="0" algn="r">
               <a:buNone/>
             </a:pPr>
             <a:r>
@@ -5337,6 +5357,7 @@
         <a:solidFill>
           <a:srgbClr val="FFFFFF"/>
         </a:solidFill>
+        <a:effectLst/>
       </p:bgPr>
     </p:bg>
     <p:spTree>
@@ -5374,7 +5395,7 @@
           <a:bodyPr wrap="square" lIns="0" tIns="0" rIns="0" bIns="0" rtlCol="0" anchor="ctr"/>
           <a:lstStyle/>
           <a:p>
-            <a:pPr indent="0" marL="0">
+            <a:pPr marL="0" indent="0">
               <a:buNone/>
             </a:pPr>
             <a:r>
@@ -5413,13 +5434,20 @@
           </a:solidFill>
           <a:ln/>
           <a:effectLst>
-            <a:outerShdw sx="100000" sy="100000" kx="0" ky="0" algn="bl" rotWithShape="0" blurRad="76200" dist="25400" dir="2700000">
+            <a:outerShdw blurRad="76200" dist="25400" dir="2700000" algn="bl" rotWithShape="0">
               <a:srgbClr val="000000">
                 <a:alpha val="8000"/>
               </a:srgbClr>
             </a:outerShdw>
           </a:effectLst>
         </p:spPr>
+        <p:txBody>
+          <a:bodyPr/>
+          <a:lstStyle/>
+          <a:p>
+            <a:endParaRPr lang="es-CL"/>
+          </a:p>
+        </p:txBody>
       </p:sp>
       <p:sp>
         <p:nvSpPr>
@@ -5440,17 +5468,24 @@
           </a:solidFill>
           <a:ln/>
         </p:spPr>
+        <p:txBody>
+          <a:bodyPr/>
+          <a:lstStyle/>
+          <a:p>
+            <a:endParaRPr lang="es-CL"/>
+          </a:p>
+        </p:txBody>
       </p:sp>
       <p:pic>
         <p:nvPicPr>
-          <p:cNvPr id="5" name="Image 0" descr="preencoded.png">    </p:cNvPr>
+          <p:cNvPr id="5" name="Image 0" descr="preencoded.png"/>
           <p:cNvPicPr>
             <a:picLocks noChangeAspect="1"/>
           </p:cNvPicPr>
           <p:nvPr/>
         </p:nvPicPr>
         <p:blipFill>
-          <a:blip r:embed="rId1"/>
+          <a:blip r:embed="rId3"/>
           <a:stretch>
             <a:fillRect/>
           </a:stretch>
@@ -5486,7 +5521,7 @@
           <a:bodyPr wrap="square" lIns="0" tIns="0" rIns="0" bIns="0" rtlCol="0" anchor="ctr"/>
           <a:lstStyle/>
           <a:p>
-            <a:pPr indent="0" marL="0">
+            <a:pPr marL="0" indent="0">
               <a:buNone/>
             </a:pPr>
             <a:r>
@@ -5610,13 +5645,20 @@
           </a:solidFill>
           <a:ln/>
           <a:effectLst>
-            <a:outerShdw sx="100000" sy="100000" kx="0" ky="0" algn="bl" rotWithShape="0" blurRad="76200" dist="25400" dir="2700000">
+            <a:outerShdw blurRad="76200" dist="25400" dir="2700000" algn="bl" rotWithShape="0">
               <a:srgbClr val="000000">
                 <a:alpha val="8000"/>
               </a:srgbClr>
             </a:outerShdw>
           </a:effectLst>
         </p:spPr>
+        <p:txBody>
+          <a:bodyPr/>
+          <a:lstStyle/>
+          <a:p>
+            <a:endParaRPr lang="es-CL"/>
+          </a:p>
+        </p:txBody>
       </p:sp>
       <p:sp>
         <p:nvSpPr>
@@ -5637,17 +5679,24 @@
           </a:solidFill>
           <a:ln/>
         </p:spPr>
+        <p:txBody>
+          <a:bodyPr/>
+          <a:lstStyle/>
+          <a:p>
+            <a:endParaRPr lang="es-CL"/>
+          </a:p>
+        </p:txBody>
       </p:sp>
       <p:pic>
         <p:nvPicPr>
-          <p:cNvPr id="10" name="Image 1" descr="preencoded.png">    </p:cNvPr>
+          <p:cNvPr id="10" name="Image 1" descr="preencoded.png"/>
           <p:cNvPicPr>
             <a:picLocks noChangeAspect="1"/>
           </p:cNvPicPr>
           <p:nvPr/>
         </p:nvPicPr>
         <p:blipFill>
-          <a:blip r:embed="rId2"/>
+          <a:blip r:embed="rId4"/>
           <a:stretch>
             <a:fillRect/>
           </a:stretch>
@@ -5683,7 +5732,7 @@
           <a:bodyPr wrap="square" lIns="0" tIns="0" rIns="0" bIns="0" rtlCol="0" anchor="ctr"/>
           <a:lstStyle/>
           <a:p>
-            <a:pPr indent="0" marL="0">
+            <a:pPr marL="0" indent="0">
               <a:buNone/>
             </a:pPr>
             <a:r>
@@ -5807,9 +5856,6 @@
           <a:bodyPr wrap="square" lIns="0" tIns="0" rIns="0" bIns="0" rtlCol="0" anchor="ctr"/>
           <a:lstStyle/>
           <a:p>
-            <a:pPr algn="l" indent="0" marL="0">
-              <a:buNone/>
-            </a:pPr>
             <a:r>
               <a:rPr lang="en-US" sz="1000" dirty="0">
                 <a:solidFill>
@@ -5819,7 +5865,18 @@
                 <a:ea typeface="Arial" pitchFamily="34" charset="-122"/>
                 <a:cs typeface="Arial" pitchFamily="34" charset="-120"/>
               </a:rPr>
-              <a:t>Infraestructura Viva  ·  Módulo 4  ·  Alkemy</a:t>
+              <a:t>Infraestructura Viva  ·  Módulo 4  · </a:t>
+            </a:r>
+            <a:r>
+              <a:rPr lang="en-US" sz="1000" dirty="0">
+                <a:solidFill>
+                  <a:srgbClr val="6E86AC"/>
+                </a:solidFill>
+                <a:latin typeface="Arial" pitchFamily="34" charset="0"/>
+                <a:ea typeface="Arial" pitchFamily="34" charset="-122"/>
+                <a:cs typeface="Arial" pitchFamily="34" charset="-120"/>
+              </a:rPr>
+              <a:t>GRUPO 01</a:t>
             </a:r>
             <a:endParaRPr lang="en-US" sz="1000" dirty="0"/>
           </a:p>
@@ -5846,7 +5903,7 @@
           <a:bodyPr wrap="square" lIns="0" tIns="0" rIns="0" bIns="0" rtlCol="0" anchor="ctr"/>
           <a:lstStyle/>
           <a:p>
-            <a:pPr algn="r" indent="0" marL="0">
+            <a:pPr marL="0" indent="0" algn="r">
               <a:buNone/>
             </a:pPr>
             <a:r>
@@ -5880,6 +5937,7 @@
         <a:solidFill>
           <a:srgbClr val="FFFFFF"/>
         </a:solidFill>
+        <a:effectLst/>
       </p:bgPr>
     </p:bg>
     <p:spTree>
@@ -5917,7 +5975,7 @@
           <a:bodyPr wrap="square" lIns="0" tIns="0" rIns="0" bIns="0" rtlCol="0" anchor="ctr"/>
           <a:lstStyle/>
           <a:p>
-            <a:pPr indent="0" marL="0">
+            <a:pPr marL="0" indent="0">
               <a:buNone/>
             </a:pPr>
             <a:r>
@@ -5956,13 +6014,20 @@
           </a:solidFill>
           <a:ln/>
           <a:effectLst>
-            <a:outerShdw sx="100000" sy="100000" kx="0" ky="0" algn="bl" rotWithShape="0" blurRad="76200" dist="25400" dir="2700000">
+            <a:outerShdw blurRad="76200" dist="25400" dir="2700000" algn="bl" rotWithShape="0">
               <a:srgbClr val="000000">
                 <a:alpha val="8000"/>
               </a:srgbClr>
             </a:outerShdw>
           </a:effectLst>
         </p:spPr>
+        <p:txBody>
+          <a:bodyPr/>
+          <a:lstStyle/>
+          <a:p>
+            <a:endParaRPr lang="es-CL"/>
+          </a:p>
+        </p:txBody>
       </p:sp>
       <p:sp>
         <p:nvSpPr>
@@ -5983,17 +6048,24 @@
           </a:solidFill>
           <a:ln/>
         </p:spPr>
+        <p:txBody>
+          <a:bodyPr/>
+          <a:lstStyle/>
+          <a:p>
+            <a:endParaRPr lang="es-CL"/>
+          </a:p>
+        </p:txBody>
       </p:sp>
       <p:pic>
         <p:nvPicPr>
-          <p:cNvPr id="5" name="Image 0" descr="preencoded.png">    </p:cNvPr>
+          <p:cNvPr id="5" name="Image 0" descr="preencoded.png"/>
           <p:cNvPicPr>
             <a:picLocks noChangeAspect="1"/>
           </p:cNvPicPr>
           <p:nvPr/>
         </p:nvPicPr>
         <p:blipFill>
-          <a:blip r:embed="rId1"/>
+          <a:blip r:embed="rId3"/>
           <a:stretch>
             <a:fillRect/>
           </a:stretch>
@@ -6029,7 +6101,7 @@
           <a:bodyPr wrap="square" lIns="0" tIns="0" rIns="0" bIns="0" rtlCol="0" anchor="ctr"/>
           <a:lstStyle/>
           <a:p>
-            <a:pPr indent="0" marL="0">
+            <a:pPr marL="0" indent="0">
               <a:buNone/>
             </a:pPr>
             <a:r>
@@ -6153,13 +6225,20 @@
           </a:solidFill>
           <a:ln/>
           <a:effectLst>
-            <a:outerShdw sx="100000" sy="100000" kx="0" ky="0" algn="bl" rotWithShape="0" blurRad="76200" dist="25400" dir="2700000">
+            <a:outerShdw blurRad="76200" dist="25400" dir="2700000" algn="bl" rotWithShape="0">
               <a:srgbClr val="000000">
                 <a:alpha val="8000"/>
               </a:srgbClr>
             </a:outerShdw>
           </a:effectLst>
         </p:spPr>
+        <p:txBody>
+          <a:bodyPr/>
+          <a:lstStyle/>
+          <a:p>
+            <a:endParaRPr lang="es-CL"/>
+          </a:p>
+        </p:txBody>
       </p:sp>
       <p:sp>
         <p:nvSpPr>
@@ -6180,17 +6259,24 @@
           </a:solidFill>
           <a:ln/>
         </p:spPr>
+        <p:txBody>
+          <a:bodyPr/>
+          <a:lstStyle/>
+          <a:p>
+            <a:endParaRPr lang="es-CL"/>
+          </a:p>
+        </p:txBody>
       </p:sp>
       <p:pic>
         <p:nvPicPr>
-          <p:cNvPr id="10" name="Image 1" descr="preencoded.png">    </p:cNvPr>
+          <p:cNvPr id="10" name="Image 1" descr="preencoded.png"/>
           <p:cNvPicPr>
             <a:picLocks noChangeAspect="1"/>
           </p:cNvPicPr>
           <p:nvPr/>
         </p:nvPicPr>
         <p:blipFill>
-          <a:blip r:embed="rId2"/>
+          <a:blip r:embed="rId4"/>
           <a:stretch>
             <a:fillRect/>
           </a:stretch>
@@ -6226,7 +6312,7 @@
           <a:bodyPr wrap="square" lIns="0" tIns="0" rIns="0" bIns="0" rtlCol="0" anchor="ctr"/>
           <a:lstStyle/>
           <a:p>
-            <a:pPr indent="0" marL="0">
+            <a:pPr marL="0" indent="0">
               <a:buNone/>
             </a:pPr>
             <a:r>
@@ -6350,9 +6436,6 @@
           <a:bodyPr wrap="square" lIns="0" tIns="0" rIns="0" bIns="0" rtlCol="0" anchor="ctr"/>
           <a:lstStyle/>
           <a:p>
-            <a:pPr algn="l" indent="0" marL="0">
-              <a:buNone/>
-            </a:pPr>
             <a:r>
               <a:rPr lang="en-US" sz="1000" dirty="0">
                 <a:solidFill>
@@ -6362,7 +6445,18 @@
                 <a:ea typeface="Arial" pitchFamily="34" charset="-122"/>
                 <a:cs typeface="Arial" pitchFamily="34" charset="-120"/>
               </a:rPr>
-              <a:t>Infraestructura Viva  ·  Módulo 4  ·  Alkemy</a:t>
+              <a:t>Infraestructura Viva  ·  Módulo 4  · </a:t>
+            </a:r>
+            <a:r>
+              <a:rPr lang="en-US" sz="1000" dirty="0">
+                <a:solidFill>
+                  <a:srgbClr val="6E86AC"/>
+                </a:solidFill>
+                <a:latin typeface="Arial" pitchFamily="34" charset="0"/>
+                <a:ea typeface="Arial" pitchFamily="34" charset="-122"/>
+                <a:cs typeface="Arial" pitchFamily="34" charset="-120"/>
+              </a:rPr>
+              <a:t>GRUPO 01</a:t>
             </a:r>
             <a:endParaRPr lang="en-US" sz="1000" dirty="0"/>
           </a:p>
@@ -6389,7 +6483,7 @@
           <a:bodyPr wrap="square" lIns="0" tIns="0" rIns="0" bIns="0" rtlCol="0" anchor="ctr"/>
           <a:lstStyle/>
           <a:p>
-            <a:pPr algn="r" indent="0" marL="0">
+            <a:pPr marL="0" indent="0" algn="r">
               <a:buNone/>
             </a:pPr>
             <a:r>
@@ -6423,6 +6517,7 @@
         <a:solidFill>
           <a:srgbClr val="FFFFFF"/>
         </a:solidFill>
+        <a:effectLst/>
       </p:bgPr>
     </p:bg>
     <p:spTree>
@@ -6460,7 +6555,7 @@
           <a:bodyPr wrap="square" lIns="0" tIns="0" rIns="0" bIns="0" rtlCol="0" anchor="ctr"/>
           <a:lstStyle/>
           <a:p>
-            <a:pPr indent="0" marL="0">
+            <a:pPr marL="0" indent="0">
               <a:buNone/>
             </a:pPr>
             <a:r>
@@ -6480,14 +6575,14 @@
       </p:sp>
       <p:pic>
         <p:nvPicPr>
-          <p:cNvPr id="3" name="Image 0" descr="/home/claude/proyecto/diagrama_monitoreo.png">    </p:cNvPr>
+          <p:cNvPr id="3" name="Image 0" descr="/home/claude/proyecto/diagrama_monitoreo.png"/>
           <p:cNvPicPr>
             <a:picLocks noChangeAspect="1"/>
           </p:cNvPicPr>
           <p:nvPr/>
         </p:nvPicPr>
         <p:blipFill>
-          <a:blip r:embed="rId1"/>
+          <a:blip r:embed="rId3"/>
           <a:stretch>
             <a:fillRect/>
           </a:stretch>
@@ -6523,6 +6618,13 @@
           </a:solidFill>
           <a:ln/>
         </p:spPr>
+        <p:txBody>
+          <a:bodyPr/>
+          <a:lstStyle/>
+          <a:p>
+            <a:endParaRPr lang="es-CL"/>
+          </a:p>
+        </p:txBody>
       </p:sp>
       <p:sp>
         <p:nvSpPr>
@@ -6545,7 +6647,7 @@
           <a:bodyPr wrap="square" lIns="0" tIns="0" rIns="0" bIns="0" rtlCol="0" anchor="ctr"/>
           <a:lstStyle/>
           <a:p>
-            <a:pPr algn="ctr" indent="0" marL="0">
+            <a:pPr marL="0" indent="0" algn="ctr">
               <a:buNone/>
             </a:pPr>
             <a:r>
@@ -6584,7 +6686,7 @@
           <a:bodyPr wrap="square" lIns="0" tIns="0" rIns="0" bIns="0" rtlCol="0" anchor="ctr"/>
           <a:lstStyle/>
           <a:p>
-            <a:pPr indent="0" marL="0">
+            <a:pPr marL="0" indent="0">
               <a:buNone/>
             </a:pPr>
             <a:r>
@@ -6623,7 +6725,7 @@
           <a:bodyPr wrap="square" lIns="0" tIns="0" rIns="0" bIns="0" rtlCol="0" anchor="ctr"/>
           <a:lstStyle/>
           <a:p>
-            <a:pPr indent="0" marL="0">
+            <a:pPr marL="0" indent="0">
               <a:buNone/>
             </a:pPr>
             <a:r>
@@ -6662,6 +6764,13 @@
           </a:solidFill>
           <a:ln/>
         </p:spPr>
+        <p:txBody>
+          <a:bodyPr/>
+          <a:lstStyle/>
+          <a:p>
+            <a:endParaRPr lang="es-CL"/>
+          </a:p>
+        </p:txBody>
       </p:sp>
       <p:sp>
         <p:nvSpPr>
@@ -6684,7 +6793,7 @@
           <a:bodyPr wrap="square" lIns="0" tIns="0" rIns="0" bIns="0" rtlCol="0" anchor="ctr"/>
           <a:lstStyle/>
           <a:p>
-            <a:pPr algn="ctr" indent="0" marL="0">
+            <a:pPr marL="0" indent="0" algn="ctr">
               <a:buNone/>
             </a:pPr>
             <a:r>
@@ -6723,7 +6832,7 @@
           <a:bodyPr wrap="square" lIns="0" tIns="0" rIns="0" bIns="0" rtlCol="0" anchor="ctr"/>
           <a:lstStyle/>
           <a:p>
-            <a:pPr indent="0" marL="0">
+            <a:pPr marL="0" indent="0">
               <a:buNone/>
             </a:pPr>
             <a:r>
@@ -6762,7 +6871,7 @@
           <a:bodyPr wrap="square" lIns="0" tIns="0" rIns="0" bIns="0" rtlCol="0" anchor="ctr"/>
           <a:lstStyle/>
           <a:p>
-            <a:pPr indent="0" marL="0">
+            <a:pPr marL="0" indent="0">
               <a:buNone/>
             </a:pPr>
             <a:r>
@@ -6801,6 +6910,13 @@
           </a:solidFill>
           <a:ln/>
         </p:spPr>
+        <p:txBody>
+          <a:bodyPr/>
+          <a:lstStyle/>
+          <a:p>
+            <a:endParaRPr lang="es-CL"/>
+          </a:p>
+        </p:txBody>
       </p:sp>
       <p:sp>
         <p:nvSpPr>
@@ -6823,7 +6939,7 @@
           <a:bodyPr wrap="square" lIns="0" tIns="0" rIns="0" bIns="0" rtlCol="0" anchor="ctr"/>
           <a:lstStyle/>
           <a:p>
-            <a:pPr algn="ctr" indent="0" marL="0">
+            <a:pPr marL="0" indent="0" algn="ctr">
               <a:buNone/>
             </a:pPr>
             <a:r>
@@ -6862,7 +6978,7 @@
           <a:bodyPr wrap="square" lIns="0" tIns="0" rIns="0" bIns="0" rtlCol="0" anchor="ctr"/>
           <a:lstStyle/>
           <a:p>
-            <a:pPr indent="0" marL="0">
+            <a:pPr marL="0" indent="0">
               <a:buNone/>
             </a:pPr>
             <a:r>
@@ -6901,7 +7017,7 @@
           <a:bodyPr wrap="square" lIns="0" tIns="0" rIns="0" bIns="0" rtlCol="0" anchor="ctr"/>
           <a:lstStyle/>
           <a:p>
-            <a:pPr indent="0" marL="0">
+            <a:pPr marL="0" indent="0">
               <a:buNone/>
             </a:pPr>
             <a:r>
@@ -6940,9 +7056,6 @@
           <a:bodyPr wrap="square" lIns="0" tIns="0" rIns="0" bIns="0" rtlCol="0" anchor="ctr"/>
           <a:lstStyle/>
           <a:p>
-            <a:pPr algn="l" indent="0" marL="0">
-              <a:buNone/>
-            </a:pPr>
             <a:r>
               <a:rPr lang="en-US" sz="1000" dirty="0">
                 <a:solidFill>
@@ -6952,7 +7065,18 @@
                 <a:ea typeface="Arial" pitchFamily="34" charset="-122"/>
                 <a:cs typeface="Arial" pitchFamily="34" charset="-120"/>
               </a:rPr>
-              <a:t>Infraestructura Viva  ·  Módulo 4  ·  Alkemy</a:t>
+              <a:t>Infraestructura Viva  ·  Módulo 4  · </a:t>
+            </a:r>
+            <a:r>
+              <a:rPr lang="en-US" sz="1000" dirty="0">
+                <a:solidFill>
+                  <a:srgbClr val="6E86AC"/>
+                </a:solidFill>
+                <a:latin typeface="Arial" pitchFamily="34" charset="0"/>
+                <a:ea typeface="Arial" pitchFamily="34" charset="-122"/>
+                <a:cs typeface="Arial" pitchFamily="34" charset="-120"/>
+              </a:rPr>
+              <a:t>GRUPO 01</a:t>
             </a:r>
             <a:endParaRPr lang="en-US" sz="1000" dirty="0"/>
           </a:p>
@@ -6979,7 +7103,7 @@
           <a:bodyPr wrap="square" lIns="0" tIns="0" rIns="0" bIns="0" rtlCol="0" anchor="ctr"/>
           <a:lstStyle/>
           <a:p>
-            <a:pPr algn="r" indent="0" marL="0">
+            <a:pPr marL="0" indent="0" algn="r">
               <a:buNone/>
             </a:pPr>
             <a:r>
@@ -7013,6 +7137,7 @@
         <a:solidFill>
           <a:srgbClr val="1F3864"/>
         </a:solidFill>
+        <a:effectLst/>
       </p:bgPr>
     </p:bg>
     <p:spTree>
@@ -7050,7 +7175,7 @@
           <a:bodyPr wrap="square" lIns="0" tIns="0" rIns="0" bIns="0" rtlCol="0" anchor="ctr"/>
           <a:lstStyle/>
           <a:p>
-            <a:pPr indent="0" marL="0">
+            <a:pPr marL="0" indent="0">
               <a:buNone/>
             </a:pPr>
             <a:r>
@@ -7089,7 +7214,7 @@
           <a:bodyPr wrap="square" lIns="0" tIns="0" rIns="0" bIns="0" rtlCol="0" anchor="ctr"/>
           <a:lstStyle/>
           <a:p>
-            <a:pPr indent="0" marL="0">
+            <a:pPr marL="0" indent="0">
               <a:buNone/>
             </a:pPr>
             <a:r>
@@ -7128,6 +7253,13 @@
           </a:solidFill>
           <a:ln/>
         </p:spPr>
+        <p:txBody>
+          <a:bodyPr/>
+          <a:lstStyle/>
+          <a:p>
+            <a:endParaRPr lang="es-CL"/>
+          </a:p>
+        </p:txBody>
       </p:sp>
       <p:sp>
         <p:nvSpPr>
@@ -7148,376 +7280,17 @@
           </a:solidFill>
           <a:ln/>
         </p:spPr>
+        <p:txBody>
+          <a:bodyPr/>
+          <a:lstStyle/>
+          <a:p>
+            <a:endParaRPr lang="es-CL"/>
+          </a:p>
+        </p:txBody>
       </p:sp>
       <p:pic>
         <p:nvPicPr>
-          <p:cNvPr id="6" name="Image 0" descr="preencoded.png">    </p:cNvPr>
-          <p:cNvPicPr>
-            <a:picLocks noChangeAspect="1"/>
-          </p:cNvPicPr>
-          <p:nvPr/>
-        </p:nvPicPr>
-        <p:blipFill>
-          <a:blip r:embed="rId1"/>
-          <a:stretch>
-            <a:fillRect/>
-          </a:stretch>
-        </p:blipFill>
-        <p:spPr>
-          <a:xfrm>
-            <a:off x="2122688" y="2465588"/>
-            <a:ext cx="280904" cy="280904"/>
-          </a:xfrm>
-          <a:prstGeom prst="rect">
-            <a:avLst/>
-          </a:prstGeom>
-        </p:spPr>
-      </p:pic>
-      <p:sp>
-        <p:nvSpPr>
-          <p:cNvPr id="7" name="Text 4"/>
-          <p:cNvSpPr/>
-          <p:nvPr/>
-        </p:nvSpPr>
-        <p:spPr>
-          <a:xfrm>
-            <a:off x="548640" y="2971800"/>
-            <a:ext cx="3429000" cy="685800"/>
-          </a:xfrm>
-          <a:prstGeom prst="rect">
-            <a:avLst/>
-          </a:prstGeom>
-          <a:noFill/>
-          <a:ln/>
-        </p:spPr>
-        <p:txBody>
-          <a:bodyPr wrap="square" lIns="0" tIns="0" rIns="0" bIns="0" rtlCol="0" anchor="ctr"/>
-          <a:lstStyle/>
-          <a:p>
-            <a:pPr algn="ctr" indent="0" marL="0">
-              <a:buNone/>
-            </a:pPr>
-            <a:r>
-              <a:rPr lang="en-US" sz="4000" b="1" dirty="0">
-                <a:solidFill>
-                  <a:srgbClr val="FF9900"/>
-                </a:solidFill>
-                <a:latin typeface="Arial" pitchFamily="34" charset="0"/>
-                <a:ea typeface="Arial" pitchFamily="34" charset="-122"/>
-                <a:cs typeface="Arial" pitchFamily="34" charset="-120"/>
-              </a:rPr>
-              <a:t>5</a:t>
-            </a:r>
-            <a:endParaRPr lang="en-US" sz="4000" dirty="0"/>
-          </a:p>
-        </p:txBody>
-      </p:sp>
-      <p:sp>
-        <p:nvSpPr>
-          <p:cNvPr id="8" name="Text 5"/>
-          <p:cNvSpPr/>
-          <p:nvPr/>
-        </p:nvSpPr>
-        <p:spPr>
-          <a:xfrm>
-            <a:off x="731520" y="3657600"/>
-            <a:ext cx="3063240" cy="365760"/>
-          </a:xfrm>
-          <a:prstGeom prst="rect">
-            <a:avLst/>
-          </a:prstGeom>
-          <a:noFill/>
-          <a:ln/>
-        </p:spPr>
-        <p:txBody>
-          <a:bodyPr wrap="square" lIns="0" tIns="0" rIns="0" bIns="0" rtlCol="0" anchor="ctr"/>
-          <a:lstStyle/>
-          <a:p>
-            <a:pPr algn="ctr" indent="0" marL="0">
-              <a:buNone/>
-            </a:pPr>
-            <a:r>
-              <a:rPr lang="en-US" sz="1300" b="1" dirty="0">
-                <a:solidFill>
-                  <a:srgbClr val="FFFFFF"/>
-                </a:solidFill>
-                <a:latin typeface="Arial" pitchFamily="34" charset="0"/>
-                <a:ea typeface="Arial" pitchFamily="34" charset="-122"/>
-                <a:cs typeface="Arial" pitchFamily="34" charset="-120"/>
-              </a:rPr>
-              <a:t>servicios AWS reales</a:t>
-            </a:r>
-            <a:endParaRPr lang="en-US" sz="1300" dirty="0"/>
-          </a:p>
-        </p:txBody>
-      </p:sp>
-      <p:sp>
-        <p:nvSpPr>
-          <p:cNvPr id="9" name="Text 6"/>
-          <p:cNvSpPr/>
-          <p:nvPr/>
-        </p:nvSpPr>
-        <p:spPr>
-          <a:xfrm>
-            <a:off x="777240" y="3995928"/>
-            <a:ext cx="2971800" cy="384048"/>
-          </a:xfrm>
-          <a:prstGeom prst="rect">
-            <a:avLst/>
-          </a:prstGeom>
-          <a:noFill/>
-          <a:ln/>
-        </p:spPr>
-        <p:txBody>
-          <a:bodyPr wrap="square" lIns="0" tIns="0" rIns="0" bIns="0" rtlCol="0" anchor="ctr"/>
-          <a:lstStyle/>
-          <a:p>
-            <a:pPr algn="ctr" indent="0" marL="0">
-              <a:buNone/>
-            </a:pPr>
-            <a:r>
-              <a:rPr lang="en-US" sz="950" dirty="0">
-                <a:solidFill>
-                  <a:srgbClr val="9FB3D1"/>
-                </a:solidFill>
-                <a:latin typeface="Arial" pitchFamily="34" charset="0"/>
-                <a:ea typeface="Arial" pitchFamily="34" charset="-122"/>
-                <a:cs typeface="Arial" pitchFamily="34" charset="-120"/>
-              </a:rPr>
-              <a:t>RDS · DynamoDB · S3 · SNS/SQS · CloudWatch</a:t>
-            </a:r>
-            <a:endParaRPr lang="en-US" sz="950" dirty="0"/>
-          </a:p>
-        </p:txBody>
-      </p:sp>
-      <p:sp>
-        <p:nvSpPr>
-          <p:cNvPr id="10" name="Shape 7"/>
-          <p:cNvSpPr/>
-          <p:nvPr/>
-        </p:nvSpPr>
-        <p:spPr>
-          <a:xfrm>
-            <a:off x="4233672" y="2057400"/>
-            <a:ext cx="3429000" cy="2377440"/>
-          </a:xfrm>
-          <a:prstGeom prst="roundRect">
-            <a:avLst>
-              <a:gd name="adj" fmla="val 3077"/>
-            </a:avLst>
-          </a:prstGeom>
-          <a:solidFill>
-            <a:srgbClr val="27407A"/>
-          </a:solidFill>
-          <a:ln/>
-        </p:spPr>
-      </p:sp>
-      <p:sp>
-        <p:nvSpPr>
-          <p:cNvPr id="11" name="Shape 8"/>
-          <p:cNvSpPr/>
-          <p:nvPr/>
-        </p:nvSpPr>
-        <p:spPr>
-          <a:xfrm>
-            <a:off x="5655564" y="2313432"/>
-            <a:ext cx="585216" cy="585216"/>
-          </a:xfrm>
-          <a:prstGeom prst="ellipse">
-            <a:avLst/>
-          </a:prstGeom>
-          <a:solidFill>
-            <a:srgbClr val="2E75B6"/>
-          </a:solidFill>
-          <a:ln/>
-        </p:spPr>
-      </p:sp>
-      <p:pic>
-        <p:nvPicPr>
-          <p:cNvPr id="12" name="Image 1" descr="preencoded.png">    </p:cNvPr>
-          <p:cNvPicPr>
-            <a:picLocks noChangeAspect="1"/>
-          </p:cNvPicPr>
-          <p:nvPr/>
-        </p:nvPicPr>
-        <p:blipFill>
-          <a:blip r:embed="rId2"/>
-          <a:stretch>
-            <a:fillRect/>
-          </a:stretch>
-        </p:blipFill>
-        <p:spPr>
-          <a:xfrm>
-            <a:off x="5807720" y="2465588"/>
-            <a:ext cx="280904" cy="280904"/>
-          </a:xfrm>
-          <a:prstGeom prst="rect">
-            <a:avLst/>
-          </a:prstGeom>
-        </p:spPr>
-      </p:pic>
-      <p:sp>
-        <p:nvSpPr>
-          <p:cNvPr id="13" name="Text 9"/>
-          <p:cNvSpPr/>
-          <p:nvPr/>
-        </p:nvSpPr>
-        <p:spPr>
-          <a:xfrm>
-            <a:off x="4233672" y="2971800"/>
-            <a:ext cx="3429000" cy="685800"/>
-          </a:xfrm>
-          <a:prstGeom prst="rect">
-            <a:avLst/>
-          </a:prstGeom>
-          <a:noFill/>
-          <a:ln/>
-        </p:spPr>
-        <p:txBody>
-          <a:bodyPr wrap="square" lIns="0" tIns="0" rIns="0" bIns="0" rtlCol="0" anchor="ctr"/>
-          <a:lstStyle/>
-          <a:p>
-            <a:pPr algn="ctr" indent="0" marL="0">
-              <a:buNone/>
-            </a:pPr>
-            <a:r>
-              <a:rPr lang="en-US" sz="4000" b="1" dirty="0">
-                <a:solidFill>
-                  <a:srgbClr val="FF9900"/>
-                </a:solidFill>
-                <a:latin typeface="Arial" pitchFamily="34" charset="0"/>
-                <a:ea typeface="Arial" pitchFamily="34" charset="-122"/>
-                <a:cs typeface="Arial" pitchFamily="34" charset="-120"/>
-              </a:rPr>
-              <a:t>13</a:t>
-            </a:r>
-            <a:endParaRPr lang="en-US" sz="4000" dirty="0"/>
-          </a:p>
-        </p:txBody>
-      </p:sp>
-      <p:sp>
-        <p:nvSpPr>
-          <p:cNvPr id="14" name="Text 10"/>
-          <p:cNvSpPr/>
-          <p:nvPr/>
-        </p:nvSpPr>
-        <p:spPr>
-          <a:xfrm>
-            <a:off x="4416552" y="3657600"/>
-            <a:ext cx="3063240" cy="365760"/>
-          </a:xfrm>
-          <a:prstGeom prst="rect">
-            <a:avLst/>
-          </a:prstGeom>
-          <a:noFill/>
-          <a:ln/>
-        </p:spPr>
-        <p:txBody>
-          <a:bodyPr wrap="square" lIns="0" tIns="0" rIns="0" bIns="0" rtlCol="0" anchor="ctr"/>
-          <a:lstStyle/>
-          <a:p>
-            <a:pPr algn="ctr" indent="0" marL="0">
-              <a:buNone/>
-            </a:pPr>
-            <a:r>
-              <a:rPr lang="en-US" sz="1300" b="1" dirty="0">
-                <a:solidFill>
-                  <a:srgbClr val="FFFFFF"/>
-                </a:solidFill>
-                <a:latin typeface="Arial" pitchFamily="34" charset="0"/>
-                <a:ea typeface="Arial" pitchFamily="34" charset="-122"/>
-                <a:cs typeface="Arial" pitchFamily="34" charset="-120"/>
-              </a:rPr>
-              <a:t>endpoints documentados</a:t>
-            </a:r>
-            <a:endParaRPr lang="en-US" sz="1300" dirty="0"/>
-          </a:p>
-        </p:txBody>
-      </p:sp>
-      <p:sp>
-        <p:nvSpPr>
-          <p:cNvPr id="15" name="Text 11"/>
-          <p:cNvSpPr/>
-          <p:nvPr/>
-        </p:nvSpPr>
-        <p:spPr>
-          <a:xfrm>
-            <a:off x="4462272" y="3995928"/>
-            <a:ext cx="2971800" cy="384048"/>
-          </a:xfrm>
-          <a:prstGeom prst="rect">
-            <a:avLst/>
-          </a:prstGeom>
-          <a:noFill/>
-          <a:ln/>
-        </p:spPr>
-        <p:txBody>
-          <a:bodyPr wrap="square" lIns="0" tIns="0" rIns="0" bIns="0" rtlCol="0" anchor="ctr"/>
-          <a:lstStyle/>
-          <a:p>
-            <a:pPr algn="ctr" indent="0" marL="0">
-              <a:buNone/>
-            </a:pPr>
-            <a:r>
-              <a:rPr lang="en-US" sz="950" dirty="0">
-                <a:solidFill>
-                  <a:srgbClr val="9FB3D1"/>
-                </a:solidFill>
-                <a:latin typeface="Arial" pitchFamily="34" charset="0"/>
-                <a:ea typeface="Arial" pitchFamily="34" charset="-122"/>
-                <a:cs typeface="Arial" pitchFamily="34" charset="-120"/>
-              </a:rPr>
-              <a:t>Swagger UI interactivo (/docs)</a:t>
-            </a:r>
-            <a:endParaRPr lang="en-US" sz="950" dirty="0"/>
-          </a:p>
-        </p:txBody>
-      </p:sp>
-      <p:sp>
-        <p:nvSpPr>
-          <p:cNvPr id="16" name="Shape 12"/>
-          <p:cNvSpPr/>
-          <p:nvPr/>
-        </p:nvSpPr>
-        <p:spPr>
-          <a:xfrm>
-            <a:off x="7918704" y="2057400"/>
-            <a:ext cx="3429000" cy="2377440"/>
-          </a:xfrm>
-          <a:prstGeom prst="roundRect">
-            <a:avLst>
-              <a:gd name="adj" fmla="val 3077"/>
-            </a:avLst>
-          </a:prstGeom>
-          <a:solidFill>
-            <a:srgbClr val="27407A"/>
-          </a:solidFill>
-          <a:ln/>
-        </p:spPr>
-      </p:sp>
-      <p:sp>
-        <p:nvSpPr>
-          <p:cNvPr id="17" name="Shape 13"/>
-          <p:cNvSpPr/>
-          <p:nvPr/>
-        </p:nvSpPr>
-        <p:spPr>
-          <a:xfrm>
-            <a:off x="9340596" y="2313432"/>
-            <a:ext cx="585216" cy="585216"/>
-          </a:xfrm>
-          <a:prstGeom prst="ellipse">
-            <a:avLst/>
-          </a:prstGeom>
-          <a:solidFill>
-            <a:srgbClr val="2E75B6"/>
-          </a:solidFill>
-          <a:ln/>
-        </p:spPr>
-      </p:sp>
-      <p:pic>
-        <p:nvPicPr>
-          <p:cNvPr id="18" name="Image 2" descr="preencoded.png">    </p:cNvPr>
+          <p:cNvPr id="6" name="Image 0" descr="preencoded.png"/>
           <p:cNvPicPr>
             <a:picLocks noChangeAspect="1"/>
           </p:cNvPicPr>
@@ -7531,6 +7304,400 @@
         </p:blipFill>
         <p:spPr>
           <a:xfrm>
+            <a:off x="2122688" y="2465588"/>
+            <a:ext cx="280904" cy="280904"/>
+          </a:xfrm>
+          <a:prstGeom prst="rect">
+            <a:avLst/>
+          </a:prstGeom>
+        </p:spPr>
+      </p:pic>
+      <p:sp>
+        <p:nvSpPr>
+          <p:cNvPr id="7" name="Text 4"/>
+          <p:cNvSpPr/>
+          <p:nvPr/>
+        </p:nvSpPr>
+        <p:spPr>
+          <a:xfrm>
+            <a:off x="548640" y="2971800"/>
+            <a:ext cx="3429000" cy="685800"/>
+          </a:xfrm>
+          <a:prstGeom prst="rect">
+            <a:avLst/>
+          </a:prstGeom>
+          <a:noFill/>
+          <a:ln/>
+        </p:spPr>
+        <p:txBody>
+          <a:bodyPr wrap="square" lIns="0" tIns="0" rIns="0" bIns="0" rtlCol="0" anchor="ctr"/>
+          <a:lstStyle/>
+          <a:p>
+            <a:pPr marL="0" indent="0" algn="ctr">
+              <a:buNone/>
+            </a:pPr>
+            <a:r>
+              <a:rPr lang="en-US" sz="4000" b="1" dirty="0">
+                <a:solidFill>
+                  <a:srgbClr val="FF9900"/>
+                </a:solidFill>
+                <a:latin typeface="Arial" pitchFamily="34" charset="0"/>
+                <a:ea typeface="Arial" pitchFamily="34" charset="-122"/>
+                <a:cs typeface="Arial" pitchFamily="34" charset="-120"/>
+              </a:rPr>
+              <a:t>5</a:t>
+            </a:r>
+            <a:endParaRPr lang="en-US" sz="4000" dirty="0"/>
+          </a:p>
+        </p:txBody>
+      </p:sp>
+      <p:sp>
+        <p:nvSpPr>
+          <p:cNvPr id="8" name="Text 5"/>
+          <p:cNvSpPr/>
+          <p:nvPr/>
+        </p:nvSpPr>
+        <p:spPr>
+          <a:xfrm>
+            <a:off x="731520" y="3657600"/>
+            <a:ext cx="3063240" cy="365760"/>
+          </a:xfrm>
+          <a:prstGeom prst="rect">
+            <a:avLst/>
+          </a:prstGeom>
+          <a:noFill/>
+          <a:ln/>
+        </p:spPr>
+        <p:txBody>
+          <a:bodyPr wrap="square" lIns="0" tIns="0" rIns="0" bIns="0" rtlCol="0" anchor="ctr"/>
+          <a:lstStyle/>
+          <a:p>
+            <a:pPr marL="0" indent="0" algn="ctr">
+              <a:buNone/>
+            </a:pPr>
+            <a:r>
+              <a:rPr lang="en-US" sz="1300" b="1" dirty="0">
+                <a:solidFill>
+                  <a:srgbClr val="FFFFFF"/>
+                </a:solidFill>
+                <a:latin typeface="Arial" pitchFamily="34" charset="0"/>
+                <a:ea typeface="Arial" pitchFamily="34" charset="-122"/>
+                <a:cs typeface="Arial" pitchFamily="34" charset="-120"/>
+              </a:rPr>
+              <a:t>servicios AWS reales</a:t>
+            </a:r>
+            <a:endParaRPr lang="en-US" sz="1300" dirty="0"/>
+          </a:p>
+        </p:txBody>
+      </p:sp>
+      <p:sp>
+        <p:nvSpPr>
+          <p:cNvPr id="9" name="Text 6"/>
+          <p:cNvSpPr/>
+          <p:nvPr/>
+        </p:nvSpPr>
+        <p:spPr>
+          <a:xfrm>
+            <a:off x="777240" y="3995928"/>
+            <a:ext cx="2971800" cy="384048"/>
+          </a:xfrm>
+          <a:prstGeom prst="rect">
+            <a:avLst/>
+          </a:prstGeom>
+          <a:noFill/>
+          <a:ln/>
+        </p:spPr>
+        <p:txBody>
+          <a:bodyPr wrap="square" lIns="0" tIns="0" rIns="0" bIns="0" rtlCol="0" anchor="ctr"/>
+          <a:lstStyle/>
+          <a:p>
+            <a:pPr marL="0" indent="0" algn="ctr">
+              <a:buNone/>
+            </a:pPr>
+            <a:r>
+              <a:rPr lang="en-US" sz="950" dirty="0">
+                <a:solidFill>
+                  <a:srgbClr val="9FB3D1"/>
+                </a:solidFill>
+                <a:latin typeface="Arial" pitchFamily="34" charset="0"/>
+                <a:ea typeface="Arial" pitchFamily="34" charset="-122"/>
+                <a:cs typeface="Arial" pitchFamily="34" charset="-120"/>
+              </a:rPr>
+              <a:t>RDS · DynamoDB · S3 · SNS/SQS · CloudWatch</a:t>
+            </a:r>
+            <a:endParaRPr lang="en-US" sz="950" dirty="0"/>
+          </a:p>
+        </p:txBody>
+      </p:sp>
+      <p:sp>
+        <p:nvSpPr>
+          <p:cNvPr id="10" name="Shape 7"/>
+          <p:cNvSpPr/>
+          <p:nvPr/>
+        </p:nvSpPr>
+        <p:spPr>
+          <a:xfrm>
+            <a:off x="4233672" y="2057400"/>
+            <a:ext cx="3429000" cy="2377440"/>
+          </a:xfrm>
+          <a:prstGeom prst="roundRect">
+            <a:avLst>
+              <a:gd name="adj" fmla="val 3077"/>
+            </a:avLst>
+          </a:prstGeom>
+          <a:solidFill>
+            <a:srgbClr val="27407A"/>
+          </a:solidFill>
+          <a:ln/>
+        </p:spPr>
+        <p:txBody>
+          <a:bodyPr/>
+          <a:lstStyle/>
+          <a:p>
+            <a:endParaRPr lang="es-CL"/>
+          </a:p>
+        </p:txBody>
+      </p:sp>
+      <p:sp>
+        <p:nvSpPr>
+          <p:cNvPr id="11" name="Shape 8"/>
+          <p:cNvSpPr/>
+          <p:nvPr/>
+        </p:nvSpPr>
+        <p:spPr>
+          <a:xfrm>
+            <a:off x="5655564" y="2313432"/>
+            <a:ext cx="585216" cy="585216"/>
+          </a:xfrm>
+          <a:prstGeom prst="ellipse">
+            <a:avLst/>
+          </a:prstGeom>
+          <a:solidFill>
+            <a:srgbClr val="2E75B6"/>
+          </a:solidFill>
+          <a:ln/>
+        </p:spPr>
+        <p:txBody>
+          <a:bodyPr/>
+          <a:lstStyle/>
+          <a:p>
+            <a:endParaRPr lang="es-CL"/>
+          </a:p>
+        </p:txBody>
+      </p:sp>
+      <p:pic>
+        <p:nvPicPr>
+          <p:cNvPr id="12" name="Image 1" descr="preencoded.png"/>
+          <p:cNvPicPr>
+            <a:picLocks noChangeAspect="1"/>
+          </p:cNvPicPr>
+          <p:nvPr/>
+        </p:nvPicPr>
+        <p:blipFill>
+          <a:blip r:embed="rId4"/>
+          <a:stretch>
+            <a:fillRect/>
+          </a:stretch>
+        </p:blipFill>
+        <p:spPr>
+          <a:xfrm>
+            <a:off x="5807720" y="2465588"/>
+            <a:ext cx="280904" cy="280904"/>
+          </a:xfrm>
+          <a:prstGeom prst="rect">
+            <a:avLst/>
+          </a:prstGeom>
+        </p:spPr>
+      </p:pic>
+      <p:sp>
+        <p:nvSpPr>
+          <p:cNvPr id="13" name="Text 9"/>
+          <p:cNvSpPr/>
+          <p:nvPr/>
+        </p:nvSpPr>
+        <p:spPr>
+          <a:xfrm>
+            <a:off x="4233672" y="2971800"/>
+            <a:ext cx="3429000" cy="685800"/>
+          </a:xfrm>
+          <a:prstGeom prst="rect">
+            <a:avLst/>
+          </a:prstGeom>
+          <a:noFill/>
+          <a:ln/>
+        </p:spPr>
+        <p:txBody>
+          <a:bodyPr wrap="square" lIns="0" tIns="0" rIns="0" bIns="0" rtlCol="0" anchor="ctr"/>
+          <a:lstStyle/>
+          <a:p>
+            <a:pPr marL="0" indent="0" algn="ctr">
+              <a:buNone/>
+            </a:pPr>
+            <a:r>
+              <a:rPr lang="en-US" sz="4000" b="1" dirty="0">
+                <a:solidFill>
+                  <a:srgbClr val="FF9900"/>
+                </a:solidFill>
+                <a:latin typeface="Arial" pitchFamily="34" charset="0"/>
+                <a:ea typeface="Arial" pitchFamily="34" charset="-122"/>
+                <a:cs typeface="Arial" pitchFamily="34" charset="-120"/>
+              </a:rPr>
+              <a:t>13</a:t>
+            </a:r>
+            <a:endParaRPr lang="en-US" sz="4000" dirty="0"/>
+          </a:p>
+        </p:txBody>
+      </p:sp>
+      <p:sp>
+        <p:nvSpPr>
+          <p:cNvPr id="14" name="Text 10"/>
+          <p:cNvSpPr/>
+          <p:nvPr/>
+        </p:nvSpPr>
+        <p:spPr>
+          <a:xfrm>
+            <a:off x="4416552" y="3657600"/>
+            <a:ext cx="3063240" cy="365760"/>
+          </a:xfrm>
+          <a:prstGeom prst="rect">
+            <a:avLst/>
+          </a:prstGeom>
+          <a:noFill/>
+          <a:ln/>
+        </p:spPr>
+        <p:txBody>
+          <a:bodyPr wrap="square" lIns="0" tIns="0" rIns="0" bIns="0" rtlCol="0" anchor="ctr"/>
+          <a:lstStyle/>
+          <a:p>
+            <a:pPr marL="0" indent="0" algn="ctr">
+              <a:buNone/>
+            </a:pPr>
+            <a:r>
+              <a:rPr lang="en-US" sz="1300" b="1" dirty="0">
+                <a:solidFill>
+                  <a:srgbClr val="FFFFFF"/>
+                </a:solidFill>
+                <a:latin typeface="Arial" pitchFamily="34" charset="0"/>
+                <a:ea typeface="Arial" pitchFamily="34" charset="-122"/>
+                <a:cs typeface="Arial" pitchFamily="34" charset="-120"/>
+              </a:rPr>
+              <a:t>endpoints documentados</a:t>
+            </a:r>
+            <a:endParaRPr lang="en-US" sz="1300" dirty="0"/>
+          </a:p>
+        </p:txBody>
+      </p:sp>
+      <p:sp>
+        <p:nvSpPr>
+          <p:cNvPr id="15" name="Text 11"/>
+          <p:cNvSpPr/>
+          <p:nvPr/>
+        </p:nvSpPr>
+        <p:spPr>
+          <a:xfrm>
+            <a:off x="4462272" y="3995928"/>
+            <a:ext cx="2971800" cy="384048"/>
+          </a:xfrm>
+          <a:prstGeom prst="rect">
+            <a:avLst/>
+          </a:prstGeom>
+          <a:noFill/>
+          <a:ln/>
+        </p:spPr>
+        <p:txBody>
+          <a:bodyPr wrap="square" lIns="0" tIns="0" rIns="0" bIns="0" rtlCol="0" anchor="ctr"/>
+          <a:lstStyle/>
+          <a:p>
+            <a:pPr marL="0" indent="0" algn="ctr">
+              <a:buNone/>
+            </a:pPr>
+            <a:r>
+              <a:rPr lang="en-US" sz="950" dirty="0">
+                <a:solidFill>
+                  <a:srgbClr val="9FB3D1"/>
+                </a:solidFill>
+                <a:latin typeface="Arial" pitchFamily="34" charset="0"/>
+                <a:ea typeface="Arial" pitchFamily="34" charset="-122"/>
+                <a:cs typeface="Arial" pitchFamily="34" charset="-120"/>
+              </a:rPr>
+              <a:t>Swagger UI interactivo (/docs)</a:t>
+            </a:r>
+            <a:endParaRPr lang="en-US" sz="950" dirty="0"/>
+          </a:p>
+        </p:txBody>
+      </p:sp>
+      <p:sp>
+        <p:nvSpPr>
+          <p:cNvPr id="16" name="Shape 12"/>
+          <p:cNvSpPr/>
+          <p:nvPr/>
+        </p:nvSpPr>
+        <p:spPr>
+          <a:xfrm>
+            <a:off x="7918704" y="2057400"/>
+            <a:ext cx="3429000" cy="2377440"/>
+          </a:xfrm>
+          <a:prstGeom prst="roundRect">
+            <a:avLst>
+              <a:gd name="adj" fmla="val 3077"/>
+            </a:avLst>
+          </a:prstGeom>
+          <a:solidFill>
+            <a:srgbClr val="27407A"/>
+          </a:solidFill>
+          <a:ln/>
+        </p:spPr>
+        <p:txBody>
+          <a:bodyPr/>
+          <a:lstStyle/>
+          <a:p>
+            <a:endParaRPr lang="es-CL"/>
+          </a:p>
+        </p:txBody>
+      </p:sp>
+      <p:sp>
+        <p:nvSpPr>
+          <p:cNvPr id="17" name="Shape 13"/>
+          <p:cNvSpPr/>
+          <p:nvPr/>
+        </p:nvSpPr>
+        <p:spPr>
+          <a:xfrm>
+            <a:off x="9340596" y="2313432"/>
+            <a:ext cx="585216" cy="585216"/>
+          </a:xfrm>
+          <a:prstGeom prst="ellipse">
+            <a:avLst/>
+          </a:prstGeom>
+          <a:solidFill>
+            <a:srgbClr val="2E75B6"/>
+          </a:solidFill>
+          <a:ln/>
+        </p:spPr>
+        <p:txBody>
+          <a:bodyPr/>
+          <a:lstStyle/>
+          <a:p>
+            <a:endParaRPr lang="es-CL"/>
+          </a:p>
+        </p:txBody>
+      </p:sp>
+      <p:pic>
+        <p:nvPicPr>
+          <p:cNvPr id="18" name="Image 2" descr="preencoded.png"/>
+          <p:cNvPicPr>
+            <a:picLocks noChangeAspect="1"/>
+          </p:cNvPicPr>
+          <p:nvPr/>
+        </p:nvPicPr>
+        <p:blipFill>
+          <a:blip r:embed="rId5"/>
+          <a:stretch>
+            <a:fillRect/>
+          </a:stretch>
+        </p:blipFill>
+        <p:spPr>
+          <a:xfrm>
             <a:off x="9492752" y="2465588"/>
             <a:ext cx="280904" cy="280904"/>
           </a:xfrm>
@@ -7560,7 +7727,7 @@
           <a:bodyPr wrap="square" lIns="0" tIns="0" rIns="0" bIns="0" rtlCol="0" anchor="ctr"/>
           <a:lstStyle/>
           <a:p>
-            <a:pPr algn="ctr" indent="0" marL="0">
+            <a:pPr marL="0" indent="0" algn="ctr">
               <a:buNone/>
             </a:pPr>
             <a:r>
@@ -7599,7 +7766,7 @@
           <a:bodyPr wrap="square" lIns="0" tIns="0" rIns="0" bIns="0" rtlCol="0" anchor="ctr"/>
           <a:lstStyle/>
           <a:p>
-            <a:pPr algn="ctr" indent="0" marL="0">
+            <a:pPr marL="0" indent="0" algn="ctr">
               <a:buNone/>
             </a:pPr>
             <a:r>
@@ -7638,7 +7805,7 @@
           <a:bodyPr wrap="square" lIns="0" tIns="0" rIns="0" bIns="0" rtlCol="0" anchor="ctr"/>
           <a:lstStyle/>
           <a:p>
-            <a:pPr algn="ctr" indent="0" marL="0">
+            <a:pPr marL="0" indent="0" algn="ctr">
               <a:buNone/>
             </a:pPr>
             <a:r>
@@ -7677,7 +7844,7 @@
           <a:bodyPr wrap="square" lIns="0" tIns="0" rIns="0" bIns="0" rtlCol="0" anchor="ctr"/>
           <a:lstStyle/>
           <a:p>
-            <a:pPr indent="0" marL="0">
+            <a:pPr marL="0" indent="0">
               <a:buNone/>
             </a:pPr>
             <a:r>
@@ -7716,9 +7883,6 @@
           <a:bodyPr wrap="square" lIns="0" tIns="0" rIns="0" bIns="0" rtlCol="0" anchor="ctr"/>
           <a:lstStyle/>
           <a:p>
-            <a:pPr algn="l" indent="0" marL="0">
-              <a:buNone/>
-            </a:pPr>
             <a:r>
               <a:rPr lang="en-US" sz="1000" dirty="0">
                 <a:solidFill>
@@ -7728,7 +7892,18 @@
                 <a:ea typeface="Arial" pitchFamily="34" charset="-122"/>
                 <a:cs typeface="Arial" pitchFamily="34" charset="-120"/>
               </a:rPr>
-              <a:t>Infraestructura Viva  ·  Módulo 4  ·  Alkemy</a:t>
+              <a:t>Infraestructura Viva  ·  Módulo 4  · </a:t>
+            </a:r>
+            <a:r>
+              <a:rPr lang="en-US" sz="1000" dirty="0">
+                <a:solidFill>
+                  <a:srgbClr val="6E86AC"/>
+                </a:solidFill>
+                <a:latin typeface="Arial" pitchFamily="34" charset="0"/>
+                <a:ea typeface="Arial" pitchFamily="34" charset="-122"/>
+                <a:cs typeface="Arial" pitchFamily="34" charset="-120"/>
+              </a:rPr>
+              <a:t>GRUPO 01</a:t>
             </a:r>
             <a:endParaRPr lang="en-US" sz="1000" dirty="0"/>
           </a:p>
@@ -7755,7 +7930,7 @@
           <a:bodyPr wrap="square" lIns="0" tIns="0" rIns="0" bIns="0" rtlCol="0" anchor="ctr"/>
           <a:lstStyle/>
           <a:p>
-            <a:pPr algn="r" indent="0" marL="0">
+            <a:pPr marL="0" indent="0" algn="r">
               <a:buNone/>
             </a:pPr>
             <a:r>
@@ -7789,6 +7964,7 @@
         <a:solidFill>
           <a:srgbClr val="FFFFFF"/>
         </a:solidFill>
+        <a:effectLst/>
       </p:bgPr>
     </p:bg>
     <p:spTree>
@@ -7826,7 +8002,7 @@
           <a:bodyPr wrap="square" lIns="0" tIns="0" rIns="0" bIns="0" rtlCol="0" anchor="ctr"/>
           <a:lstStyle/>
           <a:p>
-            <a:pPr indent="0" marL="0">
+            <a:pPr marL="0" indent="0">
               <a:buNone/>
             </a:pPr>
             <a:r>
@@ -7863,254 +8039,17 @@
           </a:solidFill>
           <a:ln/>
         </p:spPr>
+        <p:txBody>
+          <a:bodyPr/>
+          <a:lstStyle/>
+          <a:p>
+            <a:endParaRPr lang="es-CL"/>
+          </a:p>
+        </p:txBody>
       </p:sp>
       <p:pic>
         <p:nvPicPr>
-          <p:cNvPr id="4" name="Image 0" descr="preencoded.png">    </p:cNvPr>
-          <p:cNvPicPr>
-            <a:picLocks noChangeAspect="1"/>
-          </p:cNvPicPr>
-          <p:nvPr/>
-        </p:nvPicPr>
-        <p:blipFill>
-          <a:blip r:embed="rId1"/>
-          <a:stretch>
-            <a:fillRect/>
-          </a:stretch>
-        </p:blipFill>
-        <p:spPr>
-          <a:xfrm>
-            <a:off x="679399" y="1456639"/>
-            <a:ext cx="241402" cy="241402"/>
-          </a:xfrm>
-          <a:prstGeom prst="rect">
-            <a:avLst/>
-          </a:prstGeom>
-        </p:spPr>
-      </p:pic>
-      <p:sp>
-        <p:nvSpPr>
-          <p:cNvPr id="5" name="Text 2"/>
-          <p:cNvSpPr/>
-          <p:nvPr/>
-        </p:nvSpPr>
-        <p:spPr>
-          <a:xfrm>
-            <a:off x="1234440" y="1234440"/>
-            <a:ext cx="4480560" cy="365760"/>
-          </a:xfrm>
-          <a:prstGeom prst="rect">
-            <a:avLst/>
-          </a:prstGeom>
-          <a:noFill/>
-          <a:ln/>
-        </p:spPr>
-        <p:txBody>
-          <a:bodyPr wrap="square" lIns="0" tIns="0" rIns="0" bIns="0" rtlCol="0" anchor="ctr"/>
-          <a:lstStyle/>
-          <a:p>
-            <a:pPr indent="0" marL="0">
-              <a:buNone/>
-            </a:pPr>
-            <a:r>
-              <a:rPr lang="en-US" sz="1400" b="1" dirty="0">
-                <a:solidFill>
-                  <a:srgbClr val="1F3864"/>
-                </a:solidFill>
-                <a:latin typeface="Arial" pitchFamily="34" charset="0"/>
-                <a:ea typeface="Arial" pitchFamily="34" charset="-122"/>
-                <a:cs typeface="Arial" pitchFamily="34" charset="-120"/>
-              </a:rPr>
-              <a:t>Menor privilegio</a:t>
-            </a:r>
-            <a:endParaRPr lang="en-US" sz="1400" dirty="0"/>
-          </a:p>
-        </p:txBody>
-      </p:sp>
-      <p:sp>
-        <p:nvSpPr>
-          <p:cNvPr id="6" name="Text 3"/>
-          <p:cNvSpPr/>
-          <p:nvPr/>
-        </p:nvSpPr>
-        <p:spPr>
-          <a:xfrm>
-            <a:off x="1234440" y="1618488"/>
-            <a:ext cx="4480560" cy="914400"/>
-          </a:xfrm>
-          <a:prstGeom prst="rect">
-            <a:avLst/>
-          </a:prstGeom>
-          <a:noFill/>
-          <a:ln/>
-        </p:spPr>
-        <p:txBody>
-          <a:bodyPr wrap="square" lIns="0" tIns="0" rIns="0" bIns="0" rtlCol="0" anchor="ctr"/>
-          <a:lstStyle/>
-          <a:p>
-            <a:pPr indent="0" marL="0">
-              <a:buNone/>
-            </a:pPr>
-            <a:r>
-              <a:rPr lang="en-US" sz="1100" dirty="0">
-                <a:solidFill>
-                  <a:srgbClr val="1F2937"/>
-                </a:solidFill>
-                <a:latin typeface="Arial" pitchFamily="34" charset="0"/>
-                <a:ea typeface="Arial" pitchFamily="34" charset="-122"/>
-                <a:cs typeface="Arial" pitchFamily="34" charset="-120"/>
-              </a:rPr>
-              <a:t>Roles IAM específicos por servicio, sin credenciales compartidas.</a:t>
-            </a:r>
-            <a:endParaRPr lang="en-US" sz="1100" dirty="0"/>
-          </a:p>
-        </p:txBody>
-      </p:sp>
-      <p:sp>
-        <p:nvSpPr>
-          <p:cNvPr id="7" name="Shape 4"/>
-          <p:cNvSpPr/>
-          <p:nvPr/>
-        </p:nvSpPr>
-        <p:spPr>
-          <a:xfrm>
-            <a:off x="6080760" y="1325880"/>
-            <a:ext cx="502920" cy="502920"/>
-          </a:xfrm>
-          <a:prstGeom prst="ellipse">
-            <a:avLst/>
-          </a:prstGeom>
-          <a:solidFill>
-            <a:srgbClr val="EAF1F8"/>
-          </a:solidFill>
-          <a:ln/>
-        </p:spPr>
-      </p:sp>
-      <p:pic>
-        <p:nvPicPr>
-          <p:cNvPr id="8" name="Image 1" descr="preencoded.png">    </p:cNvPr>
-          <p:cNvPicPr>
-            <a:picLocks noChangeAspect="1"/>
-          </p:cNvPicPr>
-          <p:nvPr/>
-        </p:nvPicPr>
-        <p:blipFill>
-          <a:blip r:embed="rId2"/>
-          <a:stretch>
-            <a:fillRect/>
-          </a:stretch>
-        </p:blipFill>
-        <p:spPr>
-          <a:xfrm>
-            <a:off x="6211519" y="1456639"/>
-            <a:ext cx="241402" cy="241402"/>
-          </a:xfrm>
-          <a:prstGeom prst="rect">
-            <a:avLst/>
-          </a:prstGeom>
-        </p:spPr>
-      </p:pic>
-      <p:sp>
-        <p:nvSpPr>
-          <p:cNvPr id="9" name="Text 5"/>
-          <p:cNvSpPr/>
-          <p:nvPr/>
-        </p:nvSpPr>
-        <p:spPr>
-          <a:xfrm>
-            <a:off x="6766560" y="1234440"/>
-            <a:ext cx="4480560" cy="365760"/>
-          </a:xfrm>
-          <a:prstGeom prst="rect">
-            <a:avLst/>
-          </a:prstGeom>
-          <a:noFill/>
-          <a:ln/>
-        </p:spPr>
-        <p:txBody>
-          <a:bodyPr wrap="square" lIns="0" tIns="0" rIns="0" bIns="0" rtlCol="0" anchor="ctr"/>
-          <a:lstStyle/>
-          <a:p>
-            <a:pPr indent="0" marL="0">
-              <a:buNone/>
-            </a:pPr>
-            <a:r>
-              <a:rPr lang="en-US" sz="1400" b="1" dirty="0">
-                <a:solidFill>
-                  <a:srgbClr val="1F3864"/>
-                </a:solidFill>
-                <a:latin typeface="Arial" pitchFamily="34" charset="0"/>
-                <a:ea typeface="Arial" pitchFamily="34" charset="-122"/>
-                <a:cs typeface="Arial" pitchFamily="34" charset="-120"/>
-              </a:rPr>
-              <a:t>Segmentación de red</a:t>
-            </a:r>
-            <a:endParaRPr lang="en-US" sz="1400" dirty="0"/>
-          </a:p>
-        </p:txBody>
-      </p:sp>
-      <p:sp>
-        <p:nvSpPr>
-          <p:cNvPr id="10" name="Text 6"/>
-          <p:cNvSpPr/>
-          <p:nvPr/>
-        </p:nvSpPr>
-        <p:spPr>
-          <a:xfrm>
-            <a:off x="6766560" y="1618488"/>
-            <a:ext cx="4480560" cy="914400"/>
-          </a:xfrm>
-          <a:prstGeom prst="rect">
-            <a:avLst/>
-          </a:prstGeom>
-          <a:noFill/>
-          <a:ln/>
-        </p:spPr>
-        <p:txBody>
-          <a:bodyPr wrap="square" lIns="0" tIns="0" rIns="0" bIns="0" rtlCol="0" anchor="ctr"/>
-          <a:lstStyle/>
-          <a:p>
-            <a:pPr indent="0" marL="0">
-              <a:buNone/>
-            </a:pPr>
-            <a:r>
-              <a:rPr lang="en-US" sz="1100" dirty="0">
-                <a:solidFill>
-                  <a:srgbClr val="1F2937"/>
-                </a:solidFill>
-                <a:latin typeface="Arial" pitchFamily="34" charset="0"/>
-                <a:ea typeface="Arial" pitchFamily="34" charset="-122"/>
-                <a:cs typeface="Arial" pitchFamily="34" charset="-120"/>
-              </a:rPr>
-              <a:t>Subredes separadas para aplicación y datos; tráfico mínimo entre capas.</a:t>
-            </a:r>
-            <a:endParaRPr lang="en-US" sz="1100" dirty="0"/>
-          </a:p>
-        </p:txBody>
-      </p:sp>
-      <p:sp>
-        <p:nvSpPr>
-          <p:cNvPr id="11" name="Shape 7"/>
-          <p:cNvSpPr/>
-          <p:nvPr/>
-        </p:nvSpPr>
-        <p:spPr>
-          <a:xfrm>
-            <a:off x="548640" y="2880360"/>
-            <a:ext cx="502920" cy="502920"/>
-          </a:xfrm>
-          <a:prstGeom prst="ellipse">
-            <a:avLst/>
-          </a:prstGeom>
-          <a:solidFill>
-            <a:srgbClr val="EAF1F8"/>
-          </a:solidFill>
-          <a:ln/>
-        </p:spPr>
-      </p:sp>
-      <p:pic>
-        <p:nvPicPr>
-          <p:cNvPr id="12" name="Image 2" descr="preencoded.png">    </p:cNvPr>
+          <p:cNvPr id="4" name="Image 0" descr="preencoded.png"/>
           <p:cNvPicPr>
             <a:picLocks noChangeAspect="1"/>
           </p:cNvPicPr>
@@ -8124,7 +8063,7 @@
         </p:blipFill>
         <p:spPr>
           <a:xfrm>
-            <a:off x="679399" y="3011119"/>
+            <a:off x="679399" y="1456639"/>
             <a:ext cx="241402" cy="241402"/>
           </a:xfrm>
           <a:prstGeom prst="rect">
@@ -8134,13 +8073,13 @@
       </p:pic>
       <p:sp>
         <p:nvSpPr>
-          <p:cNvPr id="13" name="Text 8"/>
-          <p:cNvSpPr/>
-          <p:nvPr/>
-        </p:nvSpPr>
-        <p:spPr>
-          <a:xfrm>
-            <a:off x="1234440" y="2788920"/>
+          <p:cNvPr id="5" name="Text 2"/>
+          <p:cNvSpPr/>
+          <p:nvPr/>
+        </p:nvSpPr>
+        <p:spPr>
+          <a:xfrm>
+            <a:off x="1234440" y="1234440"/>
             <a:ext cx="4480560" cy="365760"/>
           </a:xfrm>
           <a:prstGeom prst="rect">
@@ -8153,7 +8092,7 @@
           <a:bodyPr wrap="square" lIns="0" tIns="0" rIns="0" bIns="0" rtlCol="0" anchor="ctr"/>
           <a:lstStyle/>
           <a:p>
-            <a:pPr indent="0" marL="0">
+            <a:pPr marL="0" indent="0">
               <a:buNone/>
             </a:pPr>
             <a:r>
@@ -8165,7 +8104,7 @@
                 <a:ea typeface="Arial" pitchFamily="34" charset="-122"/>
                 <a:cs typeface="Arial" pitchFamily="34" charset="-120"/>
               </a:rPr>
-              <a:t>Cifrado</a:t>
+              <a:t>Menor privilegio</a:t>
             </a:r>
             <a:endParaRPr lang="en-US" sz="1400" dirty="0"/>
           </a:p>
@@ -8173,13 +8112,13 @@
       </p:sp>
       <p:sp>
         <p:nvSpPr>
-          <p:cNvPr id="14" name="Text 9"/>
-          <p:cNvSpPr/>
-          <p:nvPr/>
-        </p:nvSpPr>
-        <p:spPr>
-          <a:xfrm>
-            <a:off x="1234440" y="3172968"/>
+          <p:cNvPr id="6" name="Text 3"/>
+          <p:cNvSpPr/>
+          <p:nvPr/>
+        </p:nvSpPr>
+        <p:spPr>
+          <a:xfrm>
+            <a:off x="1234440" y="1618488"/>
             <a:ext cx="4480560" cy="914400"/>
           </a:xfrm>
           <a:prstGeom prst="rect">
@@ -8192,7 +8131,7 @@
           <a:bodyPr wrap="square" lIns="0" tIns="0" rIns="0" bIns="0" rtlCol="0" anchor="ctr"/>
           <a:lstStyle/>
           <a:p>
-            <a:pPr indent="0" marL="0">
+            <a:pPr marL="0" indent="0">
               <a:buNone/>
             </a:pPr>
             <a:r>
@@ -8204,7 +8143,7 @@
                 <a:ea typeface="Arial" pitchFamily="34" charset="-122"/>
                 <a:cs typeface="Arial" pitchFamily="34" charset="-120"/>
               </a:rPr>
-              <a:t>HTTPS/TLS en tránsito; datos en reposo cifrados en RDS, DynamoDB y S3.</a:t>
+              <a:t>Roles IAM específicos por servicio, sin credenciales compartidas.</a:t>
             </a:r>
             <a:endParaRPr lang="en-US" sz="1100" dirty="0"/>
           </a:p>
@@ -8212,13 +8151,13 @@
       </p:sp>
       <p:sp>
         <p:nvSpPr>
-          <p:cNvPr id="15" name="Shape 10"/>
-          <p:cNvSpPr/>
-          <p:nvPr/>
-        </p:nvSpPr>
-        <p:spPr>
-          <a:xfrm>
-            <a:off x="6080760" y="2880360"/>
+          <p:cNvPr id="7" name="Shape 4"/>
+          <p:cNvSpPr/>
+          <p:nvPr/>
+        </p:nvSpPr>
+        <p:spPr>
+          <a:xfrm>
+            <a:off x="6080760" y="1325880"/>
             <a:ext cx="502920" cy="502920"/>
           </a:xfrm>
           <a:prstGeom prst="ellipse">
@@ -8229,10 +8168,17 @@
           </a:solidFill>
           <a:ln/>
         </p:spPr>
+        <p:txBody>
+          <a:bodyPr/>
+          <a:lstStyle/>
+          <a:p>
+            <a:endParaRPr lang="es-CL"/>
+          </a:p>
+        </p:txBody>
       </p:sp>
       <p:pic>
         <p:nvPicPr>
-          <p:cNvPr id="16" name="Image 3" descr="preencoded.png">    </p:cNvPr>
+          <p:cNvPr id="8" name="Image 1" descr="preencoded.png"/>
           <p:cNvPicPr>
             <a:picLocks noChangeAspect="1"/>
           </p:cNvPicPr>
@@ -8246,7 +8192,7 @@
         </p:blipFill>
         <p:spPr>
           <a:xfrm>
-            <a:off x="6211519" y="3011119"/>
+            <a:off x="6211519" y="1456639"/>
             <a:ext cx="241402" cy="241402"/>
           </a:xfrm>
           <a:prstGeom prst="rect">
@@ -8256,13 +8202,13 @@
       </p:pic>
       <p:sp>
         <p:nvSpPr>
-          <p:cNvPr id="17" name="Text 11"/>
-          <p:cNvSpPr/>
-          <p:nvPr/>
-        </p:nvSpPr>
-        <p:spPr>
-          <a:xfrm>
-            <a:off x="6766560" y="2788920"/>
+          <p:cNvPr id="9" name="Text 5"/>
+          <p:cNvSpPr/>
+          <p:nvPr/>
+        </p:nvSpPr>
+        <p:spPr>
+          <a:xfrm>
+            <a:off x="6766560" y="1234440"/>
             <a:ext cx="4480560" cy="365760"/>
           </a:xfrm>
           <a:prstGeom prst="rect">
@@ -8275,7 +8221,7 @@
           <a:bodyPr wrap="square" lIns="0" tIns="0" rIns="0" bIns="0" rtlCol="0" anchor="ctr"/>
           <a:lstStyle/>
           <a:p>
-            <a:pPr indent="0" marL="0">
+            <a:pPr marL="0" indent="0">
               <a:buNone/>
             </a:pPr>
             <a:r>
@@ -8287,7 +8233,7 @@
                 <a:ea typeface="Arial" pitchFamily="34" charset="-122"/>
                 <a:cs typeface="Arial" pitchFamily="34" charset="-120"/>
               </a:rPr>
-              <a:t>Alta disponibilidad</a:t>
+              <a:t>Segmentación de red</a:t>
             </a:r>
             <a:endParaRPr lang="en-US" sz="1400" dirty="0"/>
           </a:p>
@@ -8295,13 +8241,13 @@
       </p:sp>
       <p:sp>
         <p:nvSpPr>
-          <p:cNvPr id="18" name="Text 12"/>
-          <p:cNvSpPr/>
-          <p:nvPr/>
-        </p:nvSpPr>
-        <p:spPr>
-          <a:xfrm>
-            <a:off x="6766560" y="3172968"/>
+          <p:cNvPr id="10" name="Text 6"/>
+          <p:cNvSpPr/>
+          <p:nvPr/>
+        </p:nvSpPr>
+        <p:spPr>
+          <a:xfrm>
+            <a:off x="6766560" y="1618488"/>
             <a:ext cx="4480560" cy="914400"/>
           </a:xfrm>
           <a:prstGeom prst="rect">
@@ -8314,7 +8260,7 @@
           <a:bodyPr wrap="square" lIns="0" tIns="0" rIns="0" bIns="0" rtlCol="0" anchor="ctr"/>
           <a:lstStyle/>
           <a:p>
-            <a:pPr indent="0" marL="0">
+            <a:pPr marL="0" indent="0">
               <a:buNone/>
             </a:pPr>
             <a:r>
@@ -8326,7 +8272,7 @@
                 <a:ea typeface="Arial" pitchFamily="34" charset="-122"/>
                 <a:cs typeface="Arial" pitchFamily="34" charset="-120"/>
               </a:rPr>
-              <a:t>Despliegue en 2 zonas de disponibilidad para EC2, RDS y el ALB.</a:t>
+              <a:t>Subredes separadas para aplicación y datos; tráfico mínimo entre capas.</a:t>
             </a:r>
             <a:endParaRPr lang="en-US" sz="1100" dirty="0"/>
           </a:p>
@@ -8334,13 +8280,13 @@
       </p:sp>
       <p:sp>
         <p:nvSpPr>
-          <p:cNvPr id="19" name="Shape 13"/>
-          <p:cNvSpPr/>
-          <p:nvPr/>
-        </p:nvSpPr>
-        <p:spPr>
-          <a:xfrm>
-            <a:off x="548640" y="4434840"/>
+          <p:cNvPr id="11" name="Shape 7"/>
+          <p:cNvSpPr/>
+          <p:nvPr/>
+        </p:nvSpPr>
+        <p:spPr>
+          <a:xfrm>
+            <a:off x="548640" y="2880360"/>
             <a:ext cx="502920" cy="502920"/>
           </a:xfrm>
           <a:prstGeom prst="ellipse">
@@ -8351,10 +8297,17 @@
           </a:solidFill>
           <a:ln/>
         </p:spPr>
+        <p:txBody>
+          <a:bodyPr/>
+          <a:lstStyle/>
+          <a:p>
+            <a:endParaRPr lang="es-CL"/>
+          </a:p>
+        </p:txBody>
       </p:sp>
       <p:pic>
         <p:nvPicPr>
-          <p:cNvPr id="20" name="Image 4" descr="preencoded.png">    </p:cNvPr>
+          <p:cNvPr id="12" name="Image 2" descr="preencoded.png"/>
           <p:cNvPicPr>
             <a:picLocks noChangeAspect="1"/>
           </p:cNvPicPr>
@@ -8368,7 +8321,7 @@
         </p:blipFill>
         <p:spPr>
           <a:xfrm>
-            <a:off x="679399" y="4565599"/>
+            <a:off x="679399" y="3011119"/>
             <a:ext cx="241402" cy="241402"/>
           </a:xfrm>
           <a:prstGeom prst="rect">
@@ -8378,13 +8331,13 @@
       </p:pic>
       <p:sp>
         <p:nvSpPr>
-          <p:cNvPr id="21" name="Text 14"/>
-          <p:cNvSpPr/>
-          <p:nvPr/>
-        </p:nvSpPr>
-        <p:spPr>
-          <a:xfrm>
-            <a:off x="1234440" y="4343400"/>
+          <p:cNvPr id="13" name="Text 8"/>
+          <p:cNvSpPr/>
+          <p:nvPr/>
+        </p:nvSpPr>
+        <p:spPr>
+          <a:xfrm>
+            <a:off x="1234440" y="2788920"/>
             <a:ext cx="4480560" cy="365760"/>
           </a:xfrm>
           <a:prstGeom prst="rect">
@@ -8397,7 +8350,7 @@
           <a:bodyPr wrap="square" lIns="0" tIns="0" rIns="0" bIns="0" rtlCol="0" anchor="ctr"/>
           <a:lstStyle/>
           <a:p>
-            <a:pPr indent="0" marL="0">
+            <a:pPr marL="0" indent="0">
               <a:buNone/>
             </a:pPr>
             <a:r>
@@ -8409,7 +8362,7 @@
                 <a:ea typeface="Arial" pitchFamily="34" charset="-122"/>
                 <a:cs typeface="Arial" pitchFamily="34" charset="-120"/>
               </a:rPr>
-              <a:t>Backups y recuperación</a:t>
+              <a:t>Cifrado</a:t>
             </a:r>
             <a:endParaRPr lang="en-US" sz="1400" dirty="0"/>
           </a:p>
@@ -8417,13 +8370,13 @@
       </p:sp>
       <p:sp>
         <p:nvSpPr>
-          <p:cNvPr id="22" name="Text 15"/>
-          <p:cNvSpPr/>
-          <p:nvPr/>
-        </p:nvSpPr>
-        <p:spPr>
-          <a:xfrm>
-            <a:off x="1234440" y="4727448"/>
+          <p:cNvPr id="14" name="Text 9"/>
+          <p:cNvSpPr/>
+          <p:nvPr/>
+        </p:nvSpPr>
+        <p:spPr>
+          <a:xfrm>
+            <a:off x="1234440" y="3172968"/>
             <a:ext cx="4480560" cy="914400"/>
           </a:xfrm>
           <a:prstGeom prst="rect">
@@ -8436,7 +8389,7 @@
           <a:bodyPr wrap="square" lIns="0" tIns="0" rIns="0" bIns="0" rtlCol="0" anchor="ctr"/>
           <a:lstStyle/>
           <a:p>
-            <a:pPr indent="0" marL="0">
+            <a:pPr marL="0" indent="0">
               <a:buNone/>
             </a:pPr>
             <a:r>
@@ -8448,7 +8401,7 @@
                 <a:ea typeface="Arial" pitchFamily="34" charset="-122"/>
                 <a:cs typeface="Arial" pitchFamily="34" charset="-120"/>
               </a:rPr>
-              <a:t>Backups diarios en RDS, exportaciones de DynamoDB, versionado en S3.</a:t>
+              <a:t>HTTPS/TLS en tránsito; datos en reposo cifrados en RDS, DynamoDB y S3.</a:t>
             </a:r>
             <a:endParaRPr lang="en-US" sz="1100" dirty="0"/>
           </a:p>
@@ -8456,13 +8409,13 @@
       </p:sp>
       <p:sp>
         <p:nvSpPr>
-          <p:cNvPr id="23" name="Shape 16"/>
-          <p:cNvSpPr/>
-          <p:nvPr/>
-        </p:nvSpPr>
-        <p:spPr>
-          <a:xfrm>
-            <a:off x="6080760" y="4434840"/>
+          <p:cNvPr id="15" name="Shape 10"/>
+          <p:cNvSpPr/>
+          <p:nvPr/>
+        </p:nvSpPr>
+        <p:spPr>
+          <a:xfrm>
+            <a:off x="6080760" y="2880360"/>
             <a:ext cx="502920" cy="502920"/>
           </a:xfrm>
           <a:prstGeom prst="ellipse">
@@ -8473,10 +8426,17 @@
           </a:solidFill>
           <a:ln/>
         </p:spPr>
+        <p:txBody>
+          <a:bodyPr/>
+          <a:lstStyle/>
+          <a:p>
+            <a:endParaRPr lang="es-CL"/>
+          </a:p>
+        </p:txBody>
       </p:sp>
       <p:pic>
         <p:nvPicPr>
-          <p:cNvPr id="24" name="Image 5" descr="preencoded.png">    </p:cNvPr>
+          <p:cNvPr id="16" name="Image 3" descr="preencoded.png"/>
           <p:cNvPicPr>
             <a:picLocks noChangeAspect="1"/>
           </p:cNvPicPr>
@@ -8490,6 +8450,264 @@
         </p:blipFill>
         <p:spPr>
           <a:xfrm>
+            <a:off x="6211519" y="3011119"/>
+            <a:ext cx="241402" cy="241402"/>
+          </a:xfrm>
+          <a:prstGeom prst="rect">
+            <a:avLst/>
+          </a:prstGeom>
+        </p:spPr>
+      </p:pic>
+      <p:sp>
+        <p:nvSpPr>
+          <p:cNvPr id="17" name="Text 11"/>
+          <p:cNvSpPr/>
+          <p:nvPr/>
+        </p:nvSpPr>
+        <p:spPr>
+          <a:xfrm>
+            <a:off x="6766560" y="2788920"/>
+            <a:ext cx="4480560" cy="365760"/>
+          </a:xfrm>
+          <a:prstGeom prst="rect">
+            <a:avLst/>
+          </a:prstGeom>
+          <a:noFill/>
+          <a:ln/>
+        </p:spPr>
+        <p:txBody>
+          <a:bodyPr wrap="square" lIns="0" tIns="0" rIns="0" bIns="0" rtlCol="0" anchor="ctr"/>
+          <a:lstStyle/>
+          <a:p>
+            <a:pPr marL="0" indent="0">
+              <a:buNone/>
+            </a:pPr>
+            <a:r>
+              <a:rPr lang="en-US" sz="1400" b="1" dirty="0">
+                <a:solidFill>
+                  <a:srgbClr val="1F3864"/>
+                </a:solidFill>
+                <a:latin typeface="Arial" pitchFamily="34" charset="0"/>
+                <a:ea typeface="Arial" pitchFamily="34" charset="-122"/>
+                <a:cs typeface="Arial" pitchFamily="34" charset="-120"/>
+              </a:rPr>
+              <a:t>Alta disponibilidad</a:t>
+            </a:r>
+            <a:endParaRPr lang="en-US" sz="1400" dirty="0"/>
+          </a:p>
+        </p:txBody>
+      </p:sp>
+      <p:sp>
+        <p:nvSpPr>
+          <p:cNvPr id="18" name="Text 12"/>
+          <p:cNvSpPr/>
+          <p:nvPr/>
+        </p:nvSpPr>
+        <p:spPr>
+          <a:xfrm>
+            <a:off x="6766560" y="3172968"/>
+            <a:ext cx="4480560" cy="914400"/>
+          </a:xfrm>
+          <a:prstGeom prst="rect">
+            <a:avLst/>
+          </a:prstGeom>
+          <a:noFill/>
+          <a:ln/>
+        </p:spPr>
+        <p:txBody>
+          <a:bodyPr wrap="square" lIns="0" tIns="0" rIns="0" bIns="0" rtlCol="0" anchor="ctr"/>
+          <a:lstStyle/>
+          <a:p>
+            <a:pPr marL="0" indent="0">
+              <a:buNone/>
+            </a:pPr>
+            <a:r>
+              <a:rPr lang="en-US" sz="1100" dirty="0">
+                <a:solidFill>
+                  <a:srgbClr val="1F2937"/>
+                </a:solidFill>
+                <a:latin typeface="Arial" pitchFamily="34" charset="0"/>
+                <a:ea typeface="Arial" pitchFamily="34" charset="-122"/>
+                <a:cs typeface="Arial" pitchFamily="34" charset="-120"/>
+              </a:rPr>
+              <a:t>Despliegue en 2 zonas de disponibilidad para EC2, RDS y el ALB.</a:t>
+            </a:r>
+            <a:endParaRPr lang="en-US" sz="1100" dirty="0"/>
+          </a:p>
+        </p:txBody>
+      </p:sp>
+      <p:sp>
+        <p:nvSpPr>
+          <p:cNvPr id="19" name="Shape 13"/>
+          <p:cNvSpPr/>
+          <p:nvPr/>
+        </p:nvSpPr>
+        <p:spPr>
+          <a:xfrm>
+            <a:off x="548640" y="4434840"/>
+            <a:ext cx="502920" cy="502920"/>
+          </a:xfrm>
+          <a:prstGeom prst="ellipse">
+            <a:avLst/>
+          </a:prstGeom>
+          <a:solidFill>
+            <a:srgbClr val="EAF1F8"/>
+          </a:solidFill>
+          <a:ln/>
+        </p:spPr>
+        <p:txBody>
+          <a:bodyPr/>
+          <a:lstStyle/>
+          <a:p>
+            <a:endParaRPr lang="es-CL"/>
+          </a:p>
+        </p:txBody>
+      </p:sp>
+      <p:pic>
+        <p:nvPicPr>
+          <p:cNvPr id="20" name="Image 4" descr="preencoded.png"/>
+          <p:cNvPicPr>
+            <a:picLocks noChangeAspect="1"/>
+          </p:cNvPicPr>
+          <p:nvPr/>
+        </p:nvPicPr>
+        <p:blipFill>
+          <a:blip r:embed="rId7"/>
+          <a:stretch>
+            <a:fillRect/>
+          </a:stretch>
+        </p:blipFill>
+        <p:spPr>
+          <a:xfrm>
+            <a:off x="679399" y="4565599"/>
+            <a:ext cx="241402" cy="241402"/>
+          </a:xfrm>
+          <a:prstGeom prst="rect">
+            <a:avLst/>
+          </a:prstGeom>
+        </p:spPr>
+      </p:pic>
+      <p:sp>
+        <p:nvSpPr>
+          <p:cNvPr id="21" name="Text 14"/>
+          <p:cNvSpPr/>
+          <p:nvPr/>
+        </p:nvSpPr>
+        <p:spPr>
+          <a:xfrm>
+            <a:off x="1234440" y="4343400"/>
+            <a:ext cx="4480560" cy="365760"/>
+          </a:xfrm>
+          <a:prstGeom prst="rect">
+            <a:avLst/>
+          </a:prstGeom>
+          <a:noFill/>
+          <a:ln/>
+        </p:spPr>
+        <p:txBody>
+          <a:bodyPr wrap="square" lIns="0" tIns="0" rIns="0" bIns="0" rtlCol="0" anchor="ctr"/>
+          <a:lstStyle/>
+          <a:p>
+            <a:pPr marL="0" indent="0">
+              <a:buNone/>
+            </a:pPr>
+            <a:r>
+              <a:rPr lang="en-US" sz="1400" b="1" dirty="0">
+                <a:solidFill>
+                  <a:srgbClr val="1F3864"/>
+                </a:solidFill>
+                <a:latin typeface="Arial" pitchFamily="34" charset="0"/>
+                <a:ea typeface="Arial" pitchFamily="34" charset="-122"/>
+                <a:cs typeface="Arial" pitchFamily="34" charset="-120"/>
+              </a:rPr>
+              <a:t>Backups y recuperación</a:t>
+            </a:r>
+            <a:endParaRPr lang="en-US" sz="1400" dirty="0"/>
+          </a:p>
+        </p:txBody>
+      </p:sp>
+      <p:sp>
+        <p:nvSpPr>
+          <p:cNvPr id="22" name="Text 15"/>
+          <p:cNvSpPr/>
+          <p:nvPr/>
+        </p:nvSpPr>
+        <p:spPr>
+          <a:xfrm>
+            <a:off x="1234440" y="4727448"/>
+            <a:ext cx="4480560" cy="914400"/>
+          </a:xfrm>
+          <a:prstGeom prst="rect">
+            <a:avLst/>
+          </a:prstGeom>
+          <a:noFill/>
+          <a:ln/>
+        </p:spPr>
+        <p:txBody>
+          <a:bodyPr wrap="square" lIns="0" tIns="0" rIns="0" bIns="0" rtlCol="0" anchor="ctr"/>
+          <a:lstStyle/>
+          <a:p>
+            <a:pPr marL="0" indent="0">
+              <a:buNone/>
+            </a:pPr>
+            <a:r>
+              <a:rPr lang="en-US" sz="1100" dirty="0">
+                <a:solidFill>
+                  <a:srgbClr val="1F2937"/>
+                </a:solidFill>
+                <a:latin typeface="Arial" pitchFamily="34" charset="0"/>
+                <a:ea typeface="Arial" pitchFamily="34" charset="-122"/>
+                <a:cs typeface="Arial" pitchFamily="34" charset="-120"/>
+              </a:rPr>
+              <a:t>Backups diarios en RDS, exportaciones de DynamoDB, versionado en S3.</a:t>
+            </a:r>
+            <a:endParaRPr lang="en-US" sz="1100" dirty="0"/>
+          </a:p>
+        </p:txBody>
+      </p:sp>
+      <p:sp>
+        <p:nvSpPr>
+          <p:cNvPr id="23" name="Shape 16"/>
+          <p:cNvSpPr/>
+          <p:nvPr/>
+        </p:nvSpPr>
+        <p:spPr>
+          <a:xfrm>
+            <a:off x="6080760" y="4434840"/>
+            <a:ext cx="502920" cy="502920"/>
+          </a:xfrm>
+          <a:prstGeom prst="ellipse">
+            <a:avLst/>
+          </a:prstGeom>
+          <a:solidFill>
+            <a:srgbClr val="EAF1F8"/>
+          </a:solidFill>
+          <a:ln/>
+        </p:spPr>
+        <p:txBody>
+          <a:bodyPr/>
+          <a:lstStyle/>
+          <a:p>
+            <a:endParaRPr lang="es-CL"/>
+          </a:p>
+        </p:txBody>
+      </p:sp>
+      <p:pic>
+        <p:nvPicPr>
+          <p:cNvPr id="24" name="Image 5" descr="preencoded.png"/>
+          <p:cNvPicPr>
+            <a:picLocks noChangeAspect="1"/>
+          </p:cNvPicPr>
+          <p:nvPr/>
+        </p:nvPicPr>
+        <p:blipFill>
+          <a:blip r:embed="rId8"/>
+          <a:stretch>
+            <a:fillRect/>
+          </a:stretch>
+        </p:blipFill>
+        <p:spPr>
+          <a:xfrm>
             <a:off x="6211519" y="4565599"/>
             <a:ext cx="241402" cy="241402"/>
           </a:xfrm>
@@ -8519,7 +8737,7 @@
           <a:bodyPr wrap="square" lIns="0" tIns="0" rIns="0" bIns="0" rtlCol="0" anchor="ctr"/>
           <a:lstStyle/>
           <a:p>
-            <a:pPr indent="0" marL="0">
+            <a:pPr marL="0" indent="0">
               <a:buNone/>
             </a:pPr>
             <a:r>
@@ -8558,7 +8776,7 @@
           <a:bodyPr wrap="square" lIns="0" tIns="0" rIns="0" bIns="0" rtlCol="0" anchor="ctr"/>
           <a:lstStyle/>
           <a:p>
-            <a:pPr indent="0" marL="0">
+            <a:pPr marL="0" indent="0">
               <a:buNone/>
             </a:pPr>
             <a:r>
@@ -8597,9 +8815,6 @@
           <a:bodyPr wrap="square" lIns="0" tIns="0" rIns="0" bIns="0" rtlCol="0" anchor="ctr"/>
           <a:lstStyle/>
           <a:p>
-            <a:pPr algn="l" indent="0" marL="0">
-              <a:buNone/>
-            </a:pPr>
             <a:r>
               <a:rPr lang="en-US" sz="1000" dirty="0">
                 <a:solidFill>
@@ -8609,7 +8824,18 @@
                 <a:ea typeface="Arial" pitchFamily="34" charset="-122"/>
                 <a:cs typeface="Arial" pitchFamily="34" charset="-120"/>
               </a:rPr>
-              <a:t>Infraestructura Viva  ·  Módulo 4  ·  Alkemy</a:t>
+              <a:t>Infraestructura Viva  ·  Módulo 4  · </a:t>
+            </a:r>
+            <a:r>
+              <a:rPr lang="en-US" sz="1000" dirty="0">
+                <a:solidFill>
+                  <a:srgbClr val="6E86AC"/>
+                </a:solidFill>
+                <a:latin typeface="Arial" pitchFamily="34" charset="0"/>
+                <a:ea typeface="Arial" pitchFamily="34" charset="-122"/>
+                <a:cs typeface="Arial" pitchFamily="34" charset="-120"/>
+              </a:rPr>
+              <a:t>GRUPO 01</a:t>
             </a:r>
             <a:endParaRPr lang="en-US" sz="1000" dirty="0"/>
           </a:p>
@@ -8636,7 +8862,7 @@
           <a:bodyPr wrap="square" lIns="0" tIns="0" rIns="0" bIns="0" rtlCol="0" anchor="ctr"/>
           <a:lstStyle/>
           <a:p>
-            <a:pPr algn="r" indent="0" marL="0">
+            <a:pPr marL="0" indent="0" algn="r">
               <a:buNone/>
             </a:pPr>
             <a:r>
@@ -8955,4 +9181,319 @@
     </a:ext>
   </a:extLst>
 </a:theme>
+</file>
+
+<file path=ppt/theme/theme2.xml><?xml version="1.0" encoding="utf-8"?>
+<a:theme xmlns:a="http://schemas.openxmlformats.org/drawingml/2006/main" name="Tema de Office">
+  <a:themeElements>
+    <a:clrScheme name="Office">
+      <a:dk1>
+        <a:sysClr val="windowText" lastClr="000000"/>
+      </a:dk1>
+      <a:lt1>
+        <a:sysClr val="window" lastClr="FFFFFF"/>
+      </a:lt1>
+      <a:dk2>
+        <a:srgbClr val="0E2841"/>
+      </a:dk2>
+      <a:lt2>
+        <a:srgbClr val="E8E8E8"/>
+      </a:lt2>
+      <a:accent1>
+        <a:srgbClr val="156082"/>
+      </a:accent1>
+      <a:accent2>
+        <a:srgbClr val="E97132"/>
+      </a:accent2>
+      <a:accent3>
+        <a:srgbClr val="196B24"/>
+      </a:accent3>
+      <a:accent4>
+        <a:srgbClr val="0F9ED5"/>
+      </a:accent4>
+      <a:accent5>
+        <a:srgbClr val="A02B93"/>
+      </a:accent5>
+      <a:accent6>
+        <a:srgbClr val="4EA72E"/>
+      </a:accent6>
+      <a:hlink>
+        <a:srgbClr val="467886"/>
+      </a:hlink>
+      <a:folHlink>
+        <a:srgbClr val="96607D"/>
+      </a:folHlink>
+    </a:clrScheme>
+    <a:fontScheme name="Office">
+      <a:majorFont>
+        <a:latin typeface="Aptos Display" panose="02110004020202020204"/>
+        <a:ea typeface=""/>
+        <a:cs typeface=""/>
+        <a:font script="Jpan" typeface="游ゴシック Light"/>
+        <a:font script="Hang" typeface="맑은 고딕"/>
+        <a:font script="Hans" typeface="等线 Light"/>
+        <a:font script="Hant" typeface="新細明體"/>
+        <a:font script="Arab" typeface="Times New Roman"/>
+        <a:font script="Hebr" typeface="Times New Roman"/>
+        <a:font script="Thai" typeface="Angsana New"/>
+        <a:font script="Ethi" typeface="Nyala"/>
+        <a:font script="Beng" typeface="Vrinda"/>
+        <a:font script="Gujr" typeface="Shruti"/>
+        <a:font script="Khmr" typeface="MoolBoran"/>
+        <a:font script="Knda" typeface="Tunga"/>
+        <a:font script="Guru" typeface="Raavi"/>
+        <a:font script="Cans" typeface="Euphemia"/>
+        <a:font script="Cher" typeface="Plantagenet Cherokee"/>
+        <a:font script="Yiii" typeface="Microsoft Yi Baiti"/>
+        <a:font script="Tibt" typeface="Microsoft Himalaya"/>
+        <a:font script="Thaa" typeface="MV Boli"/>
+        <a:font script="Deva" typeface="Mangal"/>
+        <a:font script="Telu" typeface="Gautami"/>
+        <a:font script="Taml" typeface="Latha"/>
+        <a:font script="Syrc" typeface="Estrangelo Edessa"/>
+        <a:font script="Orya" typeface="Kalinga"/>
+        <a:font script="Mlym" typeface="Kartika"/>
+        <a:font script="Laoo" typeface="DokChampa"/>
+        <a:font script="Sinh" typeface="Iskoola Pota"/>
+        <a:font script="Mong" typeface="Mongolian Baiti"/>
+        <a:font script="Viet" typeface="Times New Roman"/>
+        <a:font script="Uigh" typeface="Microsoft Uighur"/>
+        <a:font script="Geor" typeface="Sylfaen"/>
+        <a:font script="Armn" typeface="Arial"/>
+        <a:font script="Bugi" typeface="Leelawadee UI"/>
+        <a:font script="Bopo" typeface="Microsoft JhengHei"/>
+        <a:font script="Java" typeface="Javanese Text"/>
+        <a:font script="Lisu" typeface="Segoe UI"/>
+        <a:font script="Mymr" typeface="Myanmar Text"/>
+        <a:font script="Nkoo" typeface="Ebrima"/>
+        <a:font script="Olck" typeface="Nirmala UI"/>
+        <a:font script="Osma" typeface="Ebrima"/>
+        <a:font script="Phag" typeface="Phagspa"/>
+        <a:font script="Syrn" typeface="Estrangelo Edessa"/>
+        <a:font script="Syrj" typeface="Estrangelo Edessa"/>
+        <a:font script="Syre" typeface="Estrangelo Edessa"/>
+        <a:font script="Sora" typeface="Nirmala UI"/>
+        <a:font script="Tale" typeface="Microsoft Tai Le"/>
+        <a:font script="Talu" typeface="Microsoft New Tai Lue"/>
+        <a:font script="Tfng" typeface="Ebrima"/>
+      </a:majorFont>
+      <a:minorFont>
+        <a:latin typeface="Aptos" panose="02110004020202020204"/>
+        <a:ea typeface=""/>
+        <a:cs typeface=""/>
+        <a:font script="Jpan" typeface="游ゴシック"/>
+        <a:font script="Hang" typeface="맑은 고딕"/>
+        <a:font script="Hans" typeface="等线"/>
+        <a:font script="Hant" typeface="新細明體"/>
+        <a:font script="Arab" typeface="Arial"/>
+        <a:font script="Hebr" typeface="Arial"/>
+        <a:font script="Thai" typeface="Cordia New"/>
+        <a:font script="Ethi" typeface="Nyala"/>
+        <a:font script="Beng" typeface="Vrinda"/>
+        <a:font script="Gujr" typeface="Shruti"/>
+        <a:font script="Khmr" typeface="DaunPenh"/>
+        <a:font script="Knda" typeface="Tunga"/>
+        <a:font script="Guru" typeface="Raavi"/>
+        <a:font script="Cans" typeface="Euphemia"/>
+        <a:font script="Cher" typeface="Plantagenet Cherokee"/>
+        <a:font script="Yiii" typeface="Microsoft Yi Baiti"/>
+        <a:font script="Tibt" typeface="Microsoft Himalaya"/>
+        <a:font script="Thaa" typeface="MV Boli"/>
+        <a:font script="Deva" typeface="Mangal"/>
+        <a:font script="Telu" typeface="Gautami"/>
+        <a:font script="Taml" typeface="Latha"/>
+        <a:font script="Syrc" typeface="Estrangelo Edessa"/>
+        <a:font script="Orya" typeface="Kalinga"/>
+        <a:font script="Mlym" typeface="Kartika"/>
+        <a:font script="Laoo" typeface="DokChampa"/>
+        <a:font script="Sinh" typeface="Iskoola Pota"/>
+        <a:font script="Mong" typeface="Mongolian Baiti"/>
+        <a:font script="Viet" typeface="Arial"/>
+        <a:font script="Uigh" typeface="Microsoft Uighur"/>
+        <a:font script="Geor" typeface="Sylfaen"/>
+        <a:font script="Armn" typeface="Arial"/>
+        <a:font script="Bugi" typeface="Leelawadee UI"/>
+        <a:font script="Bopo" typeface="Microsoft JhengHei"/>
+        <a:font script="Java" typeface="Javanese Text"/>
+        <a:font script="Lisu" typeface="Segoe UI"/>
+        <a:font script="Mymr" typeface="Myanmar Text"/>
+        <a:font script="Nkoo" typeface="Ebrima"/>
+        <a:font script="Olck" typeface="Nirmala UI"/>
+        <a:font script="Osma" typeface="Ebrima"/>
+        <a:font script="Phag" typeface="Phagspa"/>
+        <a:font script="Syrn" typeface="Estrangelo Edessa"/>
+        <a:font script="Syrj" typeface="Estrangelo Edessa"/>
+        <a:font script="Syre" typeface="Estrangelo Edessa"/>
+        <a:font script="Sora" typeface="Nirmala UI"/>
+        <a:font script="Tale" typeface="Microsoft Tai Le"/>
+        <a:font script="Talu" typeface="Microsoft New Tai Lue"/>
+        <a:font script="Tfng" typeface="Ebrima"/>
+      </a:minorFont>
+    </a:fontScheme>
+    <a:fmtScheme name="Office">
+      <a:fillStyleLst>
+        <a:solidFill>
+          <a:schemeClr val="phClr"/>
+        </a:solidFill>
+        <a:gradFill rotWithShape="1">
+          <a:gsLst>
+            <a:gs pos="0">
+              <a:schemeClr val="phClr">
+                <a:lumMod val="110000"/>
+                <a:satMod val="105000"/>
+                <a:tint val="67000"/>
+              </a:schemeClr>
+            </a:gs>
+            <a:gs pos="50000">
+              <a:schemeClr val="phClr">
+                <a:lumMod val="105000"/>
+                <a:satMod val="103000"/>
+                <a:tint val="73000"/>
+              </a:schemeClr>
+            </a:gs>
+            <a:gs pos="100000">
+              <a:schemeClr val="phClr">
+                <a:lumMod val="105000"/>
+                <a:satMod val="109000"/>
+                <a:tint val="81000"/>
+              </a:schemeClr>
+            </a:gs>
+          </a:gsLst>
+          <a:lin ang="5400000" scaled="0"/>
+        </a:gradFill>
+        <a:gradFill rotWithShape="1">
+          <a:gsLst>
+            <a:gs pos="0">
+              <a:schemeClr val="phClr">
+                <a:satMod val="103000"/>
+                <a:lumMod val="102000"/>
+                <a:tint val="94000"/>
+              </a:schemeClr>
+            </a:gs>
+            <a:gs pos="50000">
+              <a:schemeClr val="phClr">
+                <a:satMod val="110000"/>
+                <a:lumMod val="100000"/>
+                <a:shade val="100000"/>
+              </a:schemeClr>
+            </a:gs>
+            <a:gs pos="100000">
+              <a:schemeClr val="phClr">
+                <a:lumMod val="99000"/>
+                <a:satMod val="120000"/>
+                <a:shade val="78000"/>
+              </a:schemeClr>
+            </a:gs>
+          </a:gsLst>
+          <a:lin ang="5400000" scaled="0"/>
+        </a:gradFill>
+      </a:fillStyleLst>
+      <a:lnStyleLst>
+        <a:ln w="12700" cap="flat" cmpd="sng" algn="ctr">
+          <a:solidFill>
+            <a:schemeClr val="phClr"/>
+          </a:solidFill>
+          <a:prstDash val="solid"/>
+          <a:miter lim="800000"/>
+        </a:ln>
+        <a:ln w="19050" cap="flat" cmpd="sng" algn="ctr">
+          <a:solidFill>
+            <a:schemeClr val="phClr"/>
+          </a:solidFill>
+          <a:prstDash val="solid"/>
+          <a:miter lim="800000"/>
+        </a:ln>
+        <a:ln w="25400" cap="flat" cmpd="sng" algn="ctr">
+          <a:solidFill>
+            <a:schemeClr val="phClr"/>
+          </a:solidFill>
+          <a:prstDash val="solid"/>
+          <a:miter lim="800000"/>
+        </a:ln>
+      </a:lnStyleLst>
+      <a:effectStyleLst>
+        <a:effectStyle>
+          <a:effectLst/>
+        </a:effectStyle>
+        <a:effectStyle>
+          <a:effectLst/>
+        </a:effectStyle>
+        <a:effectStyle>
+          <a:effectLst>
+            <a:outerShdw blurRad="57150" dist="19050" dir="5400000" algn="ctr" rotWithShape="0">
+              <a:srgbClr val="000000">
+                <a:alpha val="63000"/>
+              </a:srgbClr>
+            </a:outerShdw>
+          </a:effectLst>
+        </a:effectStyle>
+      </a:effectStyleLst>
+      <a:bgFillStyleLst>
+        <a:solidFill>
+          <a:schemeClr val="phClr"/>
+        </a:solidFill>
+        <a:solidFill>
+          <a:schemeClr val="phClr">
+            <a:tint val="95000"/>
+            <a:satMod val="170000"/>
+          </a:schemeClr>
+        </a:solidFill>
+        <a:gradFill rotWithShape="1">
+          <a:gsLst>
+            <a:gs pos="0">
+              <a:schemeClr val="phClr">
+                <a:tint val="93000"/>
+                <a:satMod val="150000"/>
+                <a:shade val="98000"/>
+                <a:lumMod val="102000"/>
+              </a:schemeClr>
+            </a:gs>
+            <a:gs pos="50000">
+              <a:schemeClr val="phClr">
+                <a:tint val="98000"/>
+                <a:satMod val="130000"/>
+                <a:shade val="90000"/>
+                <a:lumMod val="103000"/>
+              </a:schemeClr>
+            </a:gs>
+            <a:gs pos="100000">
+              <a:schemeClr val="phClr">
+                <a:shade val="63000"/>
+                <a:satMod val="120000"/>
+              </a:schemeClr>
+            </a:gs>
+          </a:gsLst>
+          <a:lin ang="5400000" scaled="0"/>
+        </a:gradFill>
+      </a:bgFillStyleLst>
+    </a:fmtScheme>
+  </a:themeElements>
+  <a:objectDefaults>
+    <a:lnDef>
+      <a:spPr/>
+      <a:bodyPr/>
+      <a:lstStyle/>
+      <a:style>
+        <a:lnRef idx="2">
+          <a:schemeClr val="accent1"/>
+        </a:lnRef>
+        <a:fillRef idx="0">
+          <a:schemeClr val="accent1"/>
+        </a:fillRef>
+        <a:effectRef idx="1">
+          <a:schemeClr val="accent1"/>
+        </a:effectRef>
+        <a:fontRef idx="minor">
+          <a:schemeClr val="tx1"/>
+        </a:fontRef>
+      </a:style>
+    </a:lnDef>
+  </a:objectDefaults>
+  <a:extraClrSchemeLst/>
+  <a:extLst>
+    <a:ext uri="{05A4C25C-085E-4340-85A3-A5531E510DB2}">
+      <thm15:themeFamily xmlns:thm15="http://schemas.microsoft.com/office/thememl/2012/main" name="Office Theme" id="{2E142A2C-CD16-42D6-873A-C26D2A0506FA}" vid="{1BDDFF52-6CD6-40A5-AB3C-68EB2F1E4D0A}"/>
+    </a:ext>
+  </a:extLst>
+</a:theme>
 </file>
--- a/docs/Infraestructura_Viva_Presentacion.pptx
+++ b/docs/Infraestructura_Viva_Presentacion.pptx
@@ -2821,7 +2821,7 @@
                 <a:ea typeface="Arial" pitchFamily="34" charset="-122"/>
                 <a:cs typeface="Arial" pitchFamily="34" charset="-120"/>
               </a:rPr>
-              <a:t>github.com/Martliz/infraestructura-viva</a:t>
+              <a:t>https://github.com/Martliz/infraestructura-viva.git</a:t>
             </a:r>
             <a:endParaRPr lang="en-US" sz="1600" dirty="0"/>
           </a:p>
